--- a/examples/repositories/japanese-corporate/deck.pptx
+++ b/examples/repositories/japanese-corporate/deck.pptx
@@ -542,7 +542,7 @@
           <a:lstStyle xmlns:a="http://schemas.openxmlformats.org/drawingml/2006/main"/>
           <a:p xmlns:a="http://schemas.openxmlformats.org/drawingml/2006/main">
             <a:r>
-              <a:t>くらし便 EC事業 9月報告。架空のEC月次報告。商品説明の修正と粗利分析を先行。広告増額は次回の確認後に判断する。</a:t>
+              <a:t>架空のEC月次報告。今回の判断は商品説明修正と粗利分析への着手。広告増額は別判断である。</a:t>
             </a:r>
           </a:p>
         </p:txBody>
@@ -612,7 +612,7 @@
           <a:lstStyle xmlns:a="http://schemas.openxmlformats.org/drawingml/2006/main"/>
           <a:p xmlns:a="http://schemas.openxmlformats.org/drawingml/2006/main">
             <a:r>
-              <a:t>自然検索が増収200万円の45%を占める。架空のEC月次報告。商品説明の修正と粗利分析を先行。広告増額は次回の確認後に判断する。</a:t>
+              <a:t>増収200万円のうち自然検索90万円で45%、メール50万円で25%。合わせて70%。売上寄与は利益改善の証拠ではない。</a:t>
             </a:r>
           </a:p>
         </p:txBody>
@@ -682,7 +682,7 @@
           <a:lstStyle xmlns:a="http://schemas.openxmlformats.org/drawingml/2006/main"/>
           <a:p xmlns:a="http://schemas.openxmlformats.org/drawingml/2006/main">
             <a:r>
-              <a:t>商品説明の修正と粗利分析を先行する。架空のEC月次報告。商品説明の修正と粗利分析を先行。広告増額は次回の確認後に判断する。</a:t>
+              <a:t>提案・要確認・継続審議を色と文字で区別する。担当と期限を確認し、次回は分類表・改稿記録・粗利差分を持ち寄る。着手や承認の実績は示していない。</a:t>
             </a:r>
           </a:p>
         </p:txBody>
@@ -752,7 +752,7 @@
           <a:lstStyle xmlns:a="http://schemas.openxmlformats.org/drawingml/2006/main"/>
           <a:p xmlns:a="http://schemas.openxmlformats.org/drawingml/2006/main">
             <a:r>
-              <a:t>売上増と利益・返品の変化を分けて確認。架空のEC月次報告。商品説明の修正と粗利分析を先行。広告増額は次回の確認後に判断する。</a:t>
+              <a:t>売上は20%増えた一方、粗利率は2ポイント低下し返品率は2ポイント上昇。粗利額は380万円から432万円へ52万円増えた。率と額を分けて読む。</a:t>
             </a:r>
           </a:p>
         </p:txBody>
@@ -822,7 +822,7 @@
           <a:lstStyle xmlns:a="http://schemas.openxmlformats.org/drawingml/2006/main"/>
           <a:p xmlns:a="http://schemas.openxmlformats.org/drawingml/2006/main">
             <a:r>
-              <a:t>販売・商品・顧客対応で確認結果を引き継ぐ。架空のEC月次報告。商品説明の修正と粗利分析を先行。広告増額は次回の確認後に判断する。</a:t>
+              <a:t>上の四つの帯は段階名。実際の受け渡しは担当をまたぐ線で示す。商品・販売が対象一覧を顧客対応へ渡し、顧客対応は返品理由を分類する。分類表を受けた事業責任者は、理由分類が完了したかを判断する。不足なら再分類へ戻す。完了なら修正対象を商品・販売へ渡す。改稿記録を顧客対応が照合し、新たな返品記録を商品・販売へ渡す。効果と商品別粗利がそろってから事業責任者が広告増額を判断する。分類率100%は10月9日の目標で実績ではない。</a:t>
             </a:r>
           </a:p>
         </p:txBody>
@@ -892,7 +892,7 @@
           <a:lstStyle xmlns:a="http://schemas.openxmlformats.org/drawingml/2006/main"/>
           <a:p xmlns:a="http://schemas.openxmlformats.org/drawingml/2006/main">
             <a:r>
-              <a:t>返品理由の分類を、説明修正と効果確認につなぐ。架空のEC月次報告。商品説明の修正と粗利分析を先行。広告増額は次回の確認後に判断する。</a:t>
+              <a:t>返品理由を顧客対応が分類し、商品担当が説明を修正する。説明と実物の差は仮説で、分類・修正記録・返品率を照合して判断する。</a:t>
             </a:r>
           </a:p>
         </p:txBody>
@@ -1899,7 +1899,7 @@
               </a:defRPr>
             </a:pPr>
             <a:r>
-              <a:rPr sz="2100" b="1" i="0">
+              <a:rPr sz="2100" b="1" i="0" u="none">
                 <a:solidFill>
                   <a:srgbClr val="FFFFFF"/>
                 </a:solidFill>
@@ -1994,7 +1994,7 @@
               </a:defRPr>
             </a:pPr>
             <a:r>
-              <a:rPr sz="1125" b="1" i="0">
+              <a:rPr sz="1125" b="1" i="0" u="none">
                 <a:solidFill>
                   <a:srgbClr val="FFFFFF"/>
                 </a:solidFill>
@@ -2163,7 +2163,7 @@
               </a:defRPr>
             </a:pPr>
             <a:r>
-              <a:rPr sz="975" b="0" i="0">
+              <a:rPr sz="975" b="0" i="0" u="none">
                 <a:solidFill>
                   <a:srgbClr val="FFFFFF"/>
                 </a:solidFill>
@@ -2221,7 +2221,7 @@
               </a:defRPr>
             </a:pPr>
             <a:r>
-              <a:rPr sz="975" b="0" i="0">
+              <a:rPr sz="975" b="0" i="0" u="none">
                 <a:solidFill>
                   <a:srgbClr val="666666"/>
                 </a:solidFill>
@@ -2279,7 +2279,7 @@
               </a:defRPr>
             </a:pPr>
             <a:r>
-              <a:rPr sz="3150" b="1" i="0">
+              <a:rPr sz="3150" b="1" i="0" u="none">
                 <a:solidFill>
                   <a:srgbClr val="111111"/>
                 </a:solidFill>
@@ -2337,7 +2337,7 @@
               </a:defRPr>
             </a:pPr>
             <a:r>
-              <a:rPr sz="1650" b="1" i="0">
+              <a:rPr sz="1650" b="1" i="0" u="none">
                 <a:solidFill>
                   <a:srgbClr val="0B5AA6"/>
                 </a:solidFill>
@@ -2432,7 +2432,7 @@
               </a:defRPr>
             </a:pPr>
             <a:r>
-              <a:rPr sz="1350" b="0" i="0">
+              <a:rPr sz="1350" b="0" i="0" u="none">
                 <a:solidFill>
                   <a:srgbClr val="111111"/>
                 </a:solidFill>
@@ -2455,7 +2455,7 @@
               </a:defRPr>
             </a:pPr>
             <a:r>
-              <a:rPr sz="1350" b="0" i="0">
+              <a:rPr sz="1350" b="0" i="0" u="none">
                 <a:solidFill>
                   <a:srgbClr val="111111"/>
                 </a:solidFill>
@@ -2478,7 +2478,7 @@
               </a:defRPr>
             </a:pPr>
             <a:r>
-              <a:rPr sz="1350" b="0" i="0">
+              <a:rPr sz="1350" b="0" i="0" u="none">
                 <a:solidFill>
                   <a:srgbClr val="111111"/>
                 </a:solidFill>
@@ -2573,7 +2573,7 @@
               </a:defRPr>
             </a:pPr>
             <a:r>
-              <a:rPr sz="1275" b="1" i="0">
+              <a:rPr sz="1275" b="1" i="0" u="none">
                 <a:solidFill>
                   <a:srgbClr val="FFFFFF"/>
                 </a:solidFill>
@@ -2668,7 +2668,7 @@
               </a:defRPr>
             </a:pPr>
             <a:r>
-              <a:rPr sz="1200" b="1" i="0">
+              <a:rPr sz="1200" b="1" i="0" u="none">
                 <a:solidFill>
                   <a:srgbClr val="111111"/>
                 </a:solidFill>
@@ -2726,7 +2726,7 @@
               </a:defRPr>
             </a:pPr>
             <a:r>
-              <a:rPr sz="1275" b="0" i="0">
+              <a:rPr sz="1275" b="0" i="0" u="none">
                 <a:solidFill>
                   <a:srgbClr val="111111"/>
                 </a:solidFill>
@@ -2784,7 +2784,7 @@
               </a:defRPr>
             </a:pPr>
             <a:r>
-              <a:rPr sz="1125" b="0" i="0">
+              <a:rPr sz="1125" b="0" i="0" u="none">
                 <a:solidFill>
                   <a:srgbClr val="666666"/>
                 </a:solidFill>
@@ -2879,7 +2879,7 @@
               </a:defRPr>
             </a:pPr>
             <a:r>
-              <a:rPr sz="1200" b="1" i="0">
+              <a:rPr sz="1200" b="1" i="0" u="none">
                 <a:solidFill>
                   <a:srgbClr val="111111"/>
                 </a:solidFill>
@@ -2937,7 +2937,7 @@
               </a:defRPr>
             </a:pPr>
             <a:r>
-              <a:rPr sz="1275" b="1" i="0">
+              <a:rPr sz="1275" b="1" i="0" u="none">
                 <a:solidFill>
                   <a:srgbClr val="111111"/>
                 </a:solidFill>
@@ -2995,7 +2995,7 @@
               </a:defRPr>
             </a:pPr>
             <a:r>
-              <a:rPr sz="1125" b="0" i="0">
+              <a:rPr sz="1125" b="0" i="0" u="none">
                 <a:solidFill>
                   <a:srgbClr val="666666"/>
                 </a:solidFill>
@@ -3090,7 +3090,7 @@
               </a:defRPr>
             </a:pPr>
             <a:r>
-              <a:rPr sz="1200" b="1" i="0">
+              <a:rPr sz="1200" b="1" i="0" u="none">
                 <a:solidFill>
                   <a:srgbClr val="111111"/>
                 </a:solidFill>
@@ -3148,7 +3148,7 @@
               </a:defRPr>
             </a:pPr>
             <a:r>
-              <a:rPr sz="1275" b="0" i="0">
+              <a:rPr sz="1275" b="0" i="0" u="none">
                 <a:solidFill>
                   <a:srgbClr val="111111"/>
                 </a:solidFill>
@@ -3206,7 +3206,7 @@
               </a:defRPr>
             </a:pPr>
             <a:r>
-              <a:rPr sz="1125" b="0" i="0">
+              <a:rPr sz="1125" b="0" i="0" u="none">
                 <a:solidFill>
                   <a:srgbClr val="666666"/>
                 </a:solidFill>
@@ -3301,7 +3301,7 @@
               </a:defRPr>
             </a:pPr>
             <a:r>
-              <a:rPr sz="1200" b="1" i="0">
+              <a:rPr sz="1200" b="1" i="0" u="none">
                 <a:solidFill>
                   <a:srgbClr val="111111"/>
                 </a:solidFill>
@@ -3359,7 +3359,7 @@
               </a:defRPr>
             </a:pPr>
             <a:r>
-              <a:rPr sz="1275" b="0" i="0">
+              <a:rPr sz="1275" b="0" i="0" u="none">
                 <a:solidFill>
                   <a:srgbClr val="111111"/>
                 </a:solidFill>
@@ -3417,7 +3417,7 @@
               </a:defRPr>
             </a:pPr>
             <a:r>
-              <a:rPr sz="1125" b="0" i="0">
+              <a:rPr sz="1125" b="0" i="0" u="none">
                 <a:solidFill>
                   <a:srgbClr val="666666"/>
                 </a:solidFill>
@@ -3475,7 +3475,7 @@
               </a:defRPr>
             </a:pPr>
             <a:r>
-              <a:rPr sz="675" b="0" i="0">
+              <a:rPr sz="675" b="0" i="0" u="none">
                 <a:solidFill>
                   <a:srgbClr val="666666"/>
                 </a:solidFill>
@@ -3599,7 +3599,7 @@
               </a:defRPr>
             </a:pPr>
             <a:r>
-              <a:rPr sz="2100" b="1" i="0">
+              <a:rPr sz="2100" b="1" i="0" u="none">
                 <a:solidFill>
                   <a:srgbClr val="FFFFFF"/>
                 </a:solidFill>
@@ -3694,7 +3694,7 @@
               </a:defRPr>
             </a:pPr>
             <a:r>
-              <a:rPr sz="1125" b="1" i="0">
+              <a:rPr sz="1125" b="1" i="0" u="none">
                 <a:solidFill>
                   <a:srgbClr val="FFFFFF"/>
                 </a:solidFill>
@@ -3863,7 +3863,7 @@
               </a:defRPr>
             </a:pPr>
             <a:r>
-              <a:rPr sz="975" b="0" i="0">
+              <a:rPr sz="975" b="0" i="0" u="none">
                 <a:solidFill>
                   <a:srgbClr val="FFFFFF"/>
                 </a:solidFill>
@@ -3921,7 +3921,7 @@
               </a:defRPr>
             </a:pPr>
             <a:r>
-              <a:rPr sz="975" b="0" i="0">
+              <a:rPr sz="975" b="0" i="0" u="none">
                 <a:solidFill>
                   <a:srgbClr val="666666"/>
                 </a:solidFill>
@@ -3979,7 +3979,7 @@
               </a:defRPr>
             </a:pPr>
             <a:r>
-              <a:rPr sz="2100" b="1" i="0">
+              <a:rPr sz="2100" b="1" i="0" u="none">
                 <a:solidFill>
                   <a:srgbClr val="111111"/>
                 </a:solidFill>
@@ -4037,7 +4037,7 @@
               </a:defRPr>
             </a:pPr>
             <a:r>
-              <a:rPr sz="1125" b="1" i="0">
+              <a:rPr sz="1125" b="1" i="0" u="none">
                 <a:solidFill>
                   <a:srgbClr val="2474B5"/>
                 </a:solidFill>
@@ -4148,7 +4148,7 @@
               </a:defRPr>
             </a:pPr>
             <a:r>
-              <a:rPr sz="975" b="1" i="0">
+              <a:rPr sz="975" b="1" i="0" u="none">
                 <a:solidFill>
                   <a:srgbClr val="C00000"/>
                 </a:solidFill>
@@ -4171,7 +4171,7 @@
               </a:defRPr>
             </a:pPr>
             <a:r>
-              <a:rPr sz="975" b="1" i="0">
+              <a:rPr sz="975" b="1" i="0" u="none">
                 <a:solidFill>
                   <a:srgbClr val="C00000"/>
                 </a:solidFill>
@@ -4266,7 +4266,7 @@
               </a:defRPr>
             </a:pPr>
             <a:r>
-              <a:rPr sz="1275" b="1" i="0">
+              <a:rPr sz="1275" b="1" i="0" u="none">
                 <a:solidFill>
                   <a:srgbClr val="FFFFFF"/>
                 </a:solidFill>
@@ -4361,7 +4361,7 @@
               </a:defRPr>
             </a:pPr>
             <a:r>
-              <a:rPr sz="1200" b="1" i="0">
+              <a:rPr sz="1200" b="1" i="0" u="none">
                 <a:solidFill>
                   <a:srgbClr val="0B5AA6"/>
                 </a:solidFill>
@@ -4419,7 +4419,7 @@
               </a:defRPr>
             </a:pPr>
             <a:r>
-              <a:rPr sz="1050" b="0" i="0">
+              <a:rPr sz="1050" b="0" i="0" u="none">
                 <a:solidFill>
                   <a:srgbClr val="111111"/>
                 </a:solidFill>
@@ -4514,7 +4514,7 @@
               </a:defRPr>
             </a:pPr>
             <a:r>
-              <a:rPr sz="1200" b="1" i="0">
+              <a:rPr sz="1200" b="1" i="0" u="none">
                 <a:solidFill>
                   <a:srgbClr val="0B5AA6"/>
                 </a:solidFill>
@@ -4572,7 +4572,7 @@
               </a:defRPr>
             </a:pPr>
             <a:r>
-              <a:rPr sz="1050" b="0" i="0">
+              <a:rPr sz="1050" b="0" i="0" u="none">
                 <a:solidFill>
                   <a:srgbClr val="111111"/>
                 </a:solidFill>
@@ -4667,7 +4667,7 @@
               </a:defRPr>
             </a:pPr>
             <a:r>
-              <a:rPr sz="1200" b="1" i="0">
+              <a:rPr sz="1200" b="1" i="0" u="none">
                 <a:solidFill>
                   <a:srgbClr val="0B5AA6"/>
                 </a:solidFill>
@@ -4725,7 +4725,7 @@
               </a:defRPr>
             </a:pPr>
             <a:r>
-              <a:rPr sz="1050" b="0" i="0">
+              <a:rPr sz="1050" b="0" i="0" u="none">
                 <a:solidFill>
                   <a:srgbClr val="111111"/>
                 </a:solidFill>
@@ -4820,7 +4820,7 @@
               </a:defRPr>
             </a:pPr>
             <a:r>
-              <a:rPr sz="1200" b="1" i="0">
+              <a:rPr sz="1200" b="1" i="0" u="none">
                 <a:solidFill>
                   <a:srgbClr val="C00000"/>
                 </a:solidFill>
@@ -4878,7 +4878,7 @@
               </a:defRPr>
             </a:pPr>
             <a:r>
-              <a:rPr sz="1050" b="1" i="0">
+              <a:rPr sz="1050" b="1" i="0" u="none">
                 <a:solidFill>
                   <a:srgbClr val="111111"/>
                 </a:solidFill>
@@ -4973,7 +4973,7 @@
               </a:defRPr>
             </a:pPr>
             <a:r>
-              <a:rPr sz="1125" b="1" i="0">
+              <a:rPr sz="1125" b="1" i="0" u="none">
                 <a:solidFill>
                   <a:srgbClr val="C00000"/>
                 </a:solidFill>
@@ -5031,7 +5031,7 @@
               </a:defRPr>
             </a:pPr>
             <a:r>
-              <a:rPr sz="750" b="0" i="0">
+              <a:rPr sz="750" b="0" i="0" u="none">
                 <a:solidFill>
                   <a:srgbClr val="666666"/>
                 </a:solidFill>
@@ -5163,7 +5163,7 @@
               </a:defRPr>
             </a:pPr>
             <a:r>
-              <a:rPr sz="1200" b="1" i="0">
+              <a:rPr sz="1200" b="1" i="0" u="none">
                 <a:solidFill>
                   <a:srgbClr val="FFFFFF"/>
                 </a:solidFill>
@@ -5221,7 +5221,7 @@
               </a:defRPr>
             </a:pPr>
             <a:r>
-              <a:rPr sz="1275" b="1" i="0">
+              <a:rPr sz="1275" b="1" i="0" u="none">
                 <a:solidFill>
                   <a:srgbClr val="111111"/>
                 </a:solidFill>
@@ -5279,7 +5279,7 @@
               </a:defRPr>
             </a:pPr>
             <a:r>
-              <a:rPr sz="675" b="0" i="0">
+              <a:rPr sz="675" b="0" i="0" u="none">
                 <a:solidFill>
                   <a:srgbClr val="666666"/>
                 </a:solidFill>
@@ -5403,7 +5403,7 @@
               </a:defRPr>
             </a:pPr>
             <a:r>
-              <a:rPr sz="2100" b="1" i="0">
+              <a:rPr sz="2100" b="1" i="0" u="none">
                 <a:solidFill>
                   <a:srgbClr val="FFFFFF"/>
                 </a:solidFill>
@@ -5498,7 +5498,7 @@
               </a:defRPr>
             </a:pPr>
             <a:r>
-              <a:rPr sz="1125" b="1" i="0">
+              <a:rPr sz="1125" b="1" i="0" u="none">
                 <a:solidFill>
                   <a:srgbClr val="FFFFFF"/>
                 </a:solidFill>
@@ -5667,7 +5667,7 @@
               </a:defRPr>
             </a:pPr>
             <a:r>
-              <a:rPr sz="975" b="0" i="0">
+              <a:rPr sz="975" b="0" i="0" u="none">
                 <a:solidFill>
                   <a:srgbClr val="FFFFFF"/>
                 </a:solidFill>
@@ -5725,7 +5725,7 @@
               </a:defRPr>
             </a:pPr>
             <a:r>
-              <a:rPr sz="975" b="0" i="0">
+              <a:rPr sz="975" b="0" i="0" u="none">
                 <a:solidFill>
                   <a:srgbClr val="666666"/>
                 </a:solidFill>
@@ -5783,7 +5783,7 @@
               </a:defRPr>
             </a:pPr>
             <a:r>
-              <a:rPr sz="2025" b="1" i="0">
+              <a:rPr sz="2025" b="1" i="0" u="none">
                 <a:solidFill>
                   <a:srgbClr val="111111"/>
                 </a:solidFill>
@@ -5878,7 +5878,7 @@
               </a:defRPr>
             </a:pPr>
             <a:r>
-              <a:rPr sz="900" b="1" i="0">
+              <a:rPr sz="900" b="1" i="0" u="none">
                 <a:solidFill>
                   <a:srgbClr val="C00000"/>
                 </a:solidFill>
@@ -5901,7 +5901,7 @@
               </a:defRPr>
             </a:pPr>
             <a:r>
-              <a:rPr sz="900" b="1" i="0">
+              <a:rPr sz="900" b="1" i="0" u="none">
                 <a:solidFill>
                   <a:srgbClr val="C00000"/>
                 </a:solidFill>
@@ -5996,7 +5996,7 @@
               </a:defRPr>
             </a:pPr>
             <a:r>
-              <a:rPr sz="975" b="1" i="0">
+              <a:rPr sz="975" b="1" i="0" u="none">
                 <a:solidFill>
                   <a:srgbClr val="111111"/>
                 </a:solidFill>
@@ -6900,7 +6900,7 @@
                       <a:r>
                         <a:rPr sz="900" b="1">
                           <a:solidFill>
-                            <a:srgbClr val="111111"/>
+                            <a:srgbClr val="FFFFFF"/>
                           </a:solidFill>
                           <a:latin typeface="BIZ UDPゴシック"/>
                           <a:ea typeface="BIZ UDPゴシック"/>
@@ -7180,7 +7180,7 @@
               </a:defRPr>
             </a:pPr>
             <a:r>
-              <a:rPr sz="975" b="1" i="0">
+              <a:rPr sz="975" b="1" i="0" u="none">
                 <a:solidFill>
                   <a:srgbClr val="111111"/>
                 </a:solidFill>
@@ -7203,7 +7203,7 @@
               </a:defRPr>
             </a:pPr>
             <a:r>
-              <a:rPr sz="975" b="1" i="0">
+              <a:rPr sz="975" b="1" i="0" u="none">
                 <a:solidFill>
                   <a:srgbClr val="111111"/>
                 </a:solidFill>
@@ -7226,7 +7226,7 @@
               </a:defRPr>
             </a:pPr>
             <a:r>
-              <a:rPr sz="975" b="1" i="0">
+              <a:rPr sz="975" b="1" i="0" u="none">
                 <a:solidFill>
                   <a:srgbClr val="111111"/>
                 </a:solidFill>
@@ -7321,7 +7321,7 @@
               </a:defRPr>
             </a:pPr>
             <a:r>
-              <a:rPr sz="975" b="1" i="0">
+              <a:rPr sz="975" b="1" i="0" u="none">
                 <a:solidFill>
                   <a:srgbClr val="C00000"/>
                 </a:solidFill>
@@ -7344,7 +7344,7 @@
               </a:defRPr>
             </a:pPr>
             <a:r>
-              <a:rPr sz="975" b="1" i="0">
+              <a:rPr sz="975" b="1" i="0" u="none">
                 <a:solidFill>
                   <a:srgbClr val="C00000"/>
                 </a:solidFill>
@@ -7367,7 +7367,7 @@
               </a:defRPr>
             </a:pPr>
             <a:r>
-              <a:rPr sz="975" b="1" i="0">
+              <a:rPr sz="975" b="1" i="0" u="none">
                 <a:solidFill>
                   <a:srgbClr val="C00000"/>
                 </a:solidFill>
@@ -7499,7 +7499,7 @@
               </a:defRPr>
             </a:pPr>
             <a:r>
-              <a:rPr sz="1200" b="1" i="0">
+              <a:rPr sz="1200" b="1" i="0" u="none">
                 <a:solidFill>
                   <a:srgbClr val="FFFFFF"/>
                 </a:solidFill>
@@ -7557,7 +7557,7 @@
               </a:defRPr>
             </a:pPr>
             <a:r>
-              <a:rPr sz="1275" b="1" i="0">
+              <a:rPr sz="1275" b="1" i="0" u="none">
                 <a:solidFill>
                   <a:srgbClr val="111111"/>
                 </a:solidFill>
@@ -7615,7 +7615,7 @@
               </a:defRPr>
             </a:pPr>
             <a:r>
-              <a:rPr sz="675" b="0" i="0">
+              <a:rPr sz="675" b="0" i="0" u="none">
                 <a:solidFill>
                   <a:srgbClr val="666666"/>
                 </a:solidFill>
@@ -7739,7 +7739,7 @@
               </a:defRPr>
             </a:pPr>
             <a:r>
-              <a:rPr sz="2100" b="1" i="0">
+              <a:rPr sz="2100" b="1" i="0" u="none">
                 <a:solidFill>
                   <a:srgbClr val="FFFFFF"/>
                 </a:solidFill>
@@ -7834,7 +7834,7 @@
               </a:defRPr>
             </a:pPr>
             <a:r>
-              <a:rPr sz="1125" b="1" i="0">
+              <a:rPr sz="1125" b="1" i="0" u="none">
                 <a:solidFill>
                   <a:srgbClr val="FFFFFF"/>
                 </a:solidFill>
@@ -8003,7 +8003,7 @@
               </a:defRPr>
             </a:pPr>
             <a:r>
-              <a:rPr sz="975" b="0" i="0">
+              <a:rPr sz="975" b="0" i="0" u="none">
                 <a:solidFill>
                   <a:srgbClr val="FFFFFF"/>
                 </a:solidFill>
@@ -8061,7 +8061,7 @@
               </a:defRPr>
             </a:pPr>
             <a:r>
-              <a:rPr sz="975" b="0" i="0">
+              <a:rPr sz="975" b="0" i="0" u="none">
                 <a:solidFill>
                   <a:srgbClr val="666666"/>
                 </a:solidFill>
@@ -8108,7 +8108,7 @@
           </a:bodyPr>
           <a:lstStyle xmlns:a="http://schemas.openxmlformats.org/drawingml/2006/main"/>
           <a:p xmlns:a="http://schemas.openxmlformats.org/drawingml/2006/main">
-            <a:pPr algn="ctr">
+            <a:pPr algn="l">
               <a:defRPr sz="2325" b="1" i="0" u="sng">
                 <a:solidFill>
                   <a:srgbClr val="2F2FFF"/>
@@ -8119,9 +8119,9 @@
               </a:defRPr>
             </a:pPr>
             <a:r>
-              <a:rPr sz="2325" b="1" i="0" u="sng">
-                <a:solidFill>
-                  <a:srgbClr val="2F2FFF"/>
+              <a:rPr sz="2325" b="1" i="0" u="none">
+                <a:solidFill>
+                  <a:srgbClr val="111111"/>
                 </a:solidFill>
                 <a:latin typeface="BIZ UDPゴシック"/>
                 <a:ea typeface="BIZ UDPゴシック"/>
@@ -8148,8 +8148,8 @@
         </p:nvSpPr>
         <p:spPr>
           <a:xfrm xmlns:a="http://schemas.openxmlformats.org/drawingml/2006/main">
-            <a:off x="266700" y="1371600"/>
-            <a:ext cx="11620500" cy="1219200"/>
+            <a:off x="523951" y="1325880"/>
+            <a:ext cx="11620500" cy="384048"/>
           </a:xfrm>
           <a:prstGeom xmlns:a="http://schemas.openxmlformats.org/drawingml/2006/main" prst="rect">
             <a:avLst/>
@@ -8177,7 +8177,7 @@
               </a:defRPr>
             </a:pPr>
             <a:r>
-              <a:rPr sz="1875" b="1" i="0">
+              <a:rPr sz="2100" b="1" i="0" u="none">
                 <a:solidFill>
                   <a:srgbClr val="111111"/>
                 </a:solidFill>
@@ -8185,30 +8185,7 @@
                 <a:ea typeface="BIZ UDPゴシック"/>
                 <a:cs typeface="BIZ UDPゴシック"/>
               </a:rPr>
-              <a:t>● 売上は1,000万円から1,200万円へ20%増加</a:t>
-            </a:r>
-          </a:p>
-          <a:p xmlns:a="http://schemas.openxmlformats.org/drawingml/2006/main">
-            <a:pPr algn="l">
-              <a:defRPr sz="1875" b="1" i="0">
-                <a:solidFill>
-                  <a:srgbClr val="111111"/>
-                </a:solidFill>
-                <a:latin typeface="BIZ UDPゴシック"/>
-                <a:ea typeface="BIZ UDPゴシック"/>
-                <a:cs typeface="BIZ UDPゴシック"/>
-              </a:defRPr>
-            </a:pPr>
-            <a:r>
-              <a:rPr sz="1875" b="1" i="0">
-                <a:solidFill>
-                  <a:srgbClr val="111111"/>
-                </a:solidFill>
-                <a:latin typeface="BIZ UDPゴシック"/>
-                <a:ea typeface="BIZ UDPゴシック"/>
-                <a:cs typeface="BIZ UDPゴシック"/>
-              </a:rPr>
-              <a:t>● 粗利率は38%から36%へ低下し、返品率は4%から6%へ上昇</a:t>
+              <a:t>売上20%増。粗利率は低下し、返品率は上昇</a:t>
             </a:r>
           </a:p>
         </p:txBody>
@@ -8229,8 +8206,8 @@
         </p:nvSpPr>
         <p:spPr>
           <a:xfrm xmlns:a="http://schemas.openxmlformats.org/drawingml/2006/main">
-            <a:off x="514350" y="2724150"/>
-            <a:ext cx="11144250" cy="990600"/>
+            <a:off x="514350" y="3803904"/>
+            <a:ext cx="11144250" cy="365760"/>
           </a:xfrm>
           <a:prstGeom xmlns:a="http://schemas.openxmlformats.org/drawingml/2006/main" prst="rect">
             <a:avLst/>
@@ -8262,7 +8239,7 @@
               </a:defRPr>
             </a:pPr>
             <a:r>
-              <a:rPr sz="1350" b="0" i="1">
+              <a:rPr sz="1200" b="0" i="0" u="none">
                 <a:solidFill>
                   <a:srgbClr val="111111"/>
                 </a:solidFill>
@@ -8270,30 +8247,7 @@
                 <a:ea typeface="BIZ UDPゴシック"/>
                 <a:cs typeface="BIZ UDPゴシック"/>
               </a:rPr>
-              <a:t>対象：2026年9月と2025年9月の同月比較</a:t>
-            </a:r>
-          </a:p>
-          <a:p xmlns:a="http://schemas.openxmlformats.org/drawingml/2006/main">
-            <a:pPr algn="l">
-              <a:defRPr sz="1350" b="0" i="1">
-                <a:solidFill>
-                  <a:srgbClr val="111111"/>
-                </a:solidFill>
-                <a:latin typeface="BIZ UDPゴシック"/>
-                <a:ea typeface="BIZ UDPゴシック"/>
-                <a:cs typeface="BIZ UDPゴシック"/>
-              </a:defRPr>
-            </a:pPr>
-            <a:r>
-              <a:rPr sz="1350" b="0" i="1">
-                <a:solidFill>
-                  <a:srgbClr val="111111"/>
-                </a:solidFill>
-                <a:latin typeface="BIZ UDPゴシック"/>
-                <a:ea typeface="BIZ UDPゴシック"/>
-                <a:cs typeface="BIZ UDPゴシック"/>
-              </a:rPr>
-              <a:t>率の差は「ポイント」で表記し、売上の増加率と区別する</a:t>
+              <a:t>比較：2026年9月と2025年9月。率の差はポイント、売上の変化は増加率で表示</a:t>
             </a:r>
           </a:p>
         </p:txBody>
@@ -8314,8 +8268,8 @@
         </p:nvSpPr>
         <p:spPr>
           <a:xfrm xmlns:a="http://schemas.openxmlformats.org/drawingml/2006/main">
-            <a:off x="523875" y="3895725"/>
-            <a:ext cx="11144250" cy="1638300"/>
+            <a:off x="523875" y="4379976"/>
+            <a:ext cx="11144250" cy="1152144"/>
           </a:xfrm>
           <a:prstGeom xmlns:a="http://schemas.openxmlformats.org/drawingml/2006/main" prst="rect">
             <a:avLst/>
@@ -8351,8 +8305,8 @@
         </p:nvSpPr>
         <p:spPr>
           <a:xfrm xmlns:a="http://schemas.openxmlformats.org/drawingml/2006/main">
-            <a:off x="685800" y="4029075"/>
-            <a:ext cx="8572500" cy="304800"/>
+            <a:off x="685800" y="4498848"/>
+            <a:ext cx="10789920" cy="310896"/>
           </a:xfrm>
           <a:prstGeom xmlns:a="http://schemas.openxmlformats.org/drawingml/2006/main" prst="rect">
             <a:avLst/>
@@ -8380,7 +8334,7 @@
               </a:defRPr>
             </a:pPr>
             <a:r>
-              <a:rPr sz="1650" b="1" i="0">
+              <a:rPr sz="1700" b="1" i="0" u="none">
                 <a:solidFill>
                   <a:srgbClr val="111111"/>
                 </a:solidFill>
@@ -8388,7 +8342,7 @@
                 <a:ea typeface="BIZ UDPゴシック"/>
                 <a:cs typeface="BIZ UDPゴシック"/>
               </a:rPr>
-              <a:t>※ 粗利額と返品率を同時に確認</a:t>
+              <a:t>粗利額は52万円増加。率低下の要因は未確認</a:t>
             </a:r>
           </a:p>
         </p:txBody>
@@ -8409,8 +8363,8 @@
         </p:nvSpPr>
         <p:spPr>
           <a:xfrm xmlns:a="http://schemas.openxmlformats.org/drawingml/2006/main">
-            <a:off x="723900" y="4400550"/>
-            <a:ext cx="10620375" cy="971550"/>
+            <a:off x="723900" y="4910328"/>
+            <a:ext cx="10620375" cy="512064"/>
           </a:xfrm>
           <a:prstGeom xmlns:a="http://schemas.openxmlformats.org/drawingml/2006/main" prst="rect">
             <a:avLst/>
@@ -8438,7 +8392,7 @@
               </a:defRPr>
             </a:pPr>
             <a:r>
-              <a:rPr sz="1275" b="0" i="0">
+              <a:rPr sz="1400" b="0" i="0" u="none">
                 <a:solidFill>
                   <a:srgbClr val="111111"/>
                 </a:solidFill>
@@ -8446,7 +8400,7 @@
                 <a:ea typeface="BIZ UDPゴシック"/>
                 <a:cs typeface="BIZ UDPゴシック"/>
               </a:rPr>
-              <a:t>・前年の粗利額：1,000万円 × 38% = 380万円</a:t>
+              <a:t>前年：1,000万円 × 38% ＝ 380万円</a:t>
             </a:r>
           </a:p>
           <a:p xmlns:a="http://schemas.openxmlformats.org/drawingml/2006/main">
@@ -8461,7 +8415,7 @@
               </a:defRPr>
             </a:pPr>
             <a:r>
-              <a:rPr sz="1275" b="0" i="0">
+              <a:rPr sz="1400" b="0" i="0" u="none">
                 <a:solidFill>
                   <a:srgbClr val="111111"/>
                 </a:solidFill>
@@ -8469,30 +8423,7 @@
                 <a:ea typeface="BIZ UDPゴシック"/>
                 <a:cs typeface="BIZ UDPゴシック"/>
               </a:rPr>
-              <a:t>・当月の粗利額：1,200万円 × 36% = 432万円</a:t>
-            </a:r>
-          </a:p>
-          <a:p xmlns:a="http://schemas.openxmlformats.org/drawingml/2006/main">
-            <a:pPr algn="l">
-              <a:defRPr sz="1275" b="0" i="0">
-                <a:solidFill>
-                  <a:srgbClr val="111111"/>
-                </a:solidFill>
-                <a:latin typeface="BIZ UDPゴシック"/>
-                <a:ea typeface="BIZ UDPゴシック"/>
-                <a:cs typeface="BIZ UDPゴシック"/>
-              </a:defRPr>
-            </a:pPr>
-            <a:r>
-              <a:rPr sz="1275" b="0" i="0">
-                <a:solidFill>
-                  <a:srgbClr val="111111"/>
-                </a:solidFill>
-                <a:latin typeface="BIZ UDPゴシック"/>
-                <a:ea typeface="BIZ UDPゴシック"/>
-                <a:cs typeface="BIZ UDPゴシック"/>
-              </a:rPr>
-              <a:t>・粗利額は52万円増加したが、率の低下要因は未確認</a:t>
+              <a:t>当月：1,200万円 × 36% ＝ 432万円</a:t>
             </a:r>
           </a:p>
         </p:txBody>
@@ -8616,7 +8547,7 @@
               </a:defRPr>
             </a:pPr>
             <a:r>
-              <a:rPr sz="1200" b="1" i="0">
+              <a:rPr sz="1200" b="1" i="0" u="none">
                 <a:solidFill>
                   <a:srgbClr val="FFFFFF"/>
                 </a:solidFill>
@@ -8674,7 +8605,7 @@
               </a:defRPr>
             </a:pPr>
             <a:r>
-              <a:rPr sz="1275" b="1" i="0">
+              <a:rPr sz="1275" b="1" i="0" u="none">
                 <a:solidFill>
                   <a:srgbClr val="111111"/>
                 </a:solidFill>
@@ -8732,7 +8663,7 @@
               </a:defRPr>
             </a:pPr>
             <a:r>
-              <a:rPr sz="675" b="0" i="0">
+              <a:rPr sz="675" b="0" i="0" u="none">
                 <a:solidFill>
                   <a:srgbClr val="666666"/>
                 </a:solidFill>
@@ -8745,6 +8676,394 @@
           </a:p>
         </p:txBody>
       </p:sp>
+      <p:graphicFrame xmlns:a="http://schemas.openxmlformats.org/drawingml/2006/main">
+        <p:nvGraphicFramePr>
+          <p:cNvPr id="22" name="page-02-native-metric-table"/>
+          <p:cNvGraphicFramePr>
+            <a:graphicFrameLocks noGrp="1"/>
+          </p:cNvGraphicFramePr>
+          <p:nvPr/>
+        </p:nvGraphicFramePr>
+        <p:xfrm>
+          <a:off x="523951" y="1847088"/>
+          <a:ext cx="11144707" cy="1847088"/>
+        </p:xfrm>
+        <a:graphic>
+          <a:graphicData uri="http://schemas.openxmlformats.org/drawingml/2006/table">
+            <a:tbl>
+              <a:tblPr firstRow="1" bandRow="1">
+                <a:tableStyleId>{5C22544A-7EE6-4342-B048-85BDC9FD1C3A}</a:tableStyleId>
+              </a:tblPr>
+              <a:tblGrid>
+                <a:gridCol w="3383280"/>
+                <a:gridCol w="2606040"/>
+                <a:gridCol w="2606040"/>
+                <a:gridCol w="2549347"/>
+              </a:tblGrid>
+              <a:tr h="461772">
+                <a:tc>
+                  <a:txBody>
+                    <a:bodyPr/>
+                    <a:lstStyle/>
+                    <a:p>
+                      <a:r>
+                        <a:rPr sz="1600" b="1">
+                          <a:solidFill>
+                            <a:srgbClr val="FFFFFF"/>
+                          </a:solidFill>
+                          <a:latin typeface="BIZ UDPゴシック"/>
+                        </a:rPr>
+                        <a:t>指標</a:t>
+                      </a:r>
+                    </a:p>
+                  </a:txBody>
+                  <a:tcPr marL="118872" marR="91440" marT="64008" marB="45720">
+                    <a:solidFill>
+                      <a:srgbClr val="2474B5"/>
+                    </a:solidFill>
+                  </a:tcPr>
+                </a:tc>
+                <a:tc>
+                  <a:txBody>
+                    <a:bodyPr/>
+                    <a:lstStyle/>
+                    <a:p>
+                      <a:r>
+                        <a:rPr sz="1600" b="1">
+                          <a:solidFill>
+                            <a:srgbClr val="FFFFFF"/>
+                          </a:solidFill>
+                          <a:latin typeface="BIZ UDPゴシック"/>
+                        </a:rPr>
+                        <a:t>2025年9月</a:t>
+                      </a:r>
+                    </a:p>
+                  </a:txBody>
+                  <a:tcPr marL="118872" marR="91440" marT="64008" marB="45720">
+                    <a:solidFill>
+                      <a:srgbClr val="2474B5"/>
+                    </a:solidFill>
+                  </a:tcPr>
+                </a:tc>
+                <a:tc>
+                  <a:txBody>
+                    <a:bodyPr/>
+                    <a:lstStyle/>
+                    <a:p>
+                      <a:r>
+                        <a:rPr sz="1600" b="1">
+                          <a:solidFill>
+                            <a:srgbClr val="FFFFFF"/>
+                          </a:solidFill>
+                          <a:latin typeface="BIZ UDPゴシック"/>
+                        </a:rPr>
+                        <a:t>2026年9月</a:t>
+                      </a:r>
+                    </a:p>
+                  </a:txBody>
+                  <a:tcPr marL="118872" marR="91440" marT="64008" marB="45720">
+                    <a:solidFill>
+                      <a:srgbClr val="2474B5"/>
+                    </a:solidFill>
+                  </a:tcPr>
+                </a:tc>
+                <a:tc>
+                  <a:txBody>
+                    <a:bodyPr/>
+                    <a:lstStyle/>
+                    <a:p>
+                      <a:r>
+                        <a:rPr sz="1600" b="1">
+                          <a:solidFill>
+                            <a:srgbClr val="FFFFFF"/>
+                          </a:solidFill>
+                          <a:latin typeface="BIZ UDPゴシック"/>
+                        </a:rPr>
+                        <a:t>変化</a:t>
+                      </a:r>
+                    </a:p>
+                  </a:txBody>
+                  <a:tcPr marL="118872" marR="91440" marT="64008" marB="45720">
+                    <a:solidFill>
+                      <a:srgbClr val="2474B5"/>
+                    </a:solidFill>
+                  </a:tcPr>
+                </a:tc>
+              </a:tr>
+              <a:tr h="461772">
+                <a:tc>
+                  <a:txBody>
+                    <a:bodyPr/>
+                    <a:lstStyle/>
+                    <a:p>
+                      <a:r>
+                        <a:rPr sz="1700" b="0">
+                          <a:solidFill>
+                            <a:srgbClr val="111111"/>
+                          </a:solidFill>
+                          <a:latin typeface="BIZ UDPゴシック"/>
+                        </a:rPr>
+                        <a:t>売上</a:t>
+                      </a:r>
+                    </a:p>
+                  </a:txBody>
+                  <a:tcPr marL="118872" marR="91440" marT="64008" marB="45720">
+                    <a:solidFill>
+                      <a:srgbClr val="FFFFFF"/>
+                    </a:solidFill>
+                  </a:tcPr>
+                </a:tc>
+                <a:tc>
+                  <a:txBody>
+                    <a:bodyPr/>
+                    <a:lstStyle/>
+                    <a:p>
+                      <a:r>
+                        <a:rPr sz="1700" b="0">
+                          <a:solidFill>
+                            <a:srgbClr val="111111"/>
+                          </a:solidFill>
+                          <a:latin typeface="BIZ UDPゴシック"/>
+                        </a:rPr>
+                        <a:t>1,000万円</a:t>
+                      </a:r>
+                    </a:p>
+                  </a:txBody>
+                  <a:tcPr marL="118872" marR="91440" marT="64008" marB="45720">
+                    <a:solidFill>
+                      <a:srgbClr val="FFFFFF"/>
+                    </a:solidFill>
+                  </a:tcPr>
+                </a:tc>
+                <a:tc>
+                  <a:txBody>
+                    <a:bodyPr/>
+                    <a:lstStyle/>
+                    <a:p>
+                      <a:r>
+                        <a:rPr sz="1700" b="0">
+                          <a:solidFill>
+                            <a:srgbClr val="111111"/>
+                          </a:solidFill>
+                          <a:latin typeface="BIZ UDPゴシック"/>
+                        </a:rPr>
+                        <a:t>1,200万円</a:t>
+                      </a:r>
+                    </a:p>
+                  </a:txBody>
+                  <a:tcPr marL="118872" marR="91440" marT="64008" marB="45720">
+                    <a:solidFill>
+                      <a:srgbClr val="FFFFFF"/>
+                    </a:solidFill>
+                  </a:tcPr>
+                </a:tc>
+                <a:tc>
+                  <a:txBody>
+                    <a:bodyPr/>
+                    <a:lstStyle/>
+                    <a:p>
+                      <a:r>
+                        <a:rPr sz="1700" b="0">
+                          <a:solidFill>
+                            <a:srgbClr val="111111"/>
+                          </a:solidFill>
+                          <a:latin typeface="BIZ UDPゴシック"/>
+                        </a:rPr>
+                        <a:t>20%増</a:t>
+                      </a:r>
+                    </a:p>
+                  </a:txBody>
+                  <a:tcPr marL="118872" marR="91440" marT="64008" marB="45720">
+                    <a:solidFill>
+                      <a:srgbClr val="FFFFFF"/>
+                    </a:solidFill>
+                  </a:tcPr>
+                </a:tc>
+              </a:tr>
+              <a:tr h="461772">
+                <a:tc>
+                  <a:txBody>
+                    <a:bodyPr/>
+                    <a:lstStyle/>
+                    <a:p>
+                      <a:r>
+                        <a:rPr sz="1700" b="0">
+                          <a:solidFill>
+                            <a:srgbClr val="111111"/>
+                          </a:solidFill>
+                          <a:latin typeface="BIZ UDPゴシック"/>
+                        </a:rPr>
+                        <a:t>粗利率</a:t>
+                      </a:r>
+                    </a:p>
+                  </a:txBody>
+                  <a:tcPr marL="118872" marR="91440" marT="64008" marB="45720">
+                    <a:solidFill>
+                      <a:srgbClr val="EEF4F9"/>
+                    </a:solidFill>
+                  </a:tcPr>
+                </a:tc>
+                <a:tc>
+                  <a:txBody>
+                    <a:bodyPr/>
+                    <a:lstStyle/>
+                    <a:p>
+                      <a:r>
+                        <a:rPr sz="1700" b="0">
+                          <a:solidFill>
+                            <a:srgbClr val="111111"/>
+                          </a:solidFill>
+                          <a:latin typeface="BIZ UDPゴシック"/>
+                        </a:rPr>
+                        <a:t>38%</a:t>
+                      </a:r>
+                    </a:p>
+                  </a:txBody>
+                  <a:tcPr marL="118872" marR="91440" marT="64008" marB="45720">
+                    <a:solidFill>
+                      <a:srgbClr val="EEF4F9"/>
+                    </a:solidFill>
+                  </a:tcPr>
+                </a:tc>
+                <a:tc>
+                  <a:txBody>
+                    <a:bodyPr/>
+                    <a:lstStyle/>
+                    <a:p>
+                      <a:r>
+                        <a:rPr sz="1700" b="0">
+                          <a:solidFill>
+                            <a:srgbClr val="111111"/>
+                          </a:solidFill>
+                          <a:latin typeface="BIZ UDPゴシック"/>
+                        </a:rPr>
+                        <a:t>36%</a:t>
+                      </a:r>
+                    </a:p>
+                  </a:txBody>
+                  <a:tcPr marL="118872" marR="91440" marT="64008" marB="45720">
+                    <a:solidFill>
+                      <a:srgbClr val="EEF4F9"/>
+                    </a:solidFill>
+                  </a:tcPr>
+                </a:tc>
+                <a:tc>
+                  <a:txBody>
+                    <a:bodyPr/>
+                    <a:lstStyle/>
+                    <a:p>
+                      <a:r>
+                        <a:rPr sz="1700" b="0">
+                          <a:solidFill>
+                            <a:srgbClr val="C00000"/>
+                          </a:solidFill>
+                          <a:latin typeface="BIZ UDPゴシック"/>
+                        </a:rPr>
+                        <a:t>2ポイント低下</a:t>
+                      </a:r>
+                    </a:p>
+                  </a:txBody>
+                  <a:tcPr marL="118872" marR="91440" marT="64008" marB="45720">
+                    <a:solidFill>
+                      <a:srgbClr val="EEF4F9"/>
+                    </a:solidFill>
+                  </a:tcPr>
+                </a:tc>
+              </a:tr>
+              <a:tr h="461772">
+                <a:tc>
+                  <a:txBody>
+                    <a:bodyPr/>
+                    <a:lstStyle/>
+                    <a:p>
+                      <a:r>
+                        <a:rPr sz="1700" b="0">
+                          <a:solidFill>
+                            <a:srgbClr val="111111"/>
+                          </a:solidFill>
+                          <a:latin typeface="BIZ UDPゴシック"/>
+                        </a:rPr>
+                        <a:t>返品率</a:t>
+                      </a:r>
+                    </a:p>
+                  </a:txBody>
+                  <a:tcPr marL="118872" marR="91440" marT="64008" marB="45720">
+                    <a:solidFill>
+                      <a:srgbClr val="FFFFFF"/>
+                    </a:solidFill>
+                  </a:tcPr>
+                </a:tc>
+                <a:tc>
+                  <a:txBody>
+                    <a:bodyPr/>
+                    <a:lstStyle/>
+                    <a:p>
+                      <a:r>
+                        <a:rPr sz="1700" b="0">
+                          <a:solidFill>
+                            <a:srgbClr val="111111"/>
+                          </a:solidFill>
+                          <a:latin typeface="BIZ UDPゴシック"/>
+                        </a:rPr>
+                        <a:t>4%</a:t>
+                      </a:r>
+                    </a:p>
+                  </a:txBody>
+                  <a:tcPr marL="118872" marR="91440" marT="64008" marB="45720">
+                    <a:solidFill>
+                      <a:srgbClr val="FFFFFF"/>
+                    </a:solidFill>
+                  </a:tcPr>
+                </a:tc>
+                <a:tc>
+                  <a:txBody>
+                    <a:bodyPr/>
+                    <a:lstStyle/>
+                    <a:p>
+                      <a:r>
+                        <a:rPr sz="1700" b="0">
+                          <a:solidFill>
+                            <a:srgbClr val="111111"/>
+                          </a:solidFill>
+                          <a:latin typeface="BIZ UDPゴシック"/>
+                        </a:rPr>
+                        <a:t>6%</a:t>
+                      </a:r>
+                    </a:p>
+                  </a:txBody>
+                  <a:tcPr marL="118872" marR="91440" marT="64008" marB="45720">
+                    <a:solidFill>
+                      <a:srgbClr val="FFFFFF"/>
+                    </a:solidFill>
+                  </a:tcPr>
+                </a:tc>
+                <a:tc>
+                  <a:txBody>
+                    <a:bodyPr/>
+                    <a:lstStyle/>
+                    <a:p>
+                      <a:r>
+                        <a:rPr sz="1700" b="0">
+                          <a:solidFill>
+                            <a:srgbClr val="C00000"/>
+                          </a:solidFill>
+                          <a:latin typeface="BIZ UDPゴシック"/>
+                        </a:rPr>
+                        <a:t>2ポイント上昇</a:t>
+                      </a:r>
+                    </a:p>
+                  </a:txBody>
+                  <a:tcPr marL="118872" marR="91440" marT="64008" marB="45720">
+                    <a:solidFill>
+                      <a:srgbClr val="FFFFFF"/>
+                    </a:solidFill>
+                  </a:tcPr>
+                </a:tc>
+              </a:tr>
+            </a:tbl>
+          </a:graphicData>
+        </a:graphic>
+      </p:graphicFrame>
     </p:spTree>
     <p:extLst>
       <p:ext uri="{BB962C8B-B14F-4D97-AF65-F5344CB8AC3E}">
@@ -8856,7 +9175,7 @@
               </a:defRPr>
             </a:pPr>
             <a:r>
-              <a:rPr sz="2100" b="1" i="0">
+              <a:rPr sz="2100" b="1" i="0" u="none">
                 <a:solidFill>
                   <a:srgbClr val="FFFFFF"/>
                 </a:solidFill>
@@ -8951,7 +9270,7 @@
               </a:defRPr>
             </a:pPr>
             <a:r>
-              <a:rPr sz="1125" b="1" i="0">
+              <a:rPr sz="1125" b="1" i="0" u="none">
                 <a:solidFill>
                   <a:srgbClr val="FFFFFF"/>
                 </a:solidFill>
@@ -9120,7 +9439,7 @@
               </a:defRPr>
             </a:pPr>
             <a:r>
-              <a:rPr sz="975" b="0" i="0">
+              <a:rPr sz="975" b="0" i="0" u="none">
                 <a:solidFill>
                   <a:srgbClr val="FFFFFF"/>
                 </a:solidFill>
@@ -9178,7 +9497,7 @@
               </a:defRPr>
             </a:pPr>
             <a:r>
-              <a:rPr sz="975" b="0" i="0">
+              <a:rPr sz="975" b="0" i="0" u="none">
                 <a:solidFill>
                   <a:srgbClr val="666666"/>
                 </a:solidFill>
@@ -9236,7 +9555,7 @@
               </a:defRPr>
             </a:pPr>
             <a:r>
-              <a:rPr sz="2100" b="1" i="0">
+              <a:rPr sz="2100" b="1" i="0" u="none">
                 <a:solidFill>
                   <a:srgbClr val="111111"/>
                 </a:solidFill>
@@ -9249,6 +9568,471 @@
           </a:p>
         </p:txBody>
       </p:sp>
+      <p:cxnSp xmlns:a="http://schemas.openxmlformats.org/drawingml/2006/main">
+        <p:nvCxnSpPr>
+          <p:cNvPr id="83" name="page-05-handoff-effect-margin-1"/>
+          <p:cNvCxnSpPr/>
+          <p:nvPr/>
+        </p:nvCxnSpPr>
+        <p:spPr>
+          <a:xfrm flipV="1">
+            <a:off x="10652760" y="2569464"/>
+            <a:ext cx="0" cy="356616"/>
+          </a:xfrm>
+          <a:prstGeom prst="line">
+            <a:avLst/>
+          </a:prstGeom>
+          <a:ln w="19050">
+            <a:solidFill>
+              <a:srgbClr val="2474B5"/>
+            </a:solidFill>
+            <a:tailEnd type="triangle"/>
+          </a:ln>
+        </p:spPr>
+        <p:style>
+          <a:lnRef idx="2">
+            <a:schemeClr val="accent1"/>
+          </a:lnRef>
+          <a:fillRef idx="0">
+            <a:schemeClr val="accent1"/>
+          </a:fillRef>
+          <a:effectRef idx="1">
+            <a:schemeClr val="accent1"/>
+          </a:effectRef>
+          <a:fontRef idx="minor">
+            <a:schemeClr val="tx1"/>
+          </a:fontRef>
+        </p:style>
+      </p:cxnSp>
+      <p:cxnSp xmlns:a="http://schemas.openxmlformats.org/drawingml/2006/main">
+        <p:nvCxnSpPr>
+          <p:cNvPr id="81" name="page-05-handoff-new-return-record-1"/>
+          <p:cNvCxnSpPr/>
+          <p:nvPr/>
+        </p:nvCxnSpPr>
+        <p:spPr>
+          <a:xfrm flipV="1">
+            <a:off x="10652760" y="3712463"/>
+            <a:ext cx="0" cy="356617"/>
+          </a:xfrm>
+          <a:prstGeom prst="line">
+            <a:avLst/>
+          </a:prstGeom>
+          <a:ln w="19050">
+            <a:solidFill>
+              <a:srgbClr val="2474B5"/>
+            </a:solidFill>
+            <a:tailEnd type="triangle"/>
+          </a:ln>
+        </p:spPr>
+        <p:style>
+          <a:lnRef idx="2">
+            <a:schemeClr val="accent1"/>
+          </a:lnRef>
+          <a:fillRef idx="0">
+            <a:schemeClr val="accent1"/>
+          </a:fillRef>
+          <a:effectRef idx="1">
+            <a:schemeClr val="accent1"/>
+          </a:effectRef>
+          <a:fontRef idx="minor">
+            <a:schemeClr val="tx1"/>
+          </a:fontRef>
+        </p:style>
+      </p:cxnSp>
+      <p:cxnSp xmlns:a="http://schemas.openxmlformats.org/drawingml/2006/main">
+        <p:nvCxnSpPr>
+          <p:cNvPr id="79" name="page-05-handoff-check-result-1"/>
+          <p:cNvCxnSpPr/>
+          <p:nvPr/>
+        </p:nvCxnSpPr>
+        <p:spPr>
+          <a:xfrm>
+            <a:off x="9052560" y="4462272"/>
+            <a:ext cx="640080" cy="0"/>
+          </a:xfrm>
+          <a:prstGeom prst="line">
+            <a:avLst/>
+          </a:prstGeom>
+          <a:ln w="19050">
+            <a:solidFill>
+              <a:srgbClr val="2474B5"/>
+            </a:solidFill>
+            <a:tailEnd type="triangle"/>
+          </a:ln>
+        </p:spPr>
+        <p:style>
+          <a:lnRef idx="2">
+            <a:schemeClr val="accent1"/>
+          </a:lnRef>
+          <a:fillRef idx="0">
+            <a:schemeClr val="accent1"/>
+          </a:fillRef>
+          <a:effectRef idx="1">
+            <a:schemeClr val="accent1"/>
+          </a:effectRef>
+          <a:fontRef idx="minor">
+            <a:schemeClr val="tx1"/>
+          </a:fontRef>
+        </p:style>
+      </p:cxnSp>
+      <p:cxnSp xmlns:a="http://schemas.openxmlformats.org/drawingml/2006/main">
+        <p:nvCxnSpPr>
+          <p:cNvPr id="77" name="page-05-handoff-rewrite-record-1"/>
+          <p:cNvCxnSpPr/>
+          <p:nvPr/>
+        </p:nvCxnSpPr>
+        <p:spPr>
+          <a:xfrm>
+            <a:off x="8092440" y="3712463"/>
+            <a:ext cx="0" cy="356617"/>
+          </a:xfrm>
+          <a:prstGeom prst="line">
+            <a:avLst/>
+          </a:prstGeom>
+          <a:ln w="19050">
+            <a:solidFill>
+              <a:srgbClr val="2474B5"/>
+            </a:solidFill>
+            <a:tailEnd type="triangle"/>
+          </a:ln>
+        </p:spPr>
+        <p:style>
+          <a:lnRef idx="2">
+            <a:schemeClr val="accent1"/>
+          </a:lnRef>
+          <a:fillRef idx="0">
+            <a:schemeClr val="accent1"/>
+          </a:fillRef>
+          <a:effectRef idx="1">
+            <a:schemeClr val="accent1"/>
+          </a:effectRef>
+          <a:fontRef idx="minor">
+            <a:schemeClr val="tx1"/>
+          </a:fontRef>
+        </p:style>
+      </p:cxnSp>
+      <p:cxnSp xmlns:a="http://schemas.openxmlformats.org/drawingml/2006/main">
+        <p:nvCxnSpPr>
+          <p:cNvPr id="75" name="page-05-handoff-no-3"/>
+          <p:cNvCxnSpPr/>
+          <p:nvPr/>
+        </p:nvCxnSpPr>
+        <p:spPr>
+          <a:xfrm>
+            <a:off x="4251960" y="4251960"/>
+            <a:ext cx="320040" cy="0"/>
+          </a:xfrm>
+          <a:prstGeom prst="line">
+            <a:avLst/>
+          </a:prstGeom>
+          <a:ln w="19050">
+            <a:solidFill>
+              <a:srgbClr val="C00000"/>
+            </a:solidFill>
+            <a:tailEnd type="triangle"/>
+          </a:ln>
+        </p:spPr>
+        <p:style>
+          <a:lnRef idx="2">
+            <a:schemeClr val="accent1"/>
+          </a:lnRef>
+          <a:fillRef idx="0">
+            <a:schemeClr val="accent1"/>
+          </a:fillRef>
+          <a:effectRef idx="1">
+            <a:schemeClr val="accent1"/>
+          </a:effectRef>
+          <a:fontRef idx="minor">
+            <a:schemeClr val="tx1"/>
+          </a:fontRef>
+        </p:style>
+      </p:cxnSp>
+      <p:cxnSp xmlns:a="http://schemas.openxmlformats.org/drawingml/2006/main">
+        <p:nvCxnSpPr>
+          <p:cNvPr id="74" name="page-05-handoff-no-2"/>
+          <p:cNvCxnSpPr/>
+          <p:nvPr/>
+        </p:nvCxnSpPr>
+        <p:spPr>
+          <a:xfrm>
+            <a:off x="4251960" y="2176272"/>
+            <a:ext cx="0" cy="2075688"/>
+          </a:xfrm>
+          <a:prstGeom prst="line">
+            <a:avLst/>
+          </a:prstGeom>
+          <a:ln w="19050">
+            <a:solidFill>
+              <a:srgbClr val="C00000"/>
+            </a:solidFill>
+          </a:ln>
+        </p:spPr>
+        <p:style>
+          <a:lnRef idx="2">
+            <a:schemeClr val="accent1"/>
+          </a:lnRef>
+          <a:fillRef idx="0">
+            <a:schemeClr val="accent1"/>
+          </a:fillRef>
+          <a:effectRef idx="1">
+            <a:schemeClr val="accent1"/>
+          </a:effectRef>
+          <a:fontRef idx="minor">
+            <a:schemeClr val="tx1"/>
+          </a:fontRef>
+        </p:style>
+      </p:cxnSp>
+      <p:cxnSp xmlns:a="http://schemas.openxmlformats.org/drawingml/2006/main">
+        <p:nvCxnSpPr>
+          <p:cNvPr id="73" name="page-05-handoff-no-1"/>
+          <p:cNvCxnSpPr/>
+          <p:nvPr/>
+        </p:nvCxnSpPr>
+        <p:spPr>
+          <a:xfrm flipH="1">
+            <a:off x="4251960" y="2176272"/>
+            <a:ext cx="457200" cy="0"/>
+          </a:xfrm>
+          <a:prstGeom prst="line">
+            <a:avLst/>
+          </a:prstGeom>
+          <a:ln w="19050">
+            <a:solidFill>
+              <a:srgbClr val="C00000"/>
+            </a:solidFill>
+          </a:ln>
+        </p:spPr>
+        <p:style>
+          <a:lnRef idx="2">
+            <a:schemeClr val="accent1"/>
+          </a:lnRef>
+          <a:fillRef idx="0">
+            <a:schemeClr val="accent1"/>
+          </a:fillRef>
+          <a:effectRef idx="1">
+            <a:schemeClr val="accent1"/>
+          </a:effectRef>
+          <a:fontRef idx="minor">
+            <a:schemeClr val="tx1"/>
+          </a:fontRef>
+        </p:style>
+      </p:cxnSp>
+      <p:cxnSp xmlns:a="http://schemas.openxmlformats.org/drawingml/2006/main">
+        <p:nvCxnSpPr>
+          <p:cNvPr id="71" name="page-05-handoff-yes-2"/>
+          <p:cNvCxnSpPr/>
+          <p:nvPr/>
+        </p:nvCxnSpPr>
+        <p:spPr>
+          <a:xfrm>
+            <a:off x="8092440" y="2176272"/>
+            <a:ext cx="0" cy="749808"/>
+          </a:xfrm>
+          <a:prstGeom prst="line">
+            <a:avLst/>
+          </a:prstGeom>
+          <a:ln w="19050">
+            <a:solidFill>
+              <a:srgbClr val="2474B5"/>
+            </a:solidFill>
+            <a:tailEnd type="triangle"/>
+          </a:ln>
+        </p:spPr>
+        <p:style>
+          <a:lnRef idx="2">
+            <a:schemeClr val="accent1"/>
+          </a:lnRef>
+          <a:fillRef idx="0">
+            <a:schemeClr val="accent1"/>
+          </a:fillRef>
+          <a:effectRef idx="1">
+            <a:schemeClr val="accent1"/>
+          </a:effectRef>
+          <a:fontRef idx="minor">
+            <a:schemeClr val="tx1"/>
+          </a:fontRef>
+        </p:style>
+      </p:cxnSp>
+      <p:cxnSp xmlns:a="http://schemas.openxmlformats.org/drawingml/2006/main">
+        <p:nvCxnSpPr>
+          <p:cNvPr id="70" name="page-05-handoff-yes-1"/>
+          <p:cNvCxnSpPr/>
+          <p:nvPr/>
+        </p:nvCxnSpPr>
+        <p:spPr>
+          <a:xfrm>
+            <a:off x="6355080" y="2176272"/>
+            <a:ext cx="1737360" cy="0"/>
+          </a:xfrm>
+          <a:prstGeom prst="line">
+            <a:avLst/>
+          </a:prstGeom>
+          <a:ln w="19050">
+            <a:solidFill>
+              <a:srgbClr val="2474B5"/>
+            </a:solidFill>
+          </a:ln>
+        </p:spPr>
+        <p:style>
+          <a:lnRef idx="2">
+            <a:schemeClr val="accent1"/>
+          </a:lnRef>
+          <a:fillRef idx="0">
+            <a:schemeClr val="accent1"/>
+          </a:fillRef>
+          <a:effectRef idx="1">
+            <a:schemeClr val="accent1"/>
+          </a:effectRef>
+          <a:fontRef idx="minor">
+            <a:schemeClr val="tx1"/>
+          </a:fontRef>
+        </p:style>
+      </p:cxnSp>
+      <p:cxnSp xmlns:a="http://schemas.openxmlformats.org/drawingml/2006/main">
+        <p:nvCxnSpPr>
+          <p:cNvPr id="68" name="page-05-handoff-classification-1"/>
+          <p:cNvCxnSpPr/>
+          <p:nvPr/>
+        </p:nvCxnSpPr>
+        <p:spPr>
+          <a:xfrm flipV="1">
+            <a:off x="5532120" y="2569464"/>
+            <a:ext cx="0" cy="1499616"/>
+          </a:xfrm>
+          <a:prstGeom prst="line">
+            <a:avLst/>
+          </a:prstGeom>
+          <a:ln w="19050">
+            <a:solidFill>
+              <a:srgbClr val="2474B5"/>
+            </a:solidFill>
+            <a:tailEnd type="triangle"/>
+          </a:ln>
+        </p:spPr>
+        <p:style>
+          <a:lnRef idx="2">
+            <a:schemeClr val="accent1"/>
+          </a:lnRef>
+          <a:fillRef idx="0">
+            <a:schemeClr val="accent1"/>
+          </a:fillRef>
+          <a:effectRef idx="1">
+            <a:schemeClr val="accent1"/>
+          </a:effectRef>
+          <a:fontRef idx="minor">
+            <a:schemeClr val="tx1"/>
+          </a:fontRef>
+        </p:style>
+      </p:cxnSp>
+      <p:cxnSp xmlns:a="http://schemas.openxmlformats.org/drawingml/2006/main">
+        <p:nvCxnSpPr>
+          <p:cNvPr id="66" name="page-05-handoff-return-list-1"/>
+          <p:cNvCxnSpPr/>
+          <p:nvPr/>
+        </p:nvCxnSpPr>
+        <p:spPr>
+          <a:xfrm>
+            <a:off x="3931920" y="4462272"/>
+            <a:ext cx="640080" cy="0"/>
+          </a:xfrm>
+          <a:prstGeom prst="line">
+            <a:avLst/>
+          </a:prstGeom>
+          <a:ln w="19050">
+            <a:solidFill>
+              <a:srgbClr val="2474B5"/>
+            </a:solidFill>
+            <a:tailEnd type="triangle"/>
+          </a:ln>
+        </p:spPr>
+        <p:style>
+          <a:lnRef idx="2">
+            <a:schemeClr val="accent1"/>
+          </a:lnRef>
+          <a:fillRef idx="0">
+            <a:schemeClr val="accent1"/>
+          </a:fillRef>
+          <a:effectRef idx="1">
+            <a:schemeClr val="accent1"/>
+          </a:effectRef>
+          <a:fontRef idx="minor">
+            <a:schemeClr val="tx1"/>
+          </a:fontRef>
+        </p:style>
+      </p:cxnSp>
+      <p:cxnSp xmlns:a="http://schemas.openxmlformats.org/drawingml/2006/main">
+        <p:nvCxnSpPr>
+          <p:cNvPr id="64" name="page-05-handoff-target-list-1"/>
+          <p:cNvCxnSpPr/>
+          <p:nvPr/>
+        </p:nvCxnSpPr>
+        <p:spPr>
+          <a:xfrm>
+            <a:off x="2971800" y="3712463"/>
+            <a:ext cx="0" cy="356617"/>
+          </a:xfrm>
+          <a:prstGeom prst="line">
+            <a:avLst/>
+          </a:prstGeom>
+          <a:ln w="19050">
+            <a:solidFill>
+              <a:srgbClr val="2474B5"/>
+            </a:solidFill>
+            <a:tailEnd type="triangle"/>
+          </a:ln>
+        </p:spPr>
+        <p:style>
+          <a:lnRef idx="2">
+            <a:schemeClr val="accent1"/>
+          </a:lnRef>
+          <a:fillRef idx="0">
+            <a:schemeClr val="accent1"/>
+          </a:fillRef>
+          <a:effectRef idx="1">
+            <a:schemeClr val="accent1"/>
+          </a:effectRef>
+          <a:fontRef idx="minor">
+            <a:schemeClr val="tx1"/>
+          </a:fontRef>
+        </p:style>
+      </p:cxnSp>
+      <p:cxnSp xmlns:a="http://schemas.openxmlformats.org/drawingml/2006/main">
+        <p:nvCxnSpPr>
+          <p:cNvPr id="62" name="page-05-handoff-scope-1"/>
+          <p:cNvCxnSpPr/>
+          <p:nvPr/>
+        </p:nvCxnSpPr>
+        <p:spPr>
+          <a:xfrm>
+            <a:off x="2971800" y="2569464"/>
+            <a:ext cx="0" cy="356616"/>
+          </a:xfrm>
+          <a:prstGeom prst="line">
+            <a:avLst/>
+          </a:prstGeom>
+          <a:ln w="19050">
+            <a:solidFill>
+              <a:srgbClr val="2474B5"/>
+            </a:solidFill>
+            <a:tailEnd type="triangle"/>
+          </a:ln>
+        </p:spPr>
+        <p:style>
+          <a:lnRef idx="2">
+            <a:schemeClr val="accent1"/>
+          </a:lnRef>
+          <a:fillRef idx="0">
+            <a:schemeClr val="accent1"/>
+          </a:fillRef>
+          <a:effectRef idx="1">
+            <a:schemeClr val="accent1"/>
+          </a:effectRef>
+          <a:fontRef idx="minor">
+            <a:schemeClr val="tx1"/>
+          </a:fontRef>
+        </p:style>
+      </p:cxnSp>
       <p:sp>
         <p:nvSpPr>
           <p:cNvPr id="11" name="page-05-object-010">
@@ -9294,7 +10078,7 @@
               </a:defRPr>
             </a:pPr>
             <a:r>
-              <a:rPr sz="1125" b="1" i="0">
+              <a:rPr sz="1125" b="1" i="0" u="none">
                 <a:solidFill>
                   <a:srgbClr val="2474B5"/>
                 </a:solidFill>
@@ -9302,7 +10086,7 @@
                 <a:ea typeface="BIZ UDPゴシック"/>
                 <a:cs typeface="BIZ UDPゴシック"/>
               </a:rPr>
-              <a:t>承認前の作業案。記録を引き継ぎ、推測と確認済みの結果を分ける</a:t>
+              <a:t>承認前の作業案。青線は記録の受け渡し、赤線は分類不足時の戻り</a:t>
             </a:r>
           </a:p>
         </p:txBody>
@@ -9389,7 +10173,7 @@
               </a:defRPr>
             </a:pPr>
             <a:r>
-              <a:rPr sz="1200" b="1" i="0">
+              <a:rPr sz="1200" b="1" i="0" u="none">
                 <a:solidFill>
                   <a:srgbClr val="FFFFFF"/>
                 </a:solidFill>
@@ -9484,7 +10268,7 @@
               </a:defRPr>
             </a:pPr>
             <a:r>
-              <a:rPr sz="1200" b="1" i="0">
+              <a:rPr sz="1200" b="1" i="0" u="none">
                 <a:solidFill>
                   <a:srgbClr val="FFFFFF"/>
                 </a:solidFill>
@@ -9492,7 +10276,7 @@
                 <a:ea typeface="BIZ UDPゴシック"/>
                 <a:cs typeface="BIZ UDPゴシック"/>
               </a:rPr>
-              <a:t>② 理由を確かめる</a:t>
+              <a:t>② 理由分類と確認</a:t>
             </a:r>
           </a:p>
         </p:txBody>
@@ -9579,7 +10363,7 @@
               </a:defRPr>
             </a:pPr>
             <a:r>
-              <a:rPr sz="1200" b="1" i="0">
+              <a:rPr sz="1200" b="1" i="0" u="none">
                 <a:solidFill>
                   <a:srgbClr val="FFFFFF"/>
                 </a:solidFill>
@@ -9674,7 +10458,7 @@
               </a:defRPr>
             </a:pPr>
             <a:r>
-              <a:rPr sz="1200" b="1" i="0">
+              <a:rPr sz="1200" b="1" i="0" u="none">
                 <a:solidFill>
                   <a:srgbClr val="FFFFFF"/>
                 </a:solidFill>
@@ -9682,7 +10466,7 @@
                 <a:ea typeface="BIZ UDPゴシック"/>
                 <a:cs typeface="BIZ UDPゴシック"/>
               </a:rPr>
-              <a:t>④ 結果を判断</a:t>
+              <a:t>④ 効果・粗利と判断</a:t>
             </a:r>
           </a:p>
         </p:txBody>
@@ -9703,8 +10487,8 @@
         </p:nvSpPr>
         <p:spPr>
           <a:xfrm xmlns:a="http://schemas.openxmlformats.org/drawingml/2006/main">
-            <a:off x="285750" y="1781175"/>
-            <a:ext cx="1571625" cy="952500"/>
+            <a:off x="285750" y="1783080"/>
+            <a:ext cx="1571625" cy="786384"/>
           </a:xfrm>
           <a:prstGeom xmlns:a="http://schemas.openxmlformats.org/drawingml/2006/main" prst="rect">
             <a:avLst/>
@@ -9740,8 +10524,8 @@
         </p:nvSpPr>
         <p:spPr>
           <a:xfrm xmlns:a="http://schemas.openxmlformats.org/drawingml/2006/main">
-            <a:off x="371475" y="2085975"/>
-            <a:ext cx="1400175" cy="342900"/>
+            <a:off x="371475" y="1993392"/>
+            <a:ext cx="1400175" cy="365760"/>
           </a:xfrm>
           <a:prstGeom xmlns:a="http://schemas.openxmlformats.org/drawingml/2006/main" prst="rect">
             <a:avLst/>
@@ -9769,7 +10553,7 @@
               </a:defRPr>
             </a:pPr>
             <a:r>
-              <a:rPr sz="1200" b="1" i="0">
+              <a:rPr sz="1200" b="1" i="0" u="none">
                 <a:solidFill>
                   <a:srgbClr val="111111"/>
                 </a:solidFill>
@@ -9798,8 +10582,8 @@
         </p:nvSpPr>
         <p:spPr>
           <a:xfrm xmlns:a="http://schemas.openxmlformats.org/drawingml/2006/main">
-            <a:off x="2000250" y="1781175"/>
-            <a:ext cx="2381250" cy="952500"/>
+            <a:off x="2011680" y="1783080"/>
+            <a:ext cx="1920240" cy="786384"/>
           </a:xfrm>
           <a:prstGeom xmlns:a="http://schemas.openxmlformats.org/drawingml/2006/main" prst="rect">
             <a:avLst/>
@@ -9835,8 +10619,8 @@
         </p:nvSpPr>
         <p:spPr>
           <a:xfrm xmlns:a="http://schemas.openxmlformats.org/drawingml/2006/main">
-            <a:off x="2085975" y="1914525"/>
-            <a:ext cx="2209800" cy="647700"/>
+            <a:off x="2011680" y="1783080"/>
+            <a:ext cx="1920240" cy="786384"/>
           </a:xfrm>
           <a:prstGeom xmlns:a="http://schemas.openxmlformats.org/drawingml/2006/main" prst="rect">
             <a:avLst/>
@@ -9848,7 +10632,7 @@
           </a:ln>
         </p:spPr>
         <p:txBody>
-          <a:bodyPr xmlns:a="http://schemas.openxmlformats.org/drawingml/2006/main" wrap="square" lIns="38100" tIns="19050" rIns="38100" bIns="19050" anchor="ctr">
+          <a:bodyPr xmlns:a="http://schemas.openxmlformats.org/drawingml/2006/main" wrap="square" lIns="54864" tIns="36576" rIns="54864" bIns="36576" anchor="ctr">
             <a:noAutofit/>
           </a:bodyPr>
           <a:lstStyle xmlns:a="http://schemas.openxmlformats.org/drawingml/2006/main"/>
@@ -9864,7 +10648,7 @@
               </a:defRPr>
             </a:pPr>
             <a:r>
-              <a:rPr sz="975" b="0" i="0">
+              <a:rPr sz="1250" b="0" i="0" u="none">
                 <a:solidFill>
                   <a:srgbClr val="111111"/>
                 </a:solidFill>
@@ -9872,7 +10656,7 @@
                 <a:ea typeface="BIZ UDPゴシック"/>
                 <a:cs typeface="BIZ UDPゴシック"/>
               </a:rPr>
-              <a:t>着手方針を確認</a:t>
+              <a:t>対象範囲を確認</a:t>
             </a:r>
           </a:p>
           <a:p xmlns:a="http://schemas.openxmlformats.org/drawingml/2006/main">
@@ -9887,7 +10671,7 @@
               </a:defRPr>
             </a:pPr>
             <a:r>
-              <a:rPr sz="975" b="0" i="0">
+              <a:rPr sz="1250" b="0" i="0" u="none">
                 <a:solidFill>
                   <a:srgbClr val="111111"/>
                 </a:solidFill>
@@ -9895,29 +10679,29 @@
                 <a:ea typeface="BIZ UDPゴシック"/>
                 <a:cs typeface="BIZ UDPゴシック"/>
               </a:rPr>
-              <a:t>入力：9月の実績</a:t>
-            </a:r>
-          </a:p>
-        </p:txBody>
-      </p:sp>
-      <p:sp>
-        <p:nvSpPr>
-          <p:cNvPr id="24" name="page-05-object-023">
-            <a:extLst xmlns:a="http://schemas.openxmlformats.org/drawingml/2006/main">
-              <a:ext uri="{FF2B5EF4-FFF2-40B4-BE49-F238E27FC236}">
-                <a16:creationId xmlns:a16="http://schemas.microsoft.com/office/drawing/2014/main" id="{9F6CC2E1-1D03-4942-B50D-A3BA6FCBFE10}"/>
-              </a:ext>
-            </a:extLst>
-          </p:cNvPr>
-          <p:cNvSpPr>
-            <a:spLocks xmlns:a="http://schemas.openxmlformats.org/drawingml/2006/main" noGrp="1"/>
-          </p:cNvSpPr>
-          <p:nvPr/>
-        </p:nvSpPr>
-        <p:spPr>
-          <a:xfrm xmlns:a="http://schemas.openxmlformats.org/drawingml/2006/main">
-            <a:off x="4457700" y="1781175"/>
-            <a:ext cx="2381250" cy="952500"/>
+              <a:t>入力：9月実績</a:t>
+            </a:r>
+          </a:p>
+        </p:txBody>
+      </p:sp>
+      <p:sp>
+        <p:nvSpPr>
+          <p:cNvPr id="28" name="page-05-object-027">
+            <a:extLst xmlns:a="http://schemas.openxmlformats.org/drawingml/2006/main">
+              <a:ext uri="{FF2B5EF4-FFF2-40B4-BE49-F238E27FC236}">
+                <a16:creationId xmlns:a16="http://schemas.microsoft.com/office/drawing/2014/main" id="{5CA0CE9B-8459-41F9-9B8D-6AFFE879DA3B}"/>
+              </a:ext>
+            </a:extLst>
+          </p:cNvPr>
+          <p:cNvSpPr>
+            <a:spLocks xmlns:a="http://schemas.openxmlformats.org/drawingml/2006/main" noGrp="1"/>
+          </p:cNvSpPr>
+          <p:nvPr/>
+        </p:nvSpPr>
+        <p:spPr>
+          <a:xfrm xmlns:a="http://schemas.openxmlformats.org/drawingml/2006/main">
+            <a:off x="9692640" y="1783080"/>
+            <a:ext cx="1920240" cy="786384"/>
           </a:xfrm>
           <a:prstGeom xmlns:a="http://schemas.openxmlformats.org/drawingml/2006/main" prst="rect">
             <a:avLst/>
@@ -9939,22 +10723,22 @@
       </p:sp>
       <p:sp>
         <p:nvSpPr>
-          <p:cNvPr id="25" name="page-05-object-024">
-            <a:extLst xmlns:a="http://schemas.openxmlformats.org/drawingml/2006/main">
-              <a:ext uri="{FF2B5EF4-FFF2-40B4-BE49-F238E27FC236}">
-                <a16:creationId xmlns:a16="http://schemas.microsoft.com/office/drawing/2014/main" id="{6FE97768-585B-4B7E-A5B6-FA771DFB9CAA}"/>
-              </a:ext>
-            </a:extLst>
-          </p:cNvPr>
-          <p:cNvSpPr>
-            <a:spLocks xmlns:a="http://schemas.openxmlformats.org/drawingml/2006/main" noGrp="1"/>
-          </p:cNvSpPr>
-          <p:nvPr/>
-        </p:nvSpPr>
-        <p:spPr>
-          <a:xfrm xmlns:a="http://schemas.openxmlformats.org/drawingml/2006/main">
-            <a:off x="4543425" y="1914525"/>
-            <a:ext cx="2209800" cy="647700"/>
+          <p:cNvPr id="29" name="page-05-object-028">
+            <a:extLst xmlns:a="http://schemas.openxmlformats.org/drawingml/2006/main">
+              <a:ext uri="{FF2B5EF4-FFF2-40B4-BE49-F238E27FC236}">
+                <a16:creationId xmlns:a16="http://schemas.microsoft.com/office/drawing/2014/main" id="{62C491F1-30ED-41B6-AE25-E9ACC80B70A0}"/>
+              </a:ext>
+            </a:extLst>
+          </p:cNvPr>
+          <p:cNvSpPr>
+            <a:spLocks xmlns:a="http://schemas.openxmlformats.org/drawingml/2006/main" noGrp="1"/>
+          </p:cNvSpPr>
+          <p:nvPr/>
+        </p:nvSpPr>
+        <p:spPr>
+          <a:xfrm xmlns:a="http://schemas.openxmlformats.org/drawingml/2006/main">
+            <a:off x="9692640" y="1783080"/>
+            <a:ext cx="1920240" cy="786384"/>
           </a:xfrm>
           <a:prstGeom xmlns:a="http://schemas.openxmlformats.org/drawingml/2006/main" prst="rect">
             <a:avLst/>
@@ -9966,7 +10750,7 @@
           </a:ln>
         </p:spPr>
         <p:txBody>
-          <a:bodyPr xmlns:a="http://schemas.openxmlformats.org/drawingml/2006/main" wrap="square" lIns="38100" tIns="19050" rIns="38100" bIns="19050" anchor="ctr">
+          <a:bodyPr xmlns:a="http://schemas.openxmlformats.org/drawingml/2006/main" wrap="square" lIns="54864" tIns="36576" rIns="54864" bIns="36576" anchor="ctr">
             <a:noAutofit/>
           </a:bodyPr>
           <a:lstStyle xmlns:a="http://schemas.openxmlformats.org/drawingml/2006/main"/>
@@ -9982,7 +10766,7 @@
               </a:defRPr>
             </a:pPr>
             <a:r>
-              <a:rPr sz="975" b="0" i="0">
+              <a:rPr sz="1250" b="0" i="0" u="none">
                 <a:solidFill>
                   <a:srgbClr val="111111"/>
                 </a:solidFill>
@@ -9990,7 +10774,7 @@
                 <a:ea typeface="BIZ UDPゴシック"/>
                 <a:cs typeface="BIZ UDPゴシック"/>
               </a:rPr>
-              <a:t>分類結果を確認</a:t>
+              <a:t>広告増額を判断</a:t>
             </a:r>
           </a:p>
           <a:p xmlns:a="http://schemas.openxmlformats.org/drawingml/2006/main">
@@ -10005,7 +10789,7 @@
               </a:defRPr>
             </a:pPr>
             <a:r>
-              <a:rPr sz="975" b="0" i="0">
+              <a:rPr sz="1250" b="0" i="0" u="none">
                 <a:solidFill>
                   <a:srgbClr val="111111"/>
                 </a:solidFill>
@@ -10013,81 +10797,9 @@
                 <a:ea typeface="BIZ UDPゴシック"/>
                 <a:cs typeface="BIZ UDPゴシック"/>
               </a:rPr>
-              <a:t>出力：修正対象</a:t>
-            </a:r>
-          </a:p>
-        </p:txBody>
-      </p:sp>
-      <p:sp>
-        <p:nvSpPr>
-          <p:cNvPr id="26" name="page-05-object-025">
-            <a:extLst xmlns:a="http://schemas.openxmlformats.org/drawingml/2006/main">
-              <a:ext uri="{FF2B5EF4-FFF2-40B4-BE49-F238E27FC236}">
-                <a16:creationId xmlns:a16="http://schemas.microsoft.com/office/drawing/2014/main" id="{7A0E670A-DE25-4573-A4B9-F6F1EEBDEDEA}"/>
-              </a:ext>
-            </a:extLst>
-          </p:cNvPr>
-          <p:cNvSpPr>
-            <a:spLocks xmlns:a="http://schemas.openxmlformats.org/drawingml/2006/main" noGrp="1"/>
-          </p:cNvSpPr>
-          <p:nvPr/>
-        </p:nvSpPr>
-        <p:spPr>
-          <a:xfrm xmlns:a="http://schemas.openxmlformats.org/drawingml/2006/main">
-            <a:off x="6915150" y="1781175"/>
-            <a:ext cx="2381250" cy="952500"/>
-          </a:xfrm>
-          <a:prstGeom xmlns:a="http://schemas.openxmlformats.org/drawingml/2006/main" prst="rect">
-            <a:avLst/>
-          </a:prstGeom>
-          <a:solidFill xmlns:a="http://schemas.openxmlformats.org/drawingml/2006/main">
-            <a:srgbClr val="FFFFFF"/>
-          </a:solidFill>
-          <a:ln xmlns:a="http://schemas.openxmlformats.org/drawingml/2006/main" w="6668">
-            <a:solidFill>
-              <a:srgbClr val="A6A6A6"/>
-            </a:solidFill>
-            <a:prstDash val="solid"/>
-          </a:ln>
-        </p:spPr>
-        <p:txBody xmlns:a="http://schemas.openxmlformats.org/drawingml/2006/main">
-          <a:bodyPr/>
-          <a:p/>
-        </p:txBody>
-      </p:sp>
-      <p:sp>
-        <p:nvSpPr>
-          <p:cNvPr id="27" name="page-05-object-026">
-            <a:extLst xmlns:a="http://schemas.openxmlformats.org/drawingml/2006/main">
-              <a:ext uri="{FF2B5EF4-FFF2-40B4-BE49-F238E27FC236}">
-                <a16:creationId xmlns:a16="http://schemas.microsoft.com/office/drawing/2014/main" id="{4436660A-CAD8-4C29-A870-5B0330130DF8}"/>
-              </a:ext>
-            </a:extLst>
-          </p:cNvPr>
-          <p:cNvSpPr>
-            <a:spLocks xmlns:a="http://schemas.openxmlformats.org/drawingml/2006/main" noGrp="1"/>
-          </p:cNvSpPr>
-          <p:nvPr/>
-        </p:nvSpPr>
-        <p:spPr>
-          <a:xfrm xmlns:a="http://schemas.openxmlformats.org/drawingml/2006/main">
-            <a:off x="7000875" y="1914525"/>
-            <a:ext cx="2209800" cy="647700"/>
-          </a:xfrm>
-          <a:prstGeom xmlns:a="http://schemas.openxmlformats.org/drawingml/2006/main" prst="rect">
-            <a:avLst/>
-          </a:prstGeom>
-          <a:noFill xmlns:a="http://schemas.openxmlformats.org/drawingml/2006/main"/>
-          <a:ln xmlns:a="http://schemas.openxmlformats.org/drawingml/2006/main" w="0">
-            <a:noFill/>
-            <a:prstDash val="solid"/>
-          </a:ln>
-        </p:spPr>
-        <p:txBody>
-          <a:bodyPr xmlns:a="http://schemas.openxmlformats.org/drawingml/2006/main" wrap="square" lIns="38100" tIns="19050" rIns="38100" bIns="19050" anchor="ctr">
-            <a:noAutofit/>
-          </a:bodyPr>
-          <a:lstStyle xmlns:a="http://schemas.openxmlformats.org/drawingml/2006/main"/>
+              <a:t>入力：効果・粗利</a:t>
+            </a:r>
+          </a:p>
           <a:p xmlns:a="http://schemas.openxmlformats.org/drawingml/2006/main">
             <a:pPr algn="ctr">
               <a:defRPr sz="975" b="0" i="0">
@@ -10100,7 +10812,7 @@
               </a:defRPr>
             </a:pPr>
             <a:r>
-              <a:rPr sz="975" b="0" i="0">
+              <a:rPr sz="1250" b="0" i="0" u="none">
                 <a:solidFill>
                   <a:srgbClr val="111111"/>
                 </a:solidFill>
@@ -10108,148 +10820,7 @@
                 <a:ea typeface="BIZ UDPゴシック"/>
                 <a:cs typeface="BIZ UDPゴシック"/>
               </a:rPr>
-              <a:t>完了状況を確認</a:t>
-            </a:r>
-          </a:p>
-          <a:p xmlns:a="http://schemas.openxmlformats.org/drawingml/2006/main">
-            <a:pPr algn="ctr">
-              <a:defRPr sz="975" b="0" i="0">
-                <a:solidFill>
-                  <a:srgbClr val="111111"/>
-                </a:solidFill>
-                <a:latin typeface="BIZ UDPゴシック"/>
-                <a:ea typeface="BIZ UDPゴシック"/>
-                <a:cs typeface="BIZ UDPゴシック"/>
-              </a:defRPr>
-            </a:pPr>
-            <a:r>
-              <a:rPr sz="975" b="0" i="0">
-                <a:solidFill>
-                  <a:srgbClr val="111111"/>
-                </a:solidFill>
-                <a:latin typeface="BIZ UDPゴシック"/>
-                <a:ea typeface="BIZ UDPゴシック"/>
-                <a:cs typeface="BIZ UDPゴシック"/>
-              </a:rPr>
-              <a:t>入力：改稿記録</a:t>
-            </a:r>
-          </a:p>
-        </p:txBody>
-      </p:sp>
-      <p:sp>
-        <p:nvSpPr>
-          <p:cNvPr id="28" name="page-05-object-027">
-            <a:extLst xmlns:a="http://schemas.openxmlformats.org/drawingml/2006/main">
-              <a:ext uri="{FF2B5EF4-FFF2-40B4-BE49-F238E27FC236}">
-                <a16:creationId xmlns:a16="http://schemas.microsoft.com/office/drawing/2014/main" id="{5CA0CE9B-8459-41F9-9B8D-6AFFE879DA3B}"/>
-              </a:ext>
-            </a:extLst>
-          </p:cNvPr>
-          <p:cNvSpPr>
-            <a:spLocks xmlns:a="http://schemas.openxmlformats.org/drawingml/2006/main" noGrp="1"/>
-          </p:cNvSpPr>
-          <p:nvPr/>
-        </p:nvSpPr>
-        <p:spPr>
-          <a:xfrm xmlns:a="http://schemas.openxmlformats.org/drawingml/2006/main">
-            <a:off x="9372600" y="1781175"/>
-            <a:ext cx="2381250" cy="952500"/>
-          </a:xfrm>
-          <a:prstGeom xmlns:a="http://schemas.openxmlformats.org/drawingml/2006/main" prst="rect">
-            <a:avLst/>
-          </a:prstGeom>
-          <a:solidFill xmlns:a="http://schemas.openxmlformats.org/drawingml/2006/main">
-            <a:srgbClr val="FFFFFF"/>
-          </a:solidFill>
-          <a:ln xmlns:a="http://schemas.openxmlformats.org/drawingml/2006/main" w="6668">
-            <a:solidFill>
-              <a:srgbClr val="A6A6A6"/>
-            </a:solidFill>
-            <a:prstDash val="solid"/>
-          </a:ln>
-        </p:spPr>
-        <p:txBody xmlns:a="http://schemas.openxmlformats.org/drawingml/2006/main">
-          <a:bodyPr/>
-          <a:p/>
-        </p:txBody>
-      </p:sp>
-      <p:sp>
-        <p:nvSpPr>
-          <p:cNvPr id="29" name="page-05-object-028">
-            <a:extLst xmlns:a="http://schemas.openxmlformats.org/drawingml/2006/main">
-              <a:ext uri="{FF2B5EF4-FFF2-40B4-BE49-F238E27FC236}">
-                <a16:creationId xmlns:a16="http://schemas.microsoft.com/office/drawing/2014/main" id="{62C491F1-30ED-41B6-AE25-E9ACC80B70A0}"/>
-              </a:ext>
-            </a:extLst>
-          </p:cNvPr>
-          <p:cNvSpPr>
-            <a:spLocks xmlns:a="http://schemas.openxmlformats.org/drawingml/2006/main" noGrp="1"/>
-          </p:cNvSpPr>
-          <p:nvPr/>
-        </p:nvSpPr>
-        <p:spPr>
-          <a:xfrm xmlns:a="http://schemas.openxmlformats.org/drawingml/2006/main">
-            <a:off x="9458325" y="1914525"/>
-            <a:ext cx="2209800" cy="647700"/>
-          </a:xfrm>
-          <a:prstGeom xmlns:a="http://schemas.openxmlformats.org/drawingml/2006/main" prst="rect">
-            <a:avLst/>
-          </a:prstGeom>
-          <a:noFill xmlns:a="http://schemas.openxmlformats.org/drawingml/2006/main"/>
-          <a:ln xmlns:a="http://schemas.openxmlformats.org/drawingml/2006/main" w="0">
-            <a:noFill/>
-            <a:prstDash val="solid"/>
-          </a:ln>
-        </p:spPr>
-        <p:txBody>
-          <a:bodyPr xmlns:a="http://schemas.openxmlformats.org/drawingml/2006/main" wrap="square" lIns="38100" tIns="19050" rIns="38100" bIns="19050" anchor="ctr">
-            <a:noAutofit/>
-          </a:bodyPr>
-          <a:lstStyle xmlns:a="http://schemas.openxmlformats.org/drawingml/2006/main"/>
-          <a:p xmlns:a="http://schemas.openxmlformats.org/drawingml/2006/main">
-            <a:pPr algn="ctr">
-              <a:defRPr sz="975" b="0" i="0">
-                <a:solidFill>
-                  <a:srgbClr val="111111"/>
-                </a:solidFill>
-                <a:latin typeface="BIZ UDPゴシック"/>
-                <a:ea typeface="BIZ UDPゴシック"/>
-                <a:cs typeface="BIZ UDPゴシック"/>
-              </a:defRPr>
-            </a:pPr>
-            <a:r>
-              <a:rPr sz="975" b="0" i="0">
-                <a:solidFill>
-                  <a:srgbClr val="111111"/>
-                </a:solidFill>
-                <a:latin typeface="BIZ UDPゴシック"/>
-                <a:ea typeface="BIZ UDPゴシック"/>
-                <a:cs typeface="BIZ UDPゴシック"/>
-              </a:rPr>
-              <a:t>広告増額を判断</a:t>
-            </a:r>
-          </a:p>
-          <a:p xmlns:a="http://schemas.openxmlformats.org/drawingml/2006/main">
-            <a:pPr algn="ctr">
-              <a:defRPr sz="975" b="0" i="0">
-                <a:solidFill>
-                  <a:srgbClr val="111111"/>
-                </a:solidFill>
-                <a:latin typeface="BIZ UDPゴシック"/>
-                <a:ea typeface="BIZ UDPゴシック"/>
-                <a:cs typeface="BIZ UDPゴシック"/>
-              </a:defRPr>
-            </a:pPr>
-            <a:r>
-              <a:rPr sz="975" b="0" i="0">
-                <a:solidFill>
-                  <a:srgbClr val="111111"/>
-                </a:solidFill>
-                <a:latin typeface="BIZ UDPゴシック"/>
-                <a:ea typeface="BIZ UDPゴシック"/>
-                <a:cs typeface="BIZ UDPゴシック"/>
-              </a:rPr>
-              <a:t>入力：効果・粗利</a:t>
+              <a:t>次回会議で判断</a:t>
             </a:r>
           </a:p>
         </p:txBody>
@@ -10270,8 +10841,8 @@
         </p:nvSpPr>
         <p:spPr>
           <a:xfrm xmlns:a="http://schemas.openxmlformats.org/drawingml/2006/main">
-            <a:off x="285750" y="2847975"/>
-            <a:ext cx="1571625" cy="952500"/>
+            <a:off x="285750" y="2926080"/>
+            <a:ext cx="1571625" cy="786384"/>
           </a:xfrm>
           <a:prstGeom xmlns:a="http://schemas.openxmlformats.org/drawingml/2006/main" prst="rect">
             <a:avLst/>
@@ -10307,8 +10878,8 @@
         </p:nvSpPr>
         <p:spPr>
           <a:xfrm xmlns:a="http://schemas.openxmlformats.org/drawingml/2006/main">
-            <a:off x="371475" y="3152775"/>
-            <a:ext cx="1400175" cy="342900"/>
+            <a:off x="371475" y="3136392"/>
+            <a:ext cx="1400175" cy="365760"/>
           </a:xfrm>
           <a:prstGeom xmlns:a="http://schemas.openxmlformats.org/drawingml/2006/main" prst="rect">
             <a:avLst/>
@@ -10336,7 +10907,7 @@
               </a:defRPr>
             </a:pPr>
             <a:r>
-              <a:rPr sz="1200" b="1" i="0">
+              <a:rPr sz="1200" b="1" i="0" u="none">
                 <a:solidFill>
                   <a:srgbClr val="111111"/>
                 </a:solidFill>
@@ -10365,8 +10936,8 @@
         </p:nvSpPr>
         <p:spPr>
           <a:xfrm xmlns:a="http://schemas.openxmlformats.org/drawingml/2006/main">
-            <a:off x="2000250" y="2847975"/>
-            <a:ext cx="2381250" cy="952500"/>
+            <a:off x="2011680" y="2926080"/>
+            <a:ext cx="1920240" cy="786384"/>
           </a:xfrm>
           <a:prstGeom xmlns:a="http://schemas.openxmlformats.org/drawingml/2006/main" prst="rect">
             <a:avLst/>
@@ -10402,8 +10973,998 @@
         </p:nvSpPr>
         <p:spPr>
           <a:xfrm xmlns:a="http://schemas.openxmlformats.org/drawingml/2006/main">
-            <a:off x="2085975" y="2981325"/>
-            <a:ext cx="2209800" cy="647700"/>
+            <a:off x="2011680" y="2926080"/>
+            <a:ext cx="1920240" cy="786384"/>
+          </a:xfrm>
+          <a:prstGeom xmlns:a="http://schemas.openxmlformats.org/drawingml/2006/main" prst="rect">
+            <a:avLst/>
+          </a:prstGeom>
+          <a:noFill xmlns:a="http://schemas.openxmlformats.org/drawingml/2006/main"/>
+          <a:ln xmlns:a="http://schemas.openxmlformats.org/drawingml/2006/main" w="0">
+            <a:noFill/>
+            <a:prstDash val="solid"/>
+          </a:ln>
+        </p:spPr>
+        <p:txBody>
+          <a:bodyPr xmlns:a="http://schemas.openxmlformats.org/drawingml/2006/main" wrap="square" lIns="54864" tIns="36576" rIns="54864" bIns="36576" anchor="ctr">
+            <a:noAutofit/>
+          </a:bodyPr>
+          <a:lstStyle xmlns:a="http://schemas.openxmlformats.org/drawingml/2006/main"/>
+          <a:p xmlns:a="http://schemas.openxmlformats.org/drawingml/2006/main">
+            <a:pPr algn="ctr">
+              <a:defRPr sz="975" b="1" i="0">
+                <a:solidFill>
+                  <a:srgbClr val="111111"/>
+                </a:solidFill>
+                <a:latin typeface="BIZ UDPゴシック"/>
+                <a:ea typeface="BIZ UDPゴシック"/>
+                <a:cs typeface="BIZ UDPゴシック"/>
+              </a:defRPr>
+            </a:pPr>
+            <a:r>
+              <a:rPr sz="1250" b="0" i="0" u="none">
+                <a:solidFill>
+                  <a:srgbClr val="111111"/>
+                </a:solidFill>
+                <a:latin typeface="BIZ UDPゴシック"/>
+                <a:ea typeface="BIZ UDPゴシック"/>
+                <a:cs typeface="BIZ UDPゴシック"/>
+              </a:rPr>
+              <a:t>上位20商品を抽出</a:t>
+            </a:r>
+          </a:p>
+          <a:p xmlns:a="http://schemas.openxmlformats.org/drawingml/2006/main">
+            <a:pPr algn="ctr">
+              <a:defRPr sz="975" b="1" i="0">
+                <a:solidFill>
+                  <a:srgbClr val="111111"/>
+                </a:solidFill>
+                <a:latin typeface="BIZ UDPゴシック"/>
+                <a:ea typeface="BIZ UDPゴシック"/>
+                <a:cs typeface="BIZ UDPゴシック"/>
+              </a:defRPr>
+            </a:pPr>
+            <a:r>
+              <a:rPr sz="1250" b="0" i="0" u="none">
+                <a:solidFill>
+                  <a:srgbClr val="111111"/>
+                </a:solidFill>
+                <a:latin typeface="BIZ UDPゴシック"/>
+                <a:ea typeface="BIZ UDPゴシック"/>
+                <a:cs typeface="BIZ UDPゴシック"/>
+              </a:rPr>
+              <a:t>出力：対象一覧</a:t>
+            </a:r>
+          </a:p>
+        </p:txBody>
+      </p:sp>
+      <p:sp>
+        <p:nvSpPr>
+          <p:cNvPr id="36" name="page-05-object-035">
+            <a:extLst xmlns:a="http://schemas.openxmlformats.org/drawingml/2006/main">
+              <a:ext uri="{FF2B5EF4-FFF2-40B4-BE49-F238E27FC236}">
+                <a16:creationId xmlns:a16="http://schemas.microsoft.com/office/drawing/2014/main" id="{586DA120-027A-4104-BA43-5CFC7E1AC95F}"/>
+              </a:ext>
+            </a:extLst>
+          </p:cNvPr>
+          <p:cNvSpPr>
+            <a:spLocks xmlns:a="http://schemas.openxmlformats.org/drawingml/2006/main" noGrp="1"/>
+          </p:cNvSpPr>
+          <p:nvPr/>
+        </p:nvSpPr>
+        <p:spPr>
+          <a:xfrm xmlns:a="http://schemas.openxmlformats.org/drawingml/2006/main">
+            <a:off x="7132320" y="2926080"/>
+            <a:ext cx="1920240" cy="786384"/>
+          </a:xfrm>
+          <a:prstGeom xmlns:a="http://schemas.openxmlformats.org/drawingml/2006/main" prst="rect">
+            <a:avLst/>
+          </a:prstGeom>
+          <a:solidFill xmlns:a="http://schemas.openxmlformats.org/drawingml/2006/main">
+            <a:srgbClr val="F2F2F2"/>
+          </a:solidFill>
+          <a:ln xmlns:a="http://schemas.openxmlformats.org/drawingml/2006/main" w="6668">
+            <a:solidFill>
+              <a:srgbClr val="A6A6A6"/>
+            </a:solidFill>
+            <a:prstDash val="solid"/>
+          </a:ln>
+        </p:spPr>
+        <p:txBody xmlns:a="http://schemas.openxmlformats.org/drawingml/2006/main">
+          <a:bodyPr/>
+          <a:p/>
+        </p:txBody>
+      </p:sp>
+      <p:sp>
+        <p:nvSpPr>
+          <p:cNvPr id="37" name="page-05-object-036">
+            <a:extLst xmlns:a="http://schemas.openxmlformats.org/drawingml/2006/main">
+              <a:ext uri="{FF2B5EF4-FFF2-40B4-BE49-F238E27FC236}">
+                <a16:creationId xmlns:a16="http://schemas.microsoft.com/office/drawing/2014/main" id="{328B9E73-C4B1-4097-AE36-518174EAEF3D}"/>
+              </a:ext>
+            </a:extLst>
+          </p:cNvPr>
+          <p:cNvSpPr>
+            <a:spLocks xmlns:a="http://schemas.openxmlformats.org/drawingml/2006/main" noGrp="1"/>
+          </p:cNvSpPr>
+          <p:nvPr/>
+        </p:nvSpPr>
+        <p:spPr>
+          <a:xfrm xmlns:a="http://schemas.openxmlformats.org/drawingml/2006/main">
+            <a:off x="7132320" y="2926080"/>
+            <a:ext cx="1920240" cy="786384"/>
+          </a:xfrm>
+          <a:prstGeom xmlns:a="http://schemas.openxmlformats.org/drawingml/2006/main" prst="rect">
+            <a:avLst/>
+          </a:prstGeom>
+          <a:noFill xmlns:a="http://schemas.openxmlformats.org/drawingml/2006/main"/>
+          <a:ln xmlns:a="http://schemas.openxmlformats.org/drawingml/2006/main" w="0">
+            <a:noFill/>
+            <a:prstDash val="solid"/>
+          </a:ln>
+        </p:spPr>
+        <p:txBody>
+          <a:bodyPr xmlns:a="http://schemas.openxmlformats.org/drawingml/2006/main" wrap="square" lIns="54864" tIns="36576" rIns="54864" bIns="36576" anchor="ctr">
+            <a:noAutofit/>
+          </a:bodyPr>
+          <a:lstStyle xmlns:a="http://schemas.openxmlformats.org/drawingml/2006/main"/>
+          <a:p xmlns:a="http://schemas.openxmlformats.org/drawingml/2006/main">
+            <a:pPr algn="ctr">
+              <a:defRPr sz="975" b="1" i="0">
+                <a:solidFill>
+                  <a:srgbClr val="111111"/>
+                </a:solidFill>
+                <a:latin typeface="BIZ UDPゴシック"/>
+                <a:ea typeface="BIZ UDPゴシック"/>
+                <a:cs typeface="BIZ UDPゴシック"/>
+              </a:defRPr>
+            </a:pPr>
+            <a:r>
+              <a:rPr sz="1250" b="0" i="0" u="none">
+                <a:solidFill>
+                  <a:srgbClr val="111111"/>
+                </a:solidFill>
+                <a:latin typeface="BIZ UDPゴシック"/>
+                <a:ea typeface="BIZ UDPゴシック"/>
+                <a:cs typeface="BIZ UDPゴシック"/>
+              </a:rPr>
+              <a:t>返品上位5商品を改稿</a:t>
+            </a:r>
+          </a:p>
+          <a:p xmlns:a="http://schemas.openxmlformats.org/drawingml/2006/main">
+            <a:pPr algn="ctr">
+              <a:defRPr sz="975" b="1" i="0">
+                <a:solidFill>
+                  <a:srgbClr val="111111"/>
+                </a:solidFill>
+                <a:latin typeface="BIZ UDPゴシック"/>
+                <a:ea typeface="BIZ UDPゴシック"/>
+                <a:cs typeface="BIZ UDPゴシック"/>
+              </a:defRPr>
+            </a:pPr>
+            <a:r>
+              <a:rPr sz="1250" b="0" i="0" u="none">
+                <a:solidFill>
+                  <a:srgbClr val="111111"/>
+                </a:solidFill>
+                <a:latin typeface="BIZ UDPゴシック"/>
+                <a:ea typeface="BIZ UDPゴシック"/>
+                <a:cs typeface="BIZ UDPゴシック"/>
+              </a:rPr>
+              <a:t>出力：修正記録</a:t>
+            </a:r>
+          </a:p>
+          <a:p xmlns:a="http://schemas.openxmlformats.org/drawingml/2006/main">
+            <a:pPr algn="ctr">
+              <a:defRPr sz="975" b="1" i="0">
+                <a:solidFill>
+                  <a:srgbClr val="111111"/>
+                </a:solidFill>
+                <a:latin typeface="BIZ UDPゴシック"/>
+                <a:ea typeface="BIZ UDPゴシック"/>
+                <a:cs typeface="BIZ UDPゴシック"/>
+              </a:defRPr>
+            </a:pPr>
+            <a:r>
+              <a:rPr sz="1250" b="0" i="0" u="none">
+                <a:solidFill>
+                  <a:srgbClr val="111111"/>
+                </a:solidFill>
+                <a:latin typeface="BIZ UDPゴシック"/>
+                <a:ea typeface="BIZ UDPゴシック"/>
+                <a:cs typeface="BIZ UDPゴシック"/>
+              </a:rPr>
+              <a:t>10/16の目標</a:t>
+            </a:r>
+          </a:p>
+        </p:txBody>
+      </p:sp>
+      <p:sp>
+        <p:nvSpPr>
+          <p:cNvPr id="38" name="page-05-object-037">
+            <a:extLst xmlns:a="http://schemas.openxmlformats.org/drawingml/2006/main">
+              <a:ext uri="{FF2B5EF4-FFF2-40B4-BE49-F238E27FC236}">
+                <a16:creationId xmlns:a16="http://schemas.microsoft.com/office/drawing/2014/main" id="{D635B3D2-974D-4610-9B9A-00BF599A326F}"/>
+              </a:ext>
+            </a:extLst>
+          </p:cNvPr>
+          <p:cNvSpPr>
+            <a:spLocks xmlns:a="http://schemas.openxmlformats.org/drawingml/2006/main" noGrp="1"/>
+          </p:cNvSpPr>
+          <p:nvPr/>
+        </p:nvSpPr>
+        <p:spPr>
+          <a:xfrm xmlns:a="http://schemas.openxmlformats.org/drawingml/2006/main">
+            <a:off x="9692640" y="2926080"/>
+            <a:ext cx="1920240" cy="786384"/>
+          </a:xfrm>
+          <a:prstGeom xmlns:a="http://schemas.openxmlformats.org/drawingml/2006/main" prst="rect">
+            <a:avLst/>
+          </a:prstGeom>
+          <a:solidFill xmlns:a="http://schemas.openxmlformats.org/drawingml/2006/main">
+            <a:srgbClr val="F2F2F2"/>
+          </a:solidFill>
+          <a:ln xmlns:a="http://schemas.openxmlformats.org/drawingml/2006/main" w="6668">
+            <a:solidFill>
+              <a:srgbClr val="A6A6A6"/>
+            </a:solidFill>
+            <a:prstDash val="solid"/>
+          </a:ln>
+        </p:spPr>
+        <p:txBody xmlns:a="http://schemas.openxmlformats.org/drawingml/2006/main">
+          <a:bodyPr/>
+          <a:p/>
+        </p:txBody>
+      </p:sp>
+      <p:sp>
+        <p:nvSpPr>
+          <p:cNvPr id="39" name="page-05-object-038">
+            <a:extLst xmlns:a="http://schemas.openxmlformats.org/drawingml/2006/main">
+              <a:ext uri="{FF2B5EF4-FFF2-40B4-BE49-F238E27FC236}">
+                <a16:creationId xmlns:a16="http://schemas.microsoft.com/office/drawing/2014/main" id="{F1A32E1A-B658-4C81-BEA0-13219CECA7E2}"/>
+              </a:ext>
+            </a:extLst>
+          </p:cNvPr>
+          <p:cNvSpPr>
+            <a:spLocks xmlns:a="http://schemas.openxmlformats.org/drawingml/2006/main" noGrp="1"/>
+          </p:cNvSpPr>
+          <p:nvPr/>
+        </p:nvSpPr>
+        <p:spPr>
+          <a:xfrm xmlns:a="http://schemas.openxmlformats.org/drawingml/2006/main">
+            <a:off x="9692640" y="2926080"/>
+            <a:ext cx="1920240" cy="786384"/>
+          </a:xfrm>
+          <a:prstGeom xmlns:a="http://schemas.openxmlformats.org/drawingml/2006/main" prst="rect">
+            <a:avLst/>
+          </a:prstGeom>
+          <a:noFill xmlns:a="http://schemas.openxmlformats.org/drawingml/2006/main"/>
+          <a:ln xmlns:a="http://schemas.openxmlformats.org/drawingml/2006/main" w="0">
+            <a:noFill/>
+            <a:prstDash val="solid"/>
+          </a:ln>
+        </p:spPr>
+        <p:txBody>
+          <a:bodyPr xmlns:a="http://schemas.openxmlformats.org/drawingml/2006/main" wrap="square" lIns="54864" tIns="36576" rIns="54864" bIns="36576" anchor="ctr">
+            <a:noAutofit/>
+          </a:bodyPr>
+          <a:lstStyle xmlns:a="http://schemas.openxmlformats.org/drawingml/2006/main"/>
+          <a:p xmlns:a="http://schemas.openxmlformats.org/drawingml/2006/main">
+            <a:pPr algn="ctr">
+              <a:defRPr sz="975" b="1" i="0">
+                <a:solidFill>
+                  <a:srgbClr val="111111"/>
+                </a:solidFill>
+                <a:latin typeface="BIZ UDPゴシック"/>
+                <a:ea typeface="BIZ UDPゴシック"/>
+                <a:cs typeface="BIZ UDPゴシック"/>
+              </a:defRPr>
+            </a:pPr>
+            <a:r>
+              <a:rPr sz="1250" b="0" i="0" u="none">
+                <a:solidFill>
+                  <a:srgbClr val="111111"/>
+                </a:solidFill>
+                <a:latin typeface="BIZ UDPゴシック"/>
+                <a:ea typeface="BIZ UDPゴシック"/>
+                <a:cs typeface="BIZ UDPゴシック"/>
+              </a:rPr>
+              <a:t>返品率を週次比較</a:t>
+            </a:r>
+          </a:p>
+          <a:p xmlns:a="http://schemas.openxmlformats.org/drawingml/2006/main">
+            <a:pPr algn="ctr">
+              <a:defRPr sz="975" b="1" i="0">
+                <a:solidFill>
+                  <a:srgbClr val="111111"/>
+                </a:solidFill>
+                <a:latin typeface="BIZ UDPゴシック"/>
+                <a:ea typeface="BIZ UDPゴシック"/>
+                <a:cs typeface="BIZ UDPゴシック"/>
+              </a:defRPr>
+            </a:pPr>
+            <a:r>
+              <a:rPr sz="1250" b="0" i="0" u="none">
+                <a:solidFill>
+                  <a:srgbClr val="111111"/>
+                </a:solidFill>
+                <a:latin typeface="BIZ UDPゴシック"/>
+                <a:ea typeface="BIZ UDPゴシック"/>
+                <a:cs typeface="BIZ UDPゴシック"/>
+              </a:rPr>
+              <a:t>商品別粗利を分析</a:t>
+            </a:r>
+          </a:p>
+          <a:p xmlns:a="http://schemas.openxmlformats.org/drawingml/2006/main">
+            <a:pPr algn="ctr">
+              <a:defRPr sz="975" b="1" i="0">
+                <a:solidFill>
+                  <a:srgbClr val="111111"/>
+                </a:solidFill>
+                <a:latin typeface="BIZ UDPゴシック"/>
+                <a:ea typeface="BIZ UDPゴシック"/>
+                <a:cs typeface="BIZ UDPゴシック"/>
+              </a:defRPr>
+            </a:pPr>
+            <a:r>
+              <a:rPr sz="1250" b="0" i="0" u="none">
+                <a:solidFill>
+                  <a:srgbClr val="111111"/>
+                </a:solidFill>
+                <a:latin typeface="BIZ UDPゴシック"/>
+                <a:ea typeface="BIZ UDPゴシック"/>
+                <a:cs typeface="BIZ UDPゴシック"/>
+              </a:rPr>
+              <a:t>出力：効果・粗利</a:t>
+            </a:r>
+          </a:p>
+        </p:txBody>
+      </p:sp>
+      <p:sp>
+        <p:nvSpPr>
+          <p:cNvPr id="40" name="page-05-object-039">
+            <a:extLst xmlns:a="http://schemas.openxmlformats.org/drawingml/2006/main">
+              <a:ext uri="{FF2B5EF4-FFF2-40B4-BE49-F238E27FC236}">
+                <a16:creationId xmlns:a16="http://schemas.microsoft.com/office/drawing/2014/main" id="{0E49CCA1-861A-4AFB-8B61-EA724A5A521A}"/>
+              </a:ext>
+            </a:extLst>
+          </p:cNvPr>
+          <p:cNvSpPr>
+            <a:spLocks xmlns:a="http://schemas.openxmlformats.org/drawingml/2006/main" noGrp="1"/>
+          </p:cNvSpPr>
+          <p:nvPr/>
+        </p:nvSpPr>
+        <p:spPr>
+          <a:xfrm xmlns:a="http://schemas.openxmlformats.org/drawingml/2006/main">
+            <a:off x="285750" y="4069080"/>
+            <a:ext cx="1571625" cy="786384"/>
+          </a:xfrm>
+          <a:prstGeom xmlns:a="http://schemas.openxmlformats.org/drawingml/2006/main" prst="rect">
+            <a:avLst/>
+          </a:prstGeom>
+          <a:solidFill xmlns:a="http://schemas.openxmlformats.org/drawingml/2006/main">
+            <a:srgbClr val="FFF2CC"/>
+          </a:solidFill>
+          <a:ln xmlns:a="http://schemas.openxmlformats.org/drawingml/2006/main" w="9525">
+            <a:solidFill>
+              <a:srgbClr val="A6A6A6"/>
+            </a:solidFill>
+            <a:prstDash val="solid"/>
+          </a:ln>
+        </p:spPr>
+        <p:txBody xmlns:a="http://schemas.openxmlformats.org/drawingml/2006/main">
+          <a:bodyPr/>
+          <a:p/>
+        </p:txBody>
+      </p:sp>
+      <p:sp>
+        <p:nvSpPr>
+          <p:cNvPr id="41" name="page-05-object-040">
+            <a:extLst xmlns:a="http://schemas.openxmlformats.org/drawingml/2006/main">
+              <a:ext uri="{FF2B5EF4-FFF2-40B4-BE49-F238E27FC236}">
+                <a16:creationId xmlns:a16="http://schemas.microsoft.com/office/drawing/2014/main" id="{FF81B98C-B7D6-41FB-BBBB-DA2E4365286E}"/>
+              </a:ext>
+            </a:extLst>
+          </p:cNvPr>
+          <p:cNvSpPr>
+            <a:spLocks xmlns:a="http://schemas.openxmlformats.org/drawingml/2006/main" noGrp="1"/>
+          </p:cNvSpPr>
+          <p:nvPr/>
+        </p:nvSpPr>
+        <p:spPr>
+          <a:xfrm xmlns:a="http://schemas.openxmlformats.org/drawingml/2006/main">
+            <a:off x="371475" y="4279392"/>
+            <a:ext cx="1400175" cy="365760"/>
+          </a:xfrm>
+          <a:prstGeom xmlns:a="http://schemas.openxmlformats.org/drawingml/2006/main" prst="rect">
+            <a:avLst/>
+          </a:prstGeom>
+          <a:noFill xmlns:a="http://schemas.openxmlformats.org/drawingml/2006/main"/>
+          <a:ln xmlns:a="http://schemas.openxmlformats.org/drawingml/2006/main" w="0">
+            <a:noFill/>
+            <a:prstDash val="solid"/>
+          </a:ln>
+        </p:spPr>
+        <p:txBody>
+          <a:bodyPr xmlns:a="http://schemas.openxmlformats.org/drawingml/2006/main" wrap="square" lIns="38100" tIns="19050" rIns="38100" bIns="19050" anchor="ctr">
+            <a:noAutofit/>
+          </a:bodyPr>
+          <a:lstStyle xmlns:a="http://schemas.openxmlformats.org/drawingml/2006/main"/>
+          <a:p xmlns:a="http://schemas.openxmlformats.org/drawingml/2006/main">
+            <a:pPr algn="ctr">
+              <a:defRPr sz="1200" b="1" i="0">
+                <a:solidFill>
+                  <a:srgbClr val="111111"/>
+                </a:solidFill>
+                <a:latin typeface="BIZ UDPゴシック"/>
+                <a:ea typeface="BIZ UDPゴシック"/>
+                <a:cs typeface="BIZ UDPゴシック"/>
+              </a:defRPr>
+            </a:pPr>
+            <a:r>
+              <a:rPr sz="1200" b="1" i="0" u="none">
+                <a:solidFill>
+                  <a:srgbClr val="111111"/>
+                </a:solidFill>
+                <a:latin typeface="BIZ UDPゴシック"/>
+                <a:ea typeface="BIZ UDPゴシック"/>
+                <a:cs typeface="BIZ UDPゴシック"/>
+              </a:rPr>
+              <a:t>顧客対応</a:t>
+            </a:r>
+          </a:p>
+        </p:txBody>
+      </p:sp>
+      <p:sp>
+        <p:nvSpPr>
+          <p:cNvPr id="42" name="page-05-object-041">
+            <a:extLst xmlns:a="http://schemas.openxmlformats.org/drawingml/2006/main">
+              <a:ext uri="{FF2B5EF4-FFF2-40B4-BE49-F238E27FC236}">
+                <a16:creationId xmlns:a16="http://schemas.microsoft.com/office/drawing/2014/main" id="{317E712A-F594-4153-943F-144AF0FDACB3}"/>
+              </a:ext>
+            </a:extLst>
+          </p:cNvPr>
+          <p:cNvSpPr>
+            <a:spLocks xmlns:a="http://schemas.openxmlformats.org/drawingml/2006/main" noGrp="1"/>
+          </p:cNvSpPr>
+          <p:nvPr/>
+        </p:nvSpPr>
+        <p:spPr>
+          <a:xfrm xmlns:a="http://schemas.openxmlformats.org/drawingml/2006/main">
+            <a:off x="2011680" y="4069080"/>
+            <a:ext cx="1920240" cy="786384"/>
+          </a:xfrm>
+          <a:prstGeom xmlns:a="http://schemas.openxmlformats.org/drawingml/2006/main" prst="rect">
+            <a:avLst/>
+          </a:prstGeom>
+          <a:solidFill xmlns:a="http://schemas.openxmlformats.org/drawingml/2006/main">
+            <a:srgbClr val="FFFFFF"/>
+          </a:solidFill>
+          <a:ln xmlns:a="http://schemas.openxmlformats.org/drawingml/2006/main" w="6668">
+            <a:solidFill>
+              <a:srgbClr val="A6A6A6"/>
+            </a:solidFill>
+            <a:prstDash val="solid"/>
+          </a:ln>
+        </p:spPr>
+        <p:txBody xmlns:a="http://schemas.openxmlformats.org/drawingml/2006/main">
+          <a:bodyPr/>
+          <a:p/>
+        </p:txBody>
+      </p:sp>
+      <p:sp>
+        <p:nvSpPr>
+          <p:cNvPr id="43" name="page-05-object-042">
+            <a:extLst xmlns:a="http://schemas.openxmlformats.org/drawingml/2006/main">
+              <a:ext uri="{FF2B5EF4-FFF2-40B4-BE49-F238E27FC236}">
+                <a16:creationId xmlns:a16="http://schemas.microsoft.com/office/drawing/2014/main" id="{27B2C152-BE75-4757-9886-AC3A04B3FF9E}"/>
+              </a:ext>
+            </a:extLst>
+          </p:cNvPr>
+          <p:cNvSpPr>
+            <a:spLocks xmlns:a="http://schemas.openxmlformats.org/drawingml/2006/main" noGrp="1"/>
+          </p:cNvSpPr>
+          <p:nvPr/>
+        </p:nvSpPr>
+        <p:spPr>
+          <a:xfrm xmlns:a="http://schemas.openxmlformats.org/drawingml/2006/main">
+            <a:off x="2011680" y="4069080"/>
+            <a:ext cx="1920240" cy="786384"/>
+          </a:xfrm>
+          <a:prstGeom xmlns:a="http://schemas.openxmlformats.org/drawingml/2006/main" prst="rect">
+            <a:avLst/>
+          </a:prstGeom>
+          <a:noFill xmlns:a="http://schemas.openxmlformats.org/drawingml/2006/main"/>
+          <a:ln xmlns:a="http://schemas.openxmlformats.org/drawingml/2006/main" w="0">
+            <a:noFill/>
+            <a:prstDash val="solid"/>
+          </a:ln>
+        </p:spPr>
+        <p:txBody>
+          <a:bodyPr xmlns:a="http://schemas.openxmlformats.org/drawingml/2006/main" wrap="square" lIns="54864" tIns="36576" rIns="54864" bIns="36576" anchor="ctr">
+            <a:noAutofit/>
+          </a:bodyPr>
+          <a:lstStyle xmlns:a="http://schemas.openxmlformats.org/drawingml/2006/main"/>
+          <a:p xmlns:a="http://schemas.openxmlformats.org/drawingml/2006/main">
+            <a:pPr algn="ctr">
+              <a:defRPr sz="975" b="0" i="0">
+                <a:solidFill>
+                  <a:srgbClr val="111111"/>
+                </a:solidFill>
+                <a:latin typeface="BIZ UDPゴシック"/>
+                <a:ea typeface="BIZ UDPゴシック"/>
+                <a:cs typeface="BIZ UDPゴシック"/>
+              </a:defRPr>
+            </a:pPr>
+            <a:r>
+              <a:rPr sz="1250" b="0" i="0" u="none">
+                <a:solidFill>
+                  <a:srgbClr val="111111"/>
+                </a:solidFill>
+                <a:latin typeface="BIZ UDPゴシック"/>
+                <a:ea typeface="BIZ UDPゴシック"/>
+                <a:cs typeface="BIZ UDPゴシック"/>
+              </a:rPr>
+              <a:t>対象の返品を抽出</a:t>
+            </a:r>
+          </a:p>
+          <a:p xmlns:a="http://schemas.openxmlformats.org/drawingml/2006/main">
+            <a:pPr algn="ctr">
+              <a:defRPr sz="975" b="0" i="0">
+                <a:solidFill>
+                  <a:srgbClr val="111111"/>
+                </a:solidFill>
+                <a:latin typeface="BIZ UDPゴシック"/>
+                <a:ea typeface="BIZ UDPゴシック"/>
+                <a:cs typeface="BIZ UDPゴシック"/>
+              </a:defRPr>
+            </a:pPr>
+            <a:r>
+              <a:rPr sz="1250" b="0" i="0" u="none">
+                <a:solidFill>
+                  <a:srgbClr val="111111"/>
+                </a:solidFill>
+                <a:latin typeface="BIZ UDPゴシック"/>
+                <a:ea typeface="BIZ UDPゴシック"/>
+                <a:cs typeface="BIZ UDPゴシック"/>
+              </a:rPr>
+              <a:t>出力：返品一覧</a:t>
+            </a:r>
+          </a:p>
+        </p:txBody>
+      </p:sp>
+      <p:sp>
+        <p:nvSpPr>
+          <p:cNvPr id="44" name="page-05-object-043">
+            <a:extLst xmlns:a="http://schemas.openxmlformats.org/drawingml/2006/main">
+              <a:ext uri="{FF2B5EF4-FFF2-40B4-BE49-F238E27FC236}">
+                <a16:creationId xmlns:a16="http://schemas.microsoft.com/office/drawing/2014/main" id="{3F45CCD4-433D-4905-881D-E8AD7BE16A90}"/>
+              </a:ext>
+            </a:extLst>
+          </p:cNvPr>
+          <p:cNvSpPr>
+            <a:spLocks xmlns:a="http://schemas.openxmlformats.org/drawingml/2006/main" noGrp="1"/>
+          </p:cNvSpPr>
+          <p:nvPr/>
+        </p:nvSpPr>
+        <p:spPr>
+          <a:xfrm xmlns:a="http://schemas.openxmlformats.org/drawingml/2006/main">
+            <a:off x="4572000" y="4069080"/>
+            <a:ext cx="1920240" cy="786384"/>
+          </a:xfrm>
+          <a:prstGeom xmlns:a="http://schemas.openxmlformats.org/drawingml/2006/main" prst="rect">
+            <a:avLst/>
+          </a:prstGeom>
+          <a:solidFill xmlns:a="http://schemas.openxmlformats.org/drawingml/2006/main">
+            <a:srgbClr val="FFFFFF"/>
+          </a:solidFill>
+          <a:ln xmlns:a="http://schemas.openxmlformats.org/drawingml/2006/main" w="6668">
+            <a:solidFill>
+              <a:srgbClr val="A6A6A6"/>
+            </a:solidFill>
+            <a:prstDash val="solid"/>
+          </a:ln>
+        </p:spPr>
+        <p:txBody xmlns:a="http://schemas.openxmlformats.org/drawingml/2006/main">
+          <a:bodyPr/>
+          <a:p/>
+        </p:txBody>
+      </p:sp>
+      <p:sp>
+        <p:nvSpPr>
+          <p:cNvPr id="45" name="page-05-object-044">
+            <a:extLst xmlns:a="http://schemas.openxmlformats.org/drawingml/2006/main">
+              <a:ext uri="{FF2B5EF4-FFF2-40B4-BE49-F238E27FC236}">
+                <a16:creationId xmlns:a16="http://schemas.microsoft.com/office/drawing/2014/main" id="{3E7B9B6C-E745-4AF4-8245-C78318B70BAB}"/>
+              </a:ext>
+            </a:extLst>
+          </p:cNvPr>
+          <p:cNvSpPr>
+            <a:spLocks xmlns:a="http://schemas.openxmlformats.org/drawingml/2006/main" noGrp="1"/>
+          </p:cNvSpPr>
+          <p:nvPr/>
+        </p:nvSpPr>
+        <p:spPr>
+          <a:xfrm xmlns:a="http://schemas.openxmlformats.org/drawingml/2006/main">
+            <a:off x="4572000" y="4069080"/>
+            <a:ext cx="1920240" cy="786384"/>
+          </a:xfrm>
+          <a:prstGeom xmlns:a="http://schemas.openxmlformats.org/drawingml/2006/main" prst="rect">
+            <a:avLst/>
+          </a:prstGeom>
+          <a:noFill xmlns:a="http://schemas.openxmlformats.org/drawingml/2006/main"/>
+          <a:ln xmlns:a="http://schemas.openxmlformats.org/drawingml/2006/main" w="0">
+            <a:noFill/>
+            <a:prstDash val="solid"/>
+          </a:ln>
+        </p:spPr>
+        <p:txBody>
+          <a:bodyPr xmlns:a="http://schemas.openxmlformats.org/drawingml/2006/main" wrap="square" lIns="54864" tIns="36576" rIns="54864" bIns="36576" anchor="ctr">
+            <a:noAutofit/>
+          </a:bodyPr>
+          <a:lstStyle xmlns:a="http://schemas.openxmlformats.org/drawingml/2006/main"/>
+          <a:p xmlns:a="http://schemas.openxmlformats.org/drawingml/2006/main">
+            <a:pPr algn="ctr">
+              <a:defRPr sz="975" b="0" i="0">
+                <a:solidFill>
+                  <a:srgbClr val="111111"/>
+                </a:solidFill>
+                <a:latin typeface="BIZ UDPゴシック"/>
+                <a:ea typeface="BIZ UDPゴシック"/>
+                <a:cs typeface="BIZ UDPゴシック"/>
+              </a:defRPr>
+            </a:pPr>
+            <a:r>
+              <a:rPr sz="1250" b="0" i="0" u="none">
+                <a:solidFill>
+                  <a:srgbClr val="111111"/>
+                </a:solidFill>
+                <a:latin typeface="BIZ UDPゴシック"/>
+                <a:ea typeface="BIZ UDPゴシック"/>
+                <a:cs typeface="BIZ UDPゴシック"/>
+              </a:rPr>
+              <a:t>返品理由を分類</a:t>
+            </a:r>
+          </a:p>
+          <a:p xmlns:a="http://schemas.openxmlformats.org/drawingml/2006/main">
+            <a:pPr algn="ctr">
+              <a:defRPr sz="975" b="0" i="0">
+                <a:solidFill>
+                  <a:srgbClr val="111111"/>
+                </a:solidFill>
+                <a:latin typeface="BIZ UDPゴシック"/>
+                <a:ea typeface="BIZ UDPゴシック"/>
+                <a:cs typeface="BIZ UDPゴシック"/>
+              </a:defRPr>
+            </a:pPr>
+            <a:r>
+              <a:rPr sz="1250" b="0" i="0" u="none">
+                <a:solidFill>
+                  <a:srgbClr val="111111"/>
+                </a:solidFill>
+                <a:latin typeface="BIZ UDPゴシック"/>
+                <a:ea typeface="BIZ UDPゴシック"/>
+                <a:cs typeface="BIZ UDPゴシック"/>
+              </a:rPr>
+              <a:t>10/09の目標</a:t>
+            </a:r>
+          </a:p>
+          <a:p xmlns:a="http://schemas.openxmlformats.org/drawingml/2006/main">
+            <a:pPr algn="ctr">
+              <a:defRPr sz="975" b="0" i="0">
+                <a:solidFill>
+                  <a:srgbClr val="111111"/>
+                </a:solidFill>
+                <a:latin typeface="BIZ UDPゴシック"/>
+                <a:ea typeface="BIZ UDPゴシック"/>
+                <a:cs typeface="BIZ UDPゴシック"/>
+              </a:defRPr>
+            </a:pPr>
+            <a:r>
+              <a:rPr sz="1250" b="0" i="0" u="none">
+                <a:solidFill>
+                  <a:srgbClr val="111111"/>
+                </a:solidFill>
+                <a:latin typeface="BIZ UDPゴシック"/>
+                <a:ea typeface="BIZ UDPゴシック"/>
+                <a:cs typeface="BIZ UDPゴシック"/>
+              </a:rPr>
+              <a:t>分類率100%</a:t>
+            </a:r>
+          </a:p>
+        </p:txBody>
+      </p:sp>
+      <p:sp>
+        <p:nvSpPr>
+          <p:cNvPr id="46" name="page-05-object-045">
+            <a:extLst xmlns:a="http://schemas.openxmlformats.org/drawingml/2006/main">
+              <a:ext uri="{FF2B5EF4-FFF2-40B4-BE49-F238E27FC236}">
+                <a16:creationId xmlns:a16="http://schemas.microsoft.com/office/drawing/2014/main" id="{C5E9AA23-E05F-4EEA-B9E5-B88E884F1CF1}"/>
+              </a:ext>
+            </a:extLst>
+          </p:cNvPr>
+          <p:cNvSpPr>
+            <a:spLocks xmlns:a="http://schemas.openxmlformats.org/drawingml/2006/main" noGrp="1"/>
+          </p:cNvSpPr>
+          <p:nvPr/>
+        </p:nvSpPr>
+        <p:spPr>
+          <a:xfrm xmlns:a="http://schemas.openxmlformats.org/drawingml/2006/main">
+            <a:off x="7132320" y="4069080"/>
+            <a:ext cx="1920240" cy="786384"/>
+          </a:xfrm>
+          <a:prstGeom xmlns:a="http://schemas.openxmlformats.org/drawingml/2006/main" prst="rect">
+            <a:avLst/>
+          </a:prstGeom>
+          <a:solidFill xmlns:a="http://schemas.openxmlformats.org/drawingml/2006/main">
+            <a:srgbClr val="FFFFFF"/>
+          </a:solidFill>
+          <a:ln xmlns:a="http://schemas.openxmlformats.org/drawingml/2006/main" w="6668">
+            <a:solidFill>
+              <a:srgbClr val="A6A6A6"/>
+            </a:solidFill>
+            <a:prstDash val="solid"/>
+          </a:ln>
+        </p:spPr>
+        <p:txBody xmlns:a="http://schemas.openxmlformats.org/drawingml/2006/main">
+          <a:bodyPr/>
+          <a:p/>
+        </p:txBody>
+      </p:sp>
+      <p:sp>
+        <p:nvSpPr>
+          <p:cNvPr id="47" name="page-05-object-046">
+            <a:extLst xmlns:a="http://schemas.openxmlformats.org/drawingml/2006/main">
+              <a:ext uri="{FF2B5EF4-FFF2-40B4-BE49-F238E27FC236}">
+                <a16:creationId xmlns:a16="http://schemas.microsoft.com/office/drawing/2014/main" id="{FAA5B7D4-92B1-4C7C-A740-F7B5B98A5D15}"/>
+              </a:ext>
+            </a:extLst>
+          </p:cNvPr>
+          <p:cNvSpPr>
+            <a:spLocks xmlns:a="http://schemas.openxmlformats.org/drawingml/2006/main" noGrp="1"/>
+          </p:cNvSpPr>
+          <p:nvPr/>
+        </p:nvSpPr>
+        <p:spPr>
+          <a:xfrm xmlns:a="http://schemas.openxmlformats.org/drawingml/2006/main">
+            <a:off x="7132320" y="4069080"/>
+            <a:ext cx="1920240" cy="786384"/>
+          </a:xfrm>
+          <a:prstGeom xmlns:a="http://schemas.openxmlformats.org/drawingml/2006/main" prst="rect">
+            <a:avLst/>
+          </a:prstGeom>
+          <a:noFill xmlns:a="http://schemas.openxmlformats.org/drawingml/2006/main"/>
+          <a:ln xmlns:a="http://schemas.openxmlformats.org/drawingml/2006/main" w="0">
+            <a:noFill/>
+            <a:prstDash val="solid"/>
+          </a:ln>
+        </p:spPr>
+        <p:txBody>
+          <a:bodyPr xmlns:a="http://schemas.openxmlformats.org/drawingml/2006/main" wrap="square" lIns="54864" tIns="36576" rIns="54864" bIns="36576" anchor="ctr">
+            <a:noAutofit/>
+          </a:bodyPr>
+          <a:lstStyle xmlns:a="http://schemas.openxmlformats.org/drawingml/2006/main"/>
+          <a:p xmlns:a="http://schemas.openxmlformats.org/drawingml/2006/main">
+            <a:pPr algn="ctr">
+              <a:defRPr sz="975" b="0" i="0">
+                <a:solidFill>
+                  <a:srgbClr val="111111"/>
+                </a:solidFill>
+                <a:latin typeface="BIZ UDPゴシック"/>
+                <a:ea typeface="BIZ UDPゴシック"/>
+                <a:cs typeface="BIZ UDPゴシック"/>
+              </a:defRPr>
+            </a:pPr>
+            <a:r>
+              <a:rPr sz="1250" b="0" i="0" u="none">
+                <a:solidFill>
+                  <a:srgbClr val="111111"/>
+                </a:solidFill>
+                <a:latin typeface="BIZ UDPゴシック"/>
+                <a:ea typeface="BIZ UDPゴシック"/>
+                <a:cs typeface="BIZ UDPゴシック"/>
+              </a:rPr>
+              <a:t>説明と理由を照合</a:t>
+            </a:r>
+          </a:p>
+          <a:p xmlns:a="http://schemas.openxmlformats.org/drawingml/2006/main">
+            <a:pPr algn="ctr">
+              <a:defRPr sz="975" b="0" i="0">
+                <a:solidFill>
+                  <a:srgbClr val="111111"/>
+                </a:solidFill>
+                <a:latin typeface="BIZ UDPゴシック"/>
+                <a:ea typeface="BIZ UDPゴシック"/>
+                <a:cs typeface="BIZ UDPゴシック"/>
+              </a:defRPr>
+            </a:pPr>
+            <a:r>
+              <a:rPr sz="1250" b="0" i="0" u="none">
+                <a:solidFill>
+                  <a:srgbClr val="111111"/>
+                </a:solidFill>
+                <a:latin typeface="BIZ UDPゴシック"/>
+                <a:ea typeface="BIZ UDPゴシック"/>
+                <a:cs typeface="BIZ UDPゴシック"/>
+              </a:rPr>
+              <a:t>入力：修正記録</a:t>
+            </a:r>
+          </a:p>
+        </p:txBody>
+      </p:sp>
+      <p:sp>
+        <p:nvSpPr>
+          <p:cNvPr id="48" name="page-05-object-047">
+            <a:extLst xmlns:a="http://schemas.openxmlformats.org/drawingml/2006/main">
+              <a:ext uri="{FF2B5EF4-FFF2-40B4-BE49-F238E27FC236}">
+                <a16:creationId xmlns:a16="http://schemas.microsoft.com/office/drawing/2014/main" id="{8E7937D5-559B-4854-AEB4-645B1CC905C5}"/>
+              </a:ext>
+            </a:extLst>
+          </p:cNvPr>
+          <p:cNvSpPr>
+            <a:spLocks xmlns:a="http://schemas.openxmlformats.org/drawingml/2006/main" noGrp="1"/>
+          </p:cNvSpPr>
+          <p:nvPr/>
+        </p:nvSpPr>
+        <p:spPr>
+          <a:xfrm xmlns:a="http://schemas.openxmlformats.org/drawingml/2006/main">
+            <a:off x="9692640" y="4069080"/>
+            <a:ext cx="1920240" cy="786384"/>
+          </a:xfrm>
+          <a:prstGeom xmlns:a="http://schemas.openxmlformats.org/drawingml/2006/main" prst="rect">
+            <a:avLst/>
+          </a:prstGeom>
+          <a:solidFill xmlns:a="http://schemas.openxmlformats.org/drawingml/2006/main">
+            <a:srgbClr val="FFFFFF"/>
+          </a:solidFill>
+          <a:ln xmlns:a="http://schemas.openxmlformats.org/drawingml/2006/main" w="6668">
+            <a:solidFill>
+              <a:srgbClr val="A6A6A6"/>
+            </a:solidFill>
+            <a:prstDash val="solid"/>
+          </a:ln>
+        </p:spPr>
+        <p:txBody xmlns:a="http://schemas.openxmlformats.org/drawingml/2006/main">
+          <a:bodyPr/>
+          <a:p/>
+        </p:txBody>
+      </p:sp>
+      <p:sp>
+        <p:nvSpPr>
+          <p:cNvPr id="49" name="page-05-object-048">
+            <a:extLst xmlns:a="http://schemas.openxmlformats.org/drawingml/2006/main">
+              <a:ext uri="{FF2B5EF4-FFF2-40B4-BE49-F238E27FC236}">
+                <a16:creationId xmlns:a16="http://schemas.microsoft.com/office/drawing/2014/main" id="{3662AAE5-C290-4C03-9128-DE0B88DB34C8}"/>
+              </a:ext>
+            </a:extLst>
+          </p:cNvPr>
+          <p:cNvSpPr>
+            <a:spLocks xmlns:a="http://schemas.openxmlformats.org/drawingml/2006/main" noGrp="1"/>
+          </p:cNvSpPr>
+          <p:nvPr/>
+        </p:nvSpPr>
+        <p:spPr>
+          <a:xfrm xmlns:a="http://schemas.openxmlformats.org/drawingml/2006/main">
+            <a:off x="9692640" y="4069080"/>
+            <a:ext cx="1920240" cy="786384"/>
+          </a:xfrm>
+          <a:prstGeom xmlns:a="http://schemas.openxmlformats.org/drawingml/2006/main" prst="rect">
+            <a:avLst/>
+          </a:prstGeom>
+          <a:noFill xmlns:a="http://schemas.openxmlformats.org/drawingml/2006/main"/>
+          <a:ln xmlns:a="http://schemas.openxmlformats.org/drawingml/2006/main" w="0">
+            <a:noFill/>
+            <a:prstDash val="solid"/>
+          </a:ln>
+        </p:spPr>
+        <p:txBody>
+          <a:bodyPr xmlns:a="http://schemas.openxmlformats.org/drawingml/2006/main" wrap="square" lIns="54864" tIns="36576" rIns="54864" bIns="36576" anchor="ctr">
+            <a:noAutofit/>
+          </a:bodyPr>
+          <a:lstStyle xmlns:a="http://schemas.openxmlformats.org/drawingml/2006/main"/>
+          <a:p xmlns:a="http://schemas.openxmlformats.org/drawingml/2006/main">
+            <a:pPr algn="ctr">
+              <a:defRPr sz="975" b="0" i="0">
+                <a:solidFill>
+                  <a:srgbClr val="111111"/>
+                </a:solidFill>
+                <a:latin typeface="BIZ UDPゴシック"/>
+                <a:ea typeface="BIZ UDPゴシック"/>
+                <a:cs typeface="BIZ UDPゴシック"/>
+              </a:defRPr>
+            </a:pPr>
+            <a:r>
+              <a:rPr sz="1250" b="0" i="0" u="none">
+                <a:solidFill>
+                  <a:srgbClr val="111111"/>
+                </a:solidFill>
+                <a:latin typeface="BIZ UDPゴシック"/>
+                <a:ea typeface="BIZ UDPゴシック"/>
+                <a:cs typeface="BIZ UDPゴシック"/>
+              </a:rPr>
+              <a:t>新たな返品を記録</a:t>
+            </a:r>
+          </a:p>
+          <a:p xmlns:a="http://schemas.openxmlformats.org/drawingml/2006/main">
+            <a:pPr algn="ctr">
+              <a:defRPr sz="975" b="0" i="0">
+                <a:solidFill>
+                  <a:srgbClr val="111111"/>
+                </a:solidFill>
+                <a:latin typeface="BIZ UDPゴシック"/>
+                <a:ea typeface="BIZ UDPゴシック"/>
+                <a:cs typeface="BIZ UDPゴシック"/>
+              </a:defRPr>
+            </a:pPr>
+            <a:r>
+              <a:rPr sz="1250" b="0" i="0" u="none">
+                <a:solidFill>
+                  <a:srgbClr val="111111"/>
+                </a:solidFill>
+                <a:latin typeface="BIZ UDPゴシック"/>
+                <a:ea typeface="BIZ UDPゴシック"/>
+                <a:cs typeface="BIZ UDPゴシック"/>
+              </a:rPr>
+              <a:t>出力：理由の推移</a:t>
+            </a:r>
+          </a:p>
+        </p:txBody>
+      </p:sp>
+      <p:sp>
+        <p:nvSpPr>
+          <p:cNvPr id="50" name="page-05-decision-classification-complete">
+            <a:extLst xmlns:a="http://schemas.openxmlformats.org/drawingml/2006/main">
+              <a:ext uri="{FF2B5EF4-FFF2-40B4-BE49-F238E27FC236}">
+                <a16:creationId xmlns:a16="http://schemas.microsoft.com/office/drawing/2014/main" id="{41923259-6499-43B0-8D5E-37848B15CC92}"/>
+              </a:ext>
+            </a:extLst>
+          </p:cNvPr>
+          <p:cNvSpPr>
+            <a:spLocks xmlns:a="http://schemas.openxmlformats.org/drawingml/2006/main" noGrp="1"/>
+          </p:cNvSpPr>
+          <p:nvPr/>
+        </p:nvSpPr>
+        <p:spPr>
+          <a:xfrm xmlns:a="http://schemas.openxmlformats.org/drawingml/2006/main">
+            <a:off x="4709160" y="1783080"/>
+            <a:ext cx="1645920" cy="786384"/>
+          </a:xfrm>
+          <a:prstGeom xmlns:a="http://schemas.openxmlformats.org/drawingml/2006/main" prst="diamond">
+            <a:avLst/>
+          </a:prstGeom>
+          <a:solidFill xmlns:a="http://schemas.openxmlformats.org/drawingml/2006/main">
+            <a:srgbClr val="FFD966"/>
+          </a:solidFill>
+          <a:ln xmlns:a="http://schemas.openxmlformats.org/drawingml/2006/main" w="13335">
+            <a:solidFill>
+              <a:srgbClr val="ED7D31"/>
+            </a:solidFill>
+            <a:prstDash val="solid"/>
+          </a:ln>
+        </p:spPr>
+        <p:txBody xmlns:a="http://schemas.openxmlformats.org/drawingml/2006/main">
+          <a:bodyPr/>
+          <a:p/>
+        </p:txBody>
+      </p:sp>
+      <p:sp>
+        <p:nvSpPr>
+          <p:cNvPr id="51" name="page-05-object-050">
+            <a:extLst xmlns:a="http://schemas.openxmlformats.org/drawingml/2006/main">
+              <a:ext uri="{FF2B5EF4-FFF2-40B4-BE49-F238E27FC236}">
+                <a16:creationId xmlns:a16="http://schemas.microsoft.com/office/drawing/2014/main" id="{4D49744C-6094-4E88-ACBD-8404DFD08433}"/>
+              </a:ext>
+            </a:extLst>
+          </p:cNvPr>
+          <p:cNvSpPr>
+            <a:spLocks xmlns:a="http://schemas.openxmlformats.org/drawingml/2006/main" noGrp="1"/>
+          </p:cNvSpPr>
+          <p:nvPr/>
+        </p:nvSpPr>
+        <p:spPr>
+          <a:xfrm xmlns:a="http://schemas.openxmlformats.org/drawingml/2006/main">
+            <a:off x="4928616" y="2048256"/>
+            <a:ext cx="1207008" cy="256032"/>
           </a:xfrm>
           <a:prstGeom xmlns:a="http://schemas.openxmlformats.org/drawingml/2006/main" prst="rect">
             <a:avLst/>
@@ -10431,7 +11992,7 @@
               </a:defRPr>
             </a:pPr>
             <a:r>
-              <a:rPr sz="975" b="1" i="0">
+              <a:rPr sz="1300" b="1" i="0" u="none">
                 <a:solidFill>
                   <a:srgbClr val="111111"/>
                 </a:solidFill>
@@ -10439,1046 +12000,7 @@
                 <a:ea typeface="BIZ UDPゴシック"/>
                 <a:cs typeface="BIZ UDPゴシック"/>
               </a:rPr>
-              <a:t>上位商品を抽出</a:t>
-            </a:r>
-          </a:p>
-          <a:p xmlns:a="http://schemas.openxmlformats.org/drawingml/2006/main">
-            <a:pPr algn="ctr">
-              <a:defRPr sz="975" b="1" i="0">
-                <a:solidFill>
-                  <a:srgbClr val="111111"/>
-                </a:solidFill>
-                <a:latin typeface="BIZ UDPゴシック"/>
-                <a:ea typeface="BIZ UDPゴシック"/>
-                <a:cs typeface="BIZ UDPゴシック"/>
-              </a:defRPr>
-            </a:pPr>
-            <a:r>
-              <a:rPr sz="975" b="1" i="0">
-                <a:solidFill>
-                  <a:srgbClr val="111111"/>
-                </a:solidFill>
-                <a:latin typeface="BIZ UDPゴシック"/>
-                <a:ea typeface="BIZ UDPゴシック"/>
-                <a:cs typeface="BIZ UDPゴシック"/>
-              </a:rPr>
-              <a:t>出力：対象一覧</a:t>
-            </a:r>
-          </a:p>
-        </p:txBody>
-      </p:sp>
-      <p:sp>
-        <p:nvSpPr>
-          <p:cNvPr id="34" name="page-05-object-033">
-            <a:extLst xmlns:a="http://schemas.openxmlformats.org/drawingml/2006/main">
-              <a:ext uri="{FF2B5EF4-FFF2-40B4-BE49-F238E27FC236}">
-                <a16:creationId xmlns:a16="http://schemas.microsoft.com/office/drawing/2014/main" id="{ED7CE5A1-656A-452A-AE2B-0C2D7FE46292}"/>
-              </a:ext>
-            </a:extLst>
-          </p:cNvPr>
-          <p:cNvSpPr>
-            <a:spLocks xmlns:a="http://schemas.openxmlformats.org/drawingml/2006/main" noGrp="1"/>
-          </p:cNvSpPr>
-          <p:nvPr/>
-        </p:nvSpPr>
-        <p:spPr>
-          <a:xfrm xmlns:a="http://schemas.openxmlformats.org/drawingml/2006/main">
-            <a:off x="4457700" y="2847975"/>
-            <a:ext cx="2381250" cy="952500"/>
-          </a:xfrm>
-          <a:prstGeom xmlns:a="http://schemas.openxmlformats.org/drawingml/2006/main" prst="rect">
-            <a:avLst/>
-          </a:prstGeom>
-          <a:solidFill xmlns:a="http://schemas.openxmlformats.org/drawingml/2006/main">
-            <a:srgbClr val="F2F2F2"/>
-          </a:solidFill>
-          <a:ln xmlns:a="http://schemas.openxmlformats.org/drawingml/2006/main" w="6668">
-            <a:solidFill>
-              <a:srgbClr val="A6A6A6"/>
-            </a:solidFill>
-            <a:prstDash val="solid"/>
-          </a:ln>
-        </p:spPr>
-        <p:txBody xmlns:a="http://schemas.openxmlformats.org/drawingml/2006/main">
-          <a:bodyPr/>
-          <a:p/>
-        </p:txBody>
-      </p:sp>
-      <p:sp>
-        <p:nvSpPr>
-          <p:cNvPr id="35" name="page-05-object-034">
-            <a:extLst xmlns:a="http://schemas.openxmlformats.org/drawingml/2006/main">
-              <a:ext uri="{FF2B5EF4-FFF2-40B4-BE49-F238E27FC236}">
-                <a16:creationId xmlns:a16="http://schemas.microsoft.com/office/drawing/2014/main" id="{019D7F08-910E-488A-AE80-8E4D7D99E98A}"/>
-              </a:ext>
-            </a:extLst>
-          </p:cNvPr>
-          <p:cNvSpPr>
-            <a:spLocks xmlns:a="http://schemas.openxmlformats.org/drawingml/2006/main" noGrp="1"/>
-          </p:cNvSpPr>
-          <p:nvPr/>
-        </p:nvSpPr>
-        <p:spPr>
-          <a:xfrm xmlns:a="http://schemas.openxmlformats.org/drawingml/2006/main">
-            <a:off x="4543425" y="2981325"/>
-            <a:ext cx="2209800" cy="647700"/>
-          </a:xfrm>
-          <a:prstGeom xmlns:a="http://schemas.openxmlformats.org/drawingml/2006/main" prst="rect">
-            <a:avLst/>
-          </a:prstGeom>
-          <a:noFill xmlns:a="http://schemas.openxmlformats.org/drawingml/2006/main"/>
-          <a:ln xmlns:a="http://schemas.openxmlformats.org/drawingml/2006/main" w="0">
-            <a:noFill/>
-            <a:prstDash val="solid"/>
-          </a:ln>
-        </p:spPr>
-        <p:txBody>
-          <a:bodyPr xmlns:a="http://schemas.openxmlformats.org/drawingml/2006/main" wrap="square" lIns="38100" tIns="19050" rIns="38100" bIns="19050" anchor="ctr">
-            <a:noAutofit/>
-          </a:bodyPr>
-          <a:lstStyle xmlns:a="http://schemas.openxmlformats.org/drawingml/2006/main"/>
-          <a:p xmlns:a="http://schemas.openxmlformats.org/drawingml/2006/main">
-            <a:pPr algn="ctr">
-              <a:defRPr sz="975" b="1" i="0">
-                <a:solidFill>
-                  <a:srgbClr val="111111"/>
-                </a:solidFill>
-                <a:latin typeface="BIZ UDPゴシック"/>
-                <a:ea typeface="BIZ UDPゴシック"/>
-                <a:cs typeface="BIZ UDPゴシック"/>
-              </a:defRPr>
-            </a:pPr>
-            <a:r>
-              <a:rPr sz="975" b="1" i="0">
-                <a:solidFill>
-                  <a:srgbClr val="111111"/>
-                </a:solidFill>
-                <a:latin typeface="BIZ UDPゴシック"/>
-                <a:ea typeface="BIZ UDPゴシック"/>
-                <a:cs typeface="BIZ UDPゴシック"/>
-              </a:rPr>
-              <a:t>商品別粗利を分解</a:t>
-            </a:r>
-          </a:p>
-          <a:p xmlns:a="http://schemas.openxmlformats.org/drawingml/2006/main">
-            <a:pPr algn="ctr">
-              <a:defRPr sz="975" b="1" i="0">
-                <a:solidFill>
-                  <a:srgbClr val="111111"/>
-                </a:solidFill>
-                <a:latin typeface="BIZ UDPゴシック"/>
-                <a:ea typeface="BIZ UDPゴシック"/>
-                <a:cs typeface="BIZ UDPゴシック"/>
-              </a:defRPr>
-            </a:pPr>
-            <a:r>
-              <a:rPr sz="975" b="1" i="0">
-                <a:solidFill>
-                  <a:srgbClr val="111111"/>
-                </a:solidFill>
-                <a:latin typeface="BIZ UDPゴシック"/>
-                <a:ea typeface="BIZ UDPゴシック"/>
-                <a:cs typeface="BIZ UDPゴシック"/>
-              </a:rPr>
-              <a:t>出力：差分の要因</a:t>
-            </a:r>
-          </a:p>
-        </p:txBody>
-      </p:sp>
-      <p:sp>
-        <p:nvSpPr>
-          <p:cNvPr id="36" name="page-05-object-035">
-            <a:extLst xmlns:a="http://schemas.openxmlformats.org/drawingml/2006/main">
-              <a:ext uri="{FF2B5EF4-FFF2-40B4-BE49-F238E27FC236}">
-                <a16:creationId xmlns:a16="http://schemas.microsoft.com/office/drawing/2014/main" id="{586DA120-027A-4104-BA43-5CFC7E1AC95F}"/>
-              </a:ext>
-            </a:extLst>
-          </p:cNvPr>
-          <p:cNvSpPr>
-            <a:spLocks xmlns:a="http://schemas.openxmlformats.org/drawingml/2006/main" noGrp="1"/>
-          </p:cNvSpPr>
-          <p:nvPr/>
-        </p:nvSpPr>
-        <p:spPr>
-          <a:xfrm xmlns:a="http://schemas.openxmlformats.org/drawingml/2006/main">
-            <a:off x="6915150" y="2847975"/>
-            <a:ext cx="2381250" cy="952500"/>
-          </a:xfrm>
-          <a:prstGeom xmlns:a="http://schemas.openxmlformats.org/drawingml/2006/main" prst="rect">
-            <a:avLst/>
-          </a:prstGeom>
-          <a:solidFill xmlns:a="http://schemas.openxmlformats.org/drawingml/2006/main">
-            <a:srgbClr val="F2F2F2"/>
-          </a:solidFill>
-          <a:ln xmlns:a="http://schemas.openxmlformats.org/drawingml/2006/main" w="6668">
-            <a:solidFill>
-              <a:srgbClr val="A6A6A6"/>
-            </a:solidFill>
-            <a:prstDash val="solid"/>
-          </a:ln>
-        </p:spPr>
-        <p:txBody xmlns:a="http://schemas.openxmlformats.org/drawingml/2006/main">
-          <a:bodyPr/>
-          <a:p/>
-        </p:txBody>
-      </p:sp>
-      <p:sp>
-        <p:nvSpPr>
-          <p:cNvPr id="37" name="page-05-object-036">
-            <a:extLst xmlns:a="http://schemas.openxmlformats.org/drawingml/2006/main">
-              <a:ext uri="{FF2B5EF4-FFF2-40B4-BE49-F238E27FC236}">
-                <a16:creationId xmlns:a16="http://schemas.microsoft.com/office/drawing/2014/main" id="{328B9E73-C4B1-4097-AE36-518174EAEF3D}"/>
-              </a:ext>
-            </a:extLst>
-          </p:cNvPr>
-          <p:cNvSpPr>
-            <a:spLocks xmlns:a="http://schemas.openxmlformats.org/drawingml/2006/main" noGrp="1"/>
-          </p:cNvSpPr>
-          <p:nvPr/>
-        </p:nvSpPr>
-        <p:spPr>
-          <a:xfrm xmlns:a="http://schemas.openxmlformats.org/drawingml/2006/main">
-            <a:off x="7000875" y="2981325"/>
-            <a:ext cx="2209800" cy="647700"/>
-          </a:xfrm>
-          <a:prstGeom xmlns:a="http://schemas.openxmlformats.org/drawingml/2006/main" prst="rect">
-            <a:avLst/>
-          </a:prstGeom>
-          <a:noFill xmlns:a="http://schemas.openxmlformats.org/drawingml/2006/main"/>
-          <a:ln xmlns:a="http://schemas.openxmlformats.org/drawingml/2006/main" w="0">
-            <a:noFill/>
-            <a:prstDash val="solid"/>
-          </a:ln>
-        </p:spPr>
-        <p:txBody>
-          <a:bodyPr xmlns:a="http://schemas.openxmlformats.org/drawingml/2006/main" wrap="square" lIns="38100" tIns="19050" rIns="38100" bIns="19050" anchor="ctr">
-            <a:noAutofit/>
-          </a:bodyPr>
-          <a:lstStyle xmlns:a="http://schemas.openxmlformats.org/drawingml/2006/main"/>
-          <a:p xmlns:a="http://schemas.openxmlformats.org/drawingml/2006/main">
-            <a:pPr algn="ctr">
-              <a:defRPr sz="975" b="1" i="0">
-                <a:solidFill>
-                  <a:srgbClr val="111111"/>
-                </a:solidFill>
-                <a:latin typeface="BIZ UDPゴシック"/>
-                <a:ea typeface="BIZ UDPゴシック"/>
-                <a:cs typeface="BIZ UDPゴシック"/>
-              </a:defRPr>
-            </a:pPr>
-            <a:r>
-              <a:rPr sz="975" b="1" i="0">
-                <a:solidFill>
-                  <a:srgbClr val="111111"/>
-                </a:solidFill>
-                <a:latin typeface="BIZ UDPゴシック"/>
-                <a:ea typeface="BIZ UDPゴシック"/>
-                <a:cs typeface="BIZ UDPゴシック"/>
-              </a:rPr>
-              <a:t>商品説明を改稿</a:t>
-            </a:r>
-          </a:p>
-          <a:p xmlns:a="http://schemas.openxmlformats.org/drawingml/2006/main">
-            <a:pPr algn="ctr">
-              <a:defRPr sz="975" b="1" i="0">
-                <a:solidFill>
-                  <a:srgbClr val="111111"/>
-                </a:solidFill>
-                <a:latin typeface="BIZ UDPゴシック"/>
-                <a:ea typeface="BIZ UDPゴシック"/>
-                <a:cs typeface="BIZ UDPゴシック"/>
-              </a:defRPr>
-            </a:pPr>
-            <a:r>
-              <a:rPr sz="975" b="1" i="0">
-                <a:solidFill>
-                  <a:srgbClr val="111111"/>
-                </a:solidFill>
-                <a:latin typeface="BIZ UDPゴシック"/>
-                <a:ea typeface="BIZ UDPゴシック"/>
-                <a:cs typeface="BIZ UDPゴシック"/>
-              </a:rPr>
-              <a:t>出力：修正記録</a:t>
-            </a:r>
-          </a:p>
-        </p:txBody>
-      </p:sp>
-      <p:sp>
-        <p:nvSpPr>
-          <p:cNvPr id="38" name="page-05-object-037">
-            <a:extLst xmlns:a="http://schemas.openxmlformats.org/drawingml/2006/main">
-              <a:ext uri="{FF2B5EF4-FFF2-40B4-BE49-F238E27FC236}">
-                <a16:creationId xmlns:a16="http://schemas.microsoft.com/office/drawing/2014/main" id="{D635B3D2-974D-4610-9B9A-00BF599A326F}"/>
-              </a:ext>
-            </a:extLst>
-          </p:cNvPr>
-          <p:cNvSpPr>
-            <a:spLocks xmlns:a="http://schemas.openxmlformats.org/drawingml/2006/main" noGrp="1"/>
-          </p:cNvSpPr>
-          <p:nvPr/>
-        </p:nvSpPr>
-        <p:spPr>
-          <a:xfrm xmlns:a="http://schemas.openxmlformats.org/drawingml/2006/main">
-            <a:off x="9372600" y="2847975"/>
-            <a:ext cx="2381250" cy="952500"/>
-          </a:xfrm>
-          <a:prstGeom xmlns:a="http://schemas.openxmlformats.org/drawingml/2006/main" prst="rect">
-            <a:avLst/>
-          </a:prstGeom>
-          <a:solidFill xmlns:a="http://schemas.openxmlformats.org/drawingml/2006/main">
-            <a:srgbClr val="F2F2F2"/>
-          </a:solidFill>
-          <a:ln xmlns:a="http://schemas.openxmlformats.org/drawingml/2006/main" w="6668">
-            <a:solidFill>
-              <a:srgbClr val="A6A6A6"/>
-            </a:solidFill>
-            <a:prstDash val="solid"/>
-          </a:ln>
-        </p:spPr>
-        <p:txBody xmlns:a="http://schemas.openxmlformats.org/drawingml/2006/main">
-          <a:bodyPr/>
-          <a:p/>
-        </p:txBody>
-      </p:sp>
-      <p:sp>
-        <p:nvSpPr>
-          <p:cNvPr id="39" name="page-05-object-038">
-            <a:extLst xmlns:a="http://schemas.openxmlformats.org/drawingml/2006/main">
-              <a:ext uri="{FF2B5EF4-FFF2-40B4-BE49-F238E27FC236}">
-                <a16:creationId xmlns:a16="http://schemas.microsoft.com/office/drawing/2014/main" id="{F1A32E1A-B658-4C81-BEA0-13219CECA7E2}"/>
-              </a:ext>
-            </a:extLst>
-          </p:cNvPr>
-          <p:cNvSpPr>
-            <a:spLocks xmlns:a="http://schemas.openxmlformats.org/drawingml/2006/main" noGrp="1"/>
-          </p:cNvSpPr>
-          <p:nvPr/>
-        </p:nvSpPr>
-        <p:spPr>
-          <a:xfrm xmlns:a="http://schemas.openxmlformats.org/drawingml/2006/main">
-            <a:off x="9458325" y="2981325"/>
-            <a:ext cx="2209800" cy="647700"/>
-          </a:xfrm>
-          <a:prstGeom xmlns:a="http://schemas.openxmlformats.org/drawingml/2006/main" prst="rect">
-            <a:avLst/>
-          </a:prstGeom>
-          <a:noFill xmlns:a="http://schemas.openxmlformats.org/drawingml/2006/main"/>
-          <a:ln xmlns:a="http://schemas.openxmlformats.org/drawingml/2006/main" w="0">
-            <a:noFill/>
-            <a:prstDash val="solid"/>
-          </a:ln>
-        </p:spPr>
-        <p:txBody>
-          <a:bodyPr xmlns:a="http://schemas.openxmlformats.org/drawingml/2006/main" wrap="square" lIns="38100" tIns="19050" rIns="38100" bIns="19050" anchor="ctr">
-            <a:noAutofit/>
-          </a:bodyPr>
-          <a:lstStyle xmlns:a="http://schemas.openxmlformats.org/drawingml/2006/main"/>
-          <a:p xmlns:a="http://schemas.openxmlformats.org/drawingml/2006/main">
-            <a:pPr algn="ctr">
-              <a:defRPr sz="975" b="1" i="0">
-                <a:solidFill>
-                  <a:srgbClr val="111111"/>
-                </a:solidFill>
-                <a:latin typeface="BIZ UDPゴシック"/>
-                <a:ea typeface="BIZ UDPゴシック"/>
-                <a:cs typeface="BIZ UDPゴシック"/>
-              </a:defRPr>
-            </a:pPr>
-            <a:r>
-              <a:rPr sz="975" b="1" i="0">
-                <a:solidFill>
-                  <a:srgbClr val="111111"/>
-                </a:solidFill>
-                <a:latin typeface="BIZ UDPゴシック"/>
-                <a:ea typeface="BIZ UDPゴシック"/>
-                <a:cs typeface="BIZ UDPゴシック"/>
-              </a:rPr>
-              <a:t>返品率を週次比較</a:t>
-            </a:r>
-          </a:p>
-          <a:p xmlns:a="http://schemas.openxmlformats.org/drawingml/2006/main">
-            <a:pPr algn="ctr">
-              <a:defRPr sz="975" b="1" i="0">
-                <a:solidFill>
-                  <a:srgbClr val="111111"/>
-                </a:solidFill>
-                <a:latin typeface="BIZ UDPゴシック"/>
-                <a:ea typeface="BIZ UDPゴシック"/>
-                <a:cs typeface="BIZ UDPゴシック"/>
-              </a:defRPr>
-            </a:pPr>
-            <a:r>
-              <a:rPr sz="975" b="1" i="0">
-                <a:solidFill>
-                  <a:srgbClr val="111111"/>
-                </a:solidFill>
-                <a:latin typeface="BIZ UDPゴシック"/>
-                <a:ea typeface="BIZ UDPゴシック"/>
-                <a:cs typeface="BIZ UDPゴシック"/>
-              </a:rPr>
-              <a:t>出力：効果の記録</a:t>
-            </a:r>
-          </a:p>
-        </p:txBody>
-      </p:sp>
-      <p:sp>
-        <p:nvSpPr>
-          <p:cNvPr id="40" name="page-05-object-039">
-            <a:extLst xmlns:a="http://schemas.openxmlformats.org/drawingml/2006/main">
-              <a:ext uri="{FF2B5EF4-FFF2-40B4-BE49-F238E27FC236}">
-                <a16:creationId xmlns:a16="http://schemas.microsoft.com/office/drawing/2014/main" id="{0E49CCA1-861A-4AFB-8B61-EA724A5A521A}"/>
-              </a:ext>
-            </a:extLst>
-          </p:cNvPr>
-          <p:cNvSpPr>
-            <a:spLocks xmlns:a="http://schemas.openxmlformats.org/drawingml/2006/main" noGrp="1"/>
-          </p:cNvSpPr>
-          <p:nvPr/>
-        </p:nvSpPr>
-        <p:spPr>
-          <a:xfrm xmlns:a="http://schemas.openxmlformats.org/drawingml/2006/main">
-            <a:off x="285750" y="3914775"/>
-            <a:ext cx="1571625" cy="952500"/>
-          </a:xfrm>
-          <a:prstGeom xmlns:a="http://schemas.openxmlformats.org/drawingml/2006/main" prst="rect">
-            <a:avLst/>
-          </a:prstGeom>
-          <a:solidFill xmlns:a="http://schemas.openxmlformats.org/drawingml/2006/main">
-            <a:srgbClr val="FFF2CC"/>
-          </a:solidFill>
-          <a:ln xmlns:a="http://schemas.openxmlformats.org/drawingml/2006/main" w="9525">
-            <a:solidFill>
-              <a:srgbClr val="A6A6A6"/>
-            </a:solidFill>
-            <a:prstDash val="solid"/>
-          </a:ln>
-        </p:spPr>
-        <p:txBody xmlns:a="http://schemas.openxmlformats.org/drawingml/2006/main">
-          <a:bodyPr/>
-          <a:p/>
-        </p:txBody>
-      </p:sp>
-      <p:sp>
-        <p:nvSpPr>
-          <p:cNvPr id="41" name="page-05-object-040">
-            <a:extLst xmlns:a="http://schemas.openxmlformats.org/drawingml/2006/main">
-              <a:ext uri="{FF2B5EF4-FFF2-40B4-BE49-F238E27FC236}">
-                <a16:creationId xmlns:a16="http://schemas.microsoft.com/office/drawing/2014/main" id="{FF81B98C-B7D6-41FB-BBBB-DA2E4365286E}"/>
-              </a:ext>
-            </a:extLst>
-          </p:cNvPr>
-          <p:cNvSpPr>
-            <a:spLocks xmlns:a="http://schemas.openxmlformats.org/drawingml/2006/main" noGrp="1"/>
-          </p:cNvSpPr>
-          <p:nvPr/>
-        </p:nvSpPr>
-        <p:spPr>
-          <a:xfrm xmlns:a="http://schemas.openxmlformats.org/drawingml/2006/main">
-            <a:off x="371475" y="4219575"/>
-            <a:ext cx="1400175" cy="342900"/>
-          </a:xfrm>
-          <a:prstGeom xmlns:a="http://schemas.openxmlformats.org/drawingml/2006/main" prst="rect">
-            <a:avLst/>
-          </a:prstGeom>
-          <a:noFill xmlns:a="http://schemas.openxmlformats.org/drawingml/2006/main"/>
-          <a:ln xmlns:a="http://schemas.openxmlformats.org/drawingml/2006/main" w="0">
-            <a:noFill/>
-            <a:prstDash val="solid"/>
-          </a:ln>
-        </p:spPr>
-        <p:txBody>
-          <a:bodyPr xmlns:a="http://schemas.openxmlformats.org/drawingml/2006/main" wrap="square" lIns="38100" tIns="19050" rIns="38100" bIns="19050" anchor="ctr">
-            <a:noAutofit/>
-          </a:bodyPr>
-          <a:lstStyle xmlns:a="http://schemas.openxmlformats.org/drawingml/2006/main"/>
-          <a:p xmlns:a="http://schemas.openxmlformats.org/drawingml/2006/main">
-            <a:pPr algn="ctr">
-              <a:defRPr sz="1200" b="1" i="0">
-                <a:solidFill>
-                  <a:srgbClr val="111111"/>
-                </a:solidFill>
-                <a:latin typeface="BIZ UDPゴシック"/>
-                <a:ea typeface="BIZ UDPゴシック"/>
-                <a:cs typeface="BIZ UDPゴシック"/>
-              </a:defRPr>
-            </a:pPr>
-            <a:r>
-              <a:rPr sz="1200" b="1" i="0">
-                <a:solidFill>
-                  <a:srgbClr val="111111"/>
-                </a:solidFill>
-                <a:latin typeface="BIZ UDPゴシック"/>
-                <a:ea typeface="BIZ UDPゴシック"/>
-                <a:cs typeface="BIZ UDPゴシック"/>
-              </a:rPr>
-              <a:t>顧客対応</a:t>
-            </a:r>
-          </a:p>
-        </p:txBody>
-      </p:sp>
-      <p:sp>
-        <p:nvSpPr>
-          <p:cNvPr id="42" name="page-05-object-041">
-            <a:extLst xmlns:a="http://schemas.openxmlformats.org/drawingml/2006/main">
-              <a:ext uri="{FF2B5EF4-FFF2-40B4-BE49-F238E27FC236}">
-                <a16:creationId xmlns:a16="http://schemas.microsoft.com/office/drawing/2014/main" id="{317E712A-F594-4153-943F-144AF0FDACB3}"/>
-              </a:ext>
-            </a:extLst>
-          </p:cNvPr>
-          <p:cNvSpPr>
-            <a:spLocks xmlns:a="http://schemas.openxmlformats.org/drawingml/2006/main" noGrp="1"/>
-          </p:cNvSpPr>
-          <p:nvPr/>
-        </p:nvSpPr>
-        <p:spPr>
-          <a:xfrm xmlns:a="http://schemas.openxmlformats.org/drawingml/2006/main">
-            <a:off x="2000250" y="3914775"/>
-            <a:ext cx="2381250" cy="952500"/>
-          </a:xfrm>
-          <a:prstGeom xmlns:a="http://schemas.openxmlformats.org/drawingml/2006/main" prst="rect">
-            <a:avLst/>
-          </a:prstGeom>
-          <a:solidFill xmlns:a="http://schemas.openxmlformats.org/drawingml/2006/main">
-            <a:srgbClr val="FFFFFF"/>
-          </a:solidFill>
-          <a:ln xmlns:a="http://schemas.openxmlformats.org/drawingml/2006/main" w="6668">
-            <a:solidFill>
-              <a:srgbClr val="A6A6A6"/>
-            </a:solidFill>
-            <a:prstDash val="solid"/>
-          </a:ln>
-        </p:spPr>
-        <p:txBody xmlns:a="http://schemas.openxmlformats.org/drawingml/2006/main">
-          <a:bodyPr/>
-          <a:p/>
-        </p:txBody>
-      </p:sp>
-      <p:sp>
-        <p:nvSpPr>
-          <p:cNvPr id="43" name="page-05-object-042">
-            <a:extLst xmlns:a="http://schemas.openxmlformats.org/drawingml/2006/main">
-              <a:ext uri="{FF2B5EF4-FFF2-40B4-BE49-F238E27FC236}">
-                <a16:creationId xmlns:a16="http://schemas.microsoft.com/office/drawing/2014/main" id="{27B2C152-BE75-4757-9886-AC3A04B3FF9E}"/>
-              </a:ext>
-            </a:extLst>
-          </p:cNvPr>
-          <p:cNvSpPr>
-            <a:spLocks xmlns:a="http://schemas.openxmlformats.org/drawingml/2006/main" noGrp="1"/>
-          </p:cNvSpPr>
-          <p:nvPr/>
-        </p:nvSpPr>
-        <p:spPr>
-          <a:xfrm xmlns:a="http://schemas.openxmlformats.org/drawingml/2006/main">
-            <a:off x="2085975" y="4048125"/>
-            <a:ext cx="2209800" cy="647700"/>
-          </a:xfrm>
-          <a:prstGeom xmlns:a="http://schemas.openxmlformats.org/drawingml/2006/main" prst="rect">
-            <a:avLst/>
-          </a:prstGeom>
-          <a:noFill xmlns:a="http://schemas.openxmlformats.org/drawingml/2006/main"/>
-          <a:ln xmlns:a="http://schemas.openxmlformats.org/drawingml/2006/main" w="0">
-            <a:noFill/>
-            <a:prstDash val="solid"/>
-          </a:ln>
-        </p:spPr>
-        <p:txBody>
-          <a:bodyPr xmlns:a="http://schemas.openxmlformats.org/drawingml/2006/main" wrap="square" lIns="38100" tIns="19050" rIns="38100" bIns="19050" anchor="ctr">
-            <a:noAutofit/>
-          </a:bodyPr>
-          <a:lstStyle xmlns:a="http://schemas.openxmlformats.org/drawingml/2006/main"/>
-          <a:p xmlns:a="http://schemas.openxmlformats.org/drawingml/2006/main">
-            <a:pPr algn="ctr">
-              <a:defRPr sz="975" b="0" i="0">
-                <a:solidFill>
-                  <a:srgbClr val="111111"/>
-                </a:solidFill>
-                <a:latin typeface="BIZ UDPゴシック"/>
-                <a:ea typeface="BIZ UDPゴシック"/>
-                <a:cs typeface="BIZ UDPゴシック"/>
-              </a:defRPr>
-            </a:pPr>
-            <a:r>
-              <a:rPr sz="975" b="0" i="0">
-                <a:solidFill>
-                  <a:srgbClr val="111111"/>
-                </a:solidFill>
-                <a:latin typeface="BIZ UDPゴシック"/>
-                <a:ea typeface="BIZ UDPゴシック"/>
-                <a:cs typeface="BIZ UDPゴシック"/>
-              </a:rPr>
-              <a:t>返品記録を用意</a:t>
-            </a:r>
-          </a:p>
-          <a:p xmlns:a="http://schemas.openxmlformats.org/drawingml/2006/main">
-            <a:pPr algn="ctr">
-              <a:defRPr sz="975" b="0" i="0">
-                <a:solidFill>
-                  <a:srgbClr val="111111"/>
-                </a:solidFill>
-                <a:latin typeface="BIZ UDPゴシック"/>
-                <a:ea typeface="BIZ UDPゴシック"/>
-                <a:cs typeface="BIZ UDPゴシック"/>
-              </a:defRPr>
-            </a:pPr>
-            <a:r>
-              <a:rPr sz="975" b="0" i="0">
-                <a:solidFill>
-                  <a:srgbClr val="111111"/>
-                </a:solidFill>
-                <a:latin typeface="BIZ UDPゴシック"/>
-                <a:ea typeface="BIZ UDPゴシック"/>
-                <a:cs typeface="BIZ UDPゴシック"/>
-              </a:rPr>
-              <a:t>出力：返品の一覧</a:t>
-            </a:r>
-          </a:p>
-        </p:txBody>
-      </p:sp>
-      <p:sp>
-        <p:nvSpPr>
-          <p:cNvPr id="44" name="page-05-object-043">
-            <a:extLst xmlns:a="http://schemas.openxmlformats.org/drawingml/2006/main">
-              <a:ext uri="{FF2B5EF4-FFF2-40B4-BE49-F238E27FC236}">
-                <a16:creationId xmlns:a16="http://schemas.microsoft.com/office/drawing/2014/main" id="{3F45CCD4-433D-4905-881D-E8AD7BE16A90}"/>
-              </a:ext>
-            </a:extLst>
-          </p:cNvPr>
-          <p:cNvSpPr>
-            <a:spLocks xmlns:a="http://schemas.openxmlformats.org/drawingml/2006/main" noGrp="1"/>
-          </p:cNvSpPr>
-          <p:nvPr/>
-        </p:nvSpPr>
-        <p:spPr>
-          <a:xfrm xmlns:a="http://schemas.openxmlformats.org/drawingml/2006/main">
-            <a:off x="4457700" y="3914775"/>
-            <a:ext cx="2381250" cy="952500"/>
-          </a:xfrm>
-          <a:prstGeom xmlns:a="http://schemas.openxmlformats.org/drawingml/2006/main" prst="rect">
-            <a:avLst/>
-          </a:prstGeom>
-          <a:solidFill xmlns:a="http://schemas.openxmlformats.org/drawingml/2006/main">
-            <a:srgbClr val="FFFFFF"/>
-          </a:solidFill>
-          <a:ln xmlns:a="http://schemas.openxmlformats.org/drawingml/2006/main" w="6668">
-            <a:solidFill>
-              <a:srgbClr val="A6A6A6"/>
-            </a:solidFill>
-            <a:prstDash val="solid"/>
-          </a:ln>
-        </p:spPr>
-        <p:txBody xmlns:a="http://schemas.openxmlformats.org/drawingml/2006/main">
-          <a:bodyPr/>
-          <a:p/>
-        </p:txBody>
-      </p:sp>
-      <p:sp>
-        <p:nvSpPr>
-          <p:cNvPr id="45" name="page-05-object-044">
-            <a:extLst xmlns:a="http://schemas.openxmlformats.org/drawingml/2006/main">
-              <a:ext uri="{FF2B5EF4-FFF2-40B4-BE49-F238E27FC236}">
-                <a16:creationId xmlns:a16="http://schemas.microsoft.com/office/drawing/2014/main" id="{3E7B9B6C-E745-4AF4-8245-C78318B70BAB}"/>
-              </a:ext>
-            </a:extLst>
-          </p:cNvPr>
-          <p:cNvSpPr>
-            <a:spLocks xmlns:a="http://schemas.openxmlformats.org/drawingml/2006/main" noGrp="1"/>
-          </p:cNvSpPr>
-          <p:nvPr/>
-        </p:nvSpPr>
-        <p:spPr>
-          <a:xfrm xmlns:a="http://schemas.openxmlformats.org/drawingml/2006/main">
-            <a:off x="4543425" y="4048125"/>
-            <a:ext cx="2209800" cy="647700"/>
-          </a:xfrm>
-          <a:prstGeom xmlns:a="http://schemas.openxmlformats.org/drawingml/2006/main" prst="rect">
-            <a:avLst/>
-          </a:prstGeom>
-          <a:noFill xmlns:a="http://schemas.openxmlformats.org/drawingml/2006/main"/>
-          <a:ln xmlns:a="http://schemas.openxmlformats.org/drawingml/2006/main" w="0">
-            <a:noFill/>
-            <a:prstDash val="solid"/>
-          </a:ln>
-        </p:spPr>
-        <p:txBody>
-          <a:bodyPr xmlns:a="http://schemas.openxmlformats.org/drawingml/2006/main" wrap="square" lIns="38100" tIns="19050" rIns="38100" bIns="19050" anchor="ctr">
-            <a:noAutofit/>
-          </a:bodyPr>
-          <a:lstStyle xmlns:a="http://schemas.openxmlformats.org/drawingml/2006/main"/>
-          <a:p xmlns:a="http://schemas.openxmlformats.org/drawingml/2006/main">
-            <a:pPr algn="ctr">
-              <a:defRPr sz="975" b="0" i="0">
-                <a:solidFill>
-                  <a:srgbClr val="111111"/>
-                </a:solidFill>
-                <a:latin typeface="BIZ UDPゴシック"/>
-                <a:ea typeface="BIZ UDPゴシック"/>
-                <a:cs typeface="BIZ UDPゴシック"/>
-              </a:defRPr>
-            </a:pPr>
-            <a:r>
-              <a:rPr sz="975" b="0" i="0">
-                <a:solidFill>
-                  <a:srgbClr val="111111"/>
-                </a:solidFill>
-                <a:latin typeface="BIZ UDPゴシック"/>
-                <a:ea typeface="BIZ UDPゴシック"/>
-                <a:cs typeface="BIZ UDPゴシック"/>
-              </a:rPr>
-              <a:t>返品理由を分類</a:t>
-            </a:r>
-          </a:p>
-          <a:p xmlns:a="http://schemas.openxmlformats.org/drawingml/2006/main">
-            <a:pPr algn="ctr">
-              <a:defRPr sz="975" b="0" i="0">
-                <a:solidFill>
-                  <a:srgbClr val="111111"/>
-                </a:solidFill>
-                <a:latin typeface="BIZ UDPゴシック"/>
-                <a:ea typeface="BIZ UDPゴシック"/>
-                <a:cs typeface="BIZ UDPゴシック"/>
-              </a:defRPr>
-            </a:pPr>
-            <a:r>
-              <a:rPr sz="975" b="0" i="0">
-                <a:solidFill>
-                  <a:srgbClr val="111111"/>
-                </a:solidFill>
-                <a:latin typeface="BIZ UDPゴシック"/>
-                <a:ea typeface="BIZ UDPゴシック"/>
-                <a:cs typeface="BIZ UDPゴシック"/>
-              </a:rPr>
-              <a:t>10/09・分類率100%</a:t>
-            </a:r>
-          </a:p>
-        </p:txBody>
-      </p:sp>
-      <p:sp>
-        <p:nvSpPr>
-          <p:cNvPr id="46" name="page-05-object-045">
-            <a:extLst xmlns:a="http://schemas.openxmlformats.org/drawingml/2006/main">
-              <a:ext uri="{FF2B5EF4-FFF2-40B4-BE49-F238E27FC236}">
-                <a16:creationId xmlns:a16="http://schemas.microsoft.com/office/drawing/2014/main" id="{C5E9AA23-E05F-4EEA-B9E5-B88E884F1CF1}"/>
-              </a:ext>
-            </a:extLst>
-          </p:cNvPr>
-          <p:cNvSpPr>
-            <a:spLocks xmlns:a="http://schemas.openxmlformats.org/drawingml/2006/main" noGrp="1"/>
-          </p:cNvSpPr>
-          <p:nvPr/>
-        </p:nvSpPr>
-        <p:spPr>
-          <a:xfrm xmlns:a="http://schemas.openxmlformats.org/drawingml/2006/main">
-            <a:off x="6915150" y="3914775"/>
-            <a:ext cx="2381250" cy="952500"/>
-          </a:xfrm>
-          <a:prstGeom xmlns:a="http://schemas.openxmlformats.org/drawingml/2006/main" prst="rect">
-            <a:avLst/>
-          </a:prstGeom>
-          <a:solidFill xmlns:a="http://schemas.openxmlformats.org/drawingml/2006/main">
-            <a:srgbClr val="FFFFFF"/>
-          </a:solidFill>
-          <a:ln xmlns:a="http://schemas.openxmlformats.org/drawingml/2006/main" w="6668">
-            <a:solidFill>
-              <a:srgbClr val="A6A6A6"/>
-            </a:solidFill>
-            <a:prstDash val="solid"/>
-          </a:ln>
-        </p:spPr>
-        <p:txBody xmlns:a="http://schemas.openxmlformats.org/drawingml/2006/main">
-          <a:bodyPr/>
-          <a:p/>
-        </p:txBody>
-      </p:sp>
-      <p:sp>
-        <p:nvSpPr>
-          <p:cNvPr id="47" name="page-05-object-046">
-            <a:extLst xmlns:a="http://schemas.openxmlformats.org/drawingml/2006/main">
-              <a:ext uri="{FF2B5EF4-FFF2-40B4-BE49-F238E27FC236}">
-                <a16:creationId xmlns:a16="http://schemas.microsoft.com/office/drawing/2014/main" id="{FAA5B7D4-92B1-4C7C-A740-F7B5B98A5D15}"/>
-              </a:ext>
-            </a:extLst>
-          </p:cNvPr>
-          <p:cNvSpPr>
-            <a:spLocks xmlns:a="http://schemas.openxmlformats.org/drawingml/2006/main" noGrp="1"/>
-          </p:cNvSpPr>
-          <p:nvPr/>
-        </p:nvSpPr>
-        <p:spPr>
-          <a:xfrm xmlns:a="http://schemas.openxmlformats.org/drawingml/2006/main">
-            <a:off x="7000875" y="4048125"/>
-            <a:ext cx="2209800" cy="647700"/>
-          </a:xfrm>
-          <a:prstGeom xmlns:a="http://schemas.openxmlformats.org/drawingml/2006/main" prst="rect">
-            <a:avLst/>
-          </a:prstGeom>
-          <a:noFill xmlns:a="http://schemas.openxmlformats.org/drawingml/2006/main"/>
-          <a:ln xmlns:a="http://schemas.openxmlformats.org/drawingml/2006/main" w="0">
-            <a:noFill/>
-            <a:prstDash val="solid"/>
-          </a:ln>
-        </p:spPr>
-        <p:txBody>
-          <a:bodyPr xmlns:a="http://schemas.openxmlformats.org/drawingml/2006/main" wrap="square" lIns="38100" tIns="19050" rIns="38100" bIns="19050" anchor="ctr">
-            <a:noAutofit/>
-          </a:bodyPr>
-          <a:lstStyle xmlns:a="http://schemas.openxmlformats.org/drawingml/2006/main"/>
-          <a:p xmlns:a="http://schemas.openxmlformats.org/drawingml/2006/main">
-            <a:pPr algn="ctr">
-              <a:defRPr sz="975" b="0" i="0">
-                <a:solidFill>
-                  <a:srgbClr val="111111"/>
-                </a:solidFill>
-                <a:latin typeface="BIZ UDPゴシック"/>
-                <a:ea typeface="BIZ UDPゴシック"/>
-                <a:cs typeface="BIZ UDPゴシック"/>
-              </a:defRPr>
-            </a:pPr>
-            <a:r>
-              <a:rPr sz="975" b="0" i="0">
-                <a:solidFill>
-                  <a:srgbClr val="111111"/>
-                </a:solidFill>
-                <a:latin typeface="BIZ UDPゴシック"/>
-                <a:ea typeface="BIZ UDPゴシック"/>
-                <a:cs typeface="BIZ UDPゴシック"/>
-              </a:rPr>
-              <a:t>説明と理由を照合</a:t>
-            </a:r>
-          </a:p>
-          <a:p xmlns:a="http://schemas.openxmlformats.org/drawingml/2006/main">
-            <a:pPr algn="ctr">
-              <a:defRPr sz="975" b="0" i="0">
-                <a:solidFill>
-                  <a:srgbClr val="111111"/>
-                </a:solidFill>
-                <a:latin typeface="BIZ UDPゴシック"/>
-                <a:ea typeface="BIZ UDPゴシック"/>
-                <a:cs typeface="BIZ UDPゴシック"/>
-              </a:defRPr>
-            </a:pPr>
-            <a:r>
-              <a:rPr sz="975" b="0" i="0">
-                <a:solidFill>
-                  <a:srgbClr val="111111"/>
-                </a:solidFill>
-                <a:latin typeface="BIZ UDPゴシック"/>
-                <a:ea typeface="BIZ UDPゴシック"/>
-                <a:cs typeface="BIZ UDPゴシック"/>
-              </a:rPr>
-              <a:t>入力：修正記録</a:t>
-            </a:r>
-          </a:p>
-        </p:txBody>
-      </p:sp>
-      <p:sp>
-        <p:nvSpPr>
-          <p:cNvPr id="48" name="page-05-object-047">
-            <a:extLst xmlns:a="http://schemas.openxmlformats.org/drawingml/2006/main">
-              <a:ext uri="{FF2B5EF4-FFF2-40B4-BE49-F238E27FC236}">
-                <a16:creationId xmlns:a16="http://schemas.microsoft.com/office/drawing/2014/main" id="{8E7937D5-559B-4854-AEB4-645B1CC905C5}"/>
-              </a:ext>
-            </a:extLst>
-          </p:cNvPr>
-          <p:cNvSpPr>
-            <a:spLocks xmlns:a="http://schemas.openxmlformats.org/drawingml/2006/main" noGrp="1"/>
-          </p:cNvSpPr>
-          <p:nvPr/>
-        </p:nvSpPr>
-        <p:spPr>
-          <a:xfrm xmlns:a="http://schemas.openxmlformats.org/drawingml/2006/main">
-            <a:off x="9372600" y="3914775"/>
-            <a:ext cx="2381250" cy="952500"/>
-          </a:xfrm>
-          <a:prstGeom xmlns:a="http://schemas.openxmlformats.org/drawingml/2006/main" prst="rect">
-            <a:avLst/>
-          </a:prstGeom>
-          <a:solidFill xmlns:a="http://schemas.openxmlformats.org/drawingml/2006/main">
-            <a:srgbClr val="FFFFFF"/>
-          </a:solidFill>
-          <a:ln xmlns:a="http://schemas.openxmlformats.org/drawingml/2006/main" w="6668">
-            <a:solidFill>
-              <a:srgbClr val="A6A6A6"/>
-            </a:solidFill>
-            <a:prstDash val="solid"/>
-          </a:ln>
-        </p:spPr>
-        <p:txBody xmlns:a="http://schemas.openxmlformats.org/drawingml/2006/main">
-          <a:bodyPr/>
-          <a:p/>
-        </p:txBody>
-      </p:sp>
-      <p:sp>
-        <p:nvSpPr>
-          <p:cNvPr id="49" name="page-05-object-048">
-            <a:extLst xmlns:a="http://schemas.openxmlformats.org/drawingml/2006/main">
-              <a:ext uri="{FF2B5EF4-FFF2-40B4-BE49-F238E27FC236}">
-                <a16:creationId xmlns:a16="http://schemas.microsoft.com/office/drawing/2014/main" id="{3662AAE5-C290-4C03-9128-DE0B88DB34C8}"/>
-              </a:ext>
-            </a:extLst>
-          </p:cNvPr>
-          <p:cNvSpPr>
-            <a:spLocks xmlns:a="http://schemas.openxmlformats.org/drawingml/2006/main" noGrp="1"/>
-          </p:cNvSpPr>
-          <p:nvPr/>
-        </p:nvSpPr>
-        <p:spPr>
-          <a:xfrm xmlns:a="http://schemas.openxmlformats.org/drawingml/2006/main">
-            <a:off x="9458325" y="4048125"/>
-            <a:ext cx="2209800" cy="647700"/>
-          </a:xfrm>
-          <a:prstGeom xmlns:a="http://schemas.openxmlformats.org/drawingml/2006/main" prst="rect">
-            <a:avLst/>
-          </a:prstGeom>
-          <a:noFill xmlns:a="http://schemas.openxmlformats.org/drawingml/2006/main"/>
-          <a:ln xmlns:a="http://schemas.openxmlformats.org/drawingml/2006/main" w="0">
-            <a:noFill/>
-            <a:prstDash val="solid"/>
-          </a:ln>
-        </p:spPr>
-        <p:txBody>
-          <a:bodyPr xmlns:a="http://schemas.openxmlformats.org/drawingml/2006/main" wrap="square" lIns="38100" tIns="19050" rIns="38100" bIns="19050" anchor="ctr">
-            <a:noAutofit/>
-          </a:bodyPr>
-          <a:lstStyle xmlns:a="http://schemas.openxmlformats.org/drawingml/2006/main"/>
-          <a:p xmlns:a="http://schemas.openxmlformats.org/drawingml/2006/main">
-            <a:pPr algn="ctr">
-              <a:defRPr sz="975" b="0" i="0">
-                <a:solidFill>
-                  <a:srgbClr val="111111"/>
-                </a:solidFill>
-                <a:latin typeface="BIZ UDPゴシック"/>
-                <a:ea typeface="BIZ UDPゴシック"/>
-                <a:cs typeface="BIZ UDPゴシック"/>
-              </a:defRPr>
-            </a:pPr>
-            <a:r>
-              <a:rPr sz="975" b="0" i="0">
-                <a:solidFill>
-                  <a:srgbClr val="111111"/>
-                </a:solidFill>
-                <a:latin typeface="BIZ UDPゴシック"/>
-                <a:ea typeface="BIZ UDPゴシック"/>
-                <a:cs typeface="BIZ UDPゴシック"/>
-              </a:rPr>
-              <a:t>新たな返品を記録</a:t>
-            </a:r>
-          </a:p>
-          <a:p xmlns:a="http://schemas.openxmlformats.org/drawingml/2006/main">
-            <a:pPr algn="ctr">
-              <a:defRPr sz="975" b="0" i="0">
-                <a:solidFill>
-                  <a:srgbClr val="111111"/>
-                </a:solidFill>
-                <a:latin typeface="BIZ UDPゴシック"/>
-                <a:ea typeface="BIZ UDPゴシック"/>
-                <a:cs typeface="BIZ UDPゴシック"/>
-              </a:defRPr>
-            </a:pPr>
-            <a:r>
-              <a:rPr sz="975" b="0" i="0">
-                <a:solidFill>
-                  <a:srgbClr val="111111"/>
-                </a:solidFill>
-                <a:latin typeface="BIZ UDPゴシック"/>
-                <a:ea typeface="BIZ UDPゴシック"/>
-                <a:cs typeface="BIZ UDPゴシック"/>
-              </a:rPr>
-              <a:t>出力：理由の推移</a:t>
-            </a:r>
-          </a:p>
-        </p:txBody>
-      </p:sp>
-      <p:sp>
-        <p:nvSpPr>
-          <p:cNvPr id="50" name="page-05-object-049">
-            <a:extLst xmlns:a="http://schemas.openxmlformats.org/drawingml/2006/main">
-              <a:ext uri="{FF2B5EF4-FFF2-40B4-BE49-F238E27FC236}">
-                <a16:creationId xmlns:a16="http://schemas.microsoft.com/office/drawing/2014/main" id="{41923259-6499-43B0-8D5E-37848B15CC92}"/>
-              </a:ext>
-            </a:extLst>
-          </p:cNvPr>
-          <p:cNvSpPr>
-            <a:spLocks xmlns:a="http://schemas.openxmlformats.org/drawingml/2006/main" noGrp="1"/>
-          </p:cNvSpPr>
-          <p:nvPr/>
-        </p:nvSpPr>
-        <p:spPr>
-          <a:xfrm xmlns:a="http://schemas.openxmlformats.org/drawingml/2006/main">
-            <a:off x="6553200" y="4905375"/>
-            <a:ext cx="704850" cy="552450"/>
-          </a:xfrm>
-          <a:prstGeom xmlns:a="http://schemas.openxmlformats.org/drawingml/2006/main" prst="diamond">
-            <a:avLst/>
-          </a:prstGeom>
-          <a:solidFill xmlns:a="http://schemas.openxmlformats.org/drawingml/2006/main">
-            <a:srgbClr val="FFD966"/>
-          </a:solidFill>
-          <a:ln xmlns:a="http://schemas.openxmlformats.org/drawingml/2006/main" w="13335">
-            <a:solidFill>
-              <a:srgbClr val="ED7D31"/>
-            </a:solidFill>
-            <a:prstDash val="solid"/>
-          </a:ln>
-        </p:spPr>
-        <p:txBody xmlns:a="http://schemas.openxmlformats.org/drawingml/2006/main">
-          <a:bodyPr/>
-          <a:p/>
-        </p:txBody>
-      </p:sp>
-      <p:sp>
-        <p:nvSpPr>
-          <p:cNvPr id="51" name="page-05-object-050">
-            <a:extLst xmlns:a="http://schemas.openxmlformats.org/drawingml/2006/main">
-              <a:ext uri="{FF2B5EF4-FFF2-40B4-BE49-F238E27FC236}">
-                <a16:creationId xmlns:a16="http://schemas.microsoft.com/office/drawing/2014/main" id="{4D49744C-6094-4E88-ACBD-8404DFD08433}"/>
-              </a:ext>
-            </a:extLst>
-          </p:cNvPr>
-          <p:cNvSpPr>
-            <a:spLocks xmlns:a="http://schemas.openxmlformats.org/drawingml/2006/main" noGrp="1"/>
-          </p:cNvSpPr>
-          <p:nvPr/>
-        </p:nvSpPr>
-        <p:spPr>
-          <a:xfrm xmlns:a="http://schemas.openxmlformats.org/drawingml/2006/main">
-            <a:off x="6600825" y="5057775"/>
-            <a:ext cx="609600" cy="238125"/>
-          </a:xfrm>
-          <a:prstGeom xmlns:a="http://schemas.openxmlformats.org/drawingml/2006/main" prst="rect">
-            <a:avLst/>
-          </a:prstGeom>
-          <a:noFill xmlns:a="http://schemas.openxmlformats.org/drawingml/2006/main"/>
-          <a:ln xmlns:a="http://schemas.openxmlformats.org/drawingml/2006/main" w="0">
-            <a:noFill/>
-            <a:prstDash val="solid"/>
-          </a:ln>
-        </p:spPr>
-        <p:txBody>
-          <a:bodyPr xmlns:a="http://schemas.openxmlformats.org/drawingml/2006/main" wrap="square" lIns="38100" tIns="19050" rIns="38100" bIns="19050" anchor="ctr">
-            <a:noAutofit/>
-          </a:bodyPr>
-          <a:lstStyle xmlns:a="http://schemas.openxmlformats.org/drawingml/2006/main"/>
-          <a:p xmlns:a="http://schemas.openxmlformats.org/drawingml/2006/main">
-            <a:pPr algn="ctr">
-              <a:defRPr sz="975" b="1" i="0">
-                <a:solidFill>
-                  <a:srgbClr val="111111"/>
-                </a:solidFill>
-                <a:latin typeface="BIZ UDPゴシック"/>
-                <a:ea typeface="BIZ UDPゴシック"/>
-                <a:cs typeface="BIZ UDPゴシック"/>
-              </a:defRPr>
-            </a:pPr>
-            <a:r>
-              <a:rPr sz="975" b="1" i="0">
-                <a:solidFill>
-                  <a:srgbClr val="111111"/>
-                </a:solidFill>
-                <a:latin typeface="BIZ UDPゴシック"/>
-                <a:ea typeface="BIZ UDPゴシック"/>
-                <a:cs typeface="BIZ UDPゴシック"/>
-              </a:rPr>
-              <a:t>確認</a:t>
+              <a:t>分類完了？</a:t>
             </a:r>
           </a:p>
         </p:txBody>
@@ -11499,8 +12021,8 @@
         </p:nvSpPr>
         <p:spPr>
           <a:xfrm xmlns:a="http://schemas.openxmlformats.org/drawingml/2006/main">
-            <a:off x="2000250" y="4905375"/>
-            <a:ext cx="4095750" cy="552450"/>
+            <a:off x="2011680" y="5193792"/>
+            <a:ext cx="5394960" cy="329184"/>
           </a:xfrm>
           <a:prstGeom xmlns:a="http://schemas.openxmlformats.org/drawingml/2006/main" prst="rect">
             <a:avLst/>
@@ -11536,8 +12058,8 @@
         </p:nvSpPr>
         <p:spPr>
           <a:xfrm xmlns:a="http://schemas.openxmlformats.org/drawingml/2006/main">
-            <a:off x="2152650" y="5067300"/>
-            <a:ext cx="3790950" cy="238125"/>
+            <a:off x="2011680" y="5193792"/>
+            <a:ext cx="5394960" cy="329184"/>
           </a:xfrm>
           <a:prstGeom xmlns:a="http://schemas.openxmlformats.org/drawingml/2006/main" prst="rect">
             <a:avLst/>
@@ -11549,7 +12071,7 @@
           </a:ln>
         </p:spPr>
         <p:txBody>
-          <a:bodyPr xmlns:a="http://schemas.openxmlformats.org/drawingml/2006/main" wrap="square" lIns="38100" tIns="19050" rIns="38100" bIns="19050" anchor="t">
+          <a:bodyPr xmlns:a="http://schemas.openxmlformats.org/drawingml/2006/main" wrap="square" lIns="38100" rIns="38100" bIns="0" anchor="t">
             <a:noAutofit/>
           </a:bodyPr>
           <a:lstStyle xmlns:a="http://schemas.openxmlformats.org/drawingml/2006/main"/>
@@ -11565,7 +12087,7 @@
               </a:defRPr>
             </a:pPr>
             <a:r>
-              <a:rPr sz="1050" b="1" i="0">
+              <a:rPr sz="1150" b="1" i="0" u="none">
                 <a:solidFill>
                   <a:srgbClr val="092B4C"/>
                 </a:solidFill>
@@ -11573,7 +12095,7 @@
                 <a:ea typeface="BIZ UDPゴシック"/>
                 <a:cs typeface="BIZ UDPゴシック"/>
               </a:rPr>
-              <a:t>引き継ぐ記録｜返品理由・説明の修正・商品別粗利</a:t>
+              <a:t>記録：対象一覧・理由分類・改稿・商品別粗利</a:t>
             </a:r>
           </a:p>
         </p:txBody>
@@ -11594,8 +12116,8 @@
         </p:nvSpPr>
         <p:spPr>
           <a:xfrm xmlns:a="http://schemas.openxmlformats.org/drawingml/2006/main">
-            <a:off x="7715250" y="4905375"/>
-            <a:ext cx="4114800" cy="552450"/>
+            <a:off x="7589520" y="5193792"/>
+            <a:ext cx="4242816" cy="329184"/>
           </a:xfrm>
           <a:prstGeom xmlns:a="http://schemas.openxmlformats.org/drawingml/2006/main" prst="rect">
             <a:avLst/>
@@ -11631,8 +12153,8 @@
         </p:nvSpPr>
         <p:spPr>
           <a:xfrm xmlns:a="http://schemas.openxmlformats.org/drawingml/2006/main">
-            <a:off x="7867650" y="5067300"/>
-            <a:ext cx="3810000" cy="238125"/>
+            <a:off x="7589520" y="5193792"/>
+            <a:ext cx="4242816" cy="329184"/>
           </a:xfrm>
           <a:prstGeom xmlns:a="http://schemas.openxmlformats.org/drawingml/2006/main" prst="rect">
             <a:avLst/>
@@ -11644,7 +12166,7 @@
           </a:ln>
         </p:spPr>
         <p:txBody>
-          <a:bodyPr xmlns:a="http://schemas.openxmlformats.org/drawingml/2006/main" wrap="square" lIns="38100" tIns="19050" rIns="38100" bIns="19050" anchor="t">
+          <a:bodyPr xmlns:a="http://schemas.openxmlformats.org/drawingml/2006/main" wrap="square" lIns="38100" rIns="38100" bIns="0" anchor="t">
             <a:noAutofit/>
           </a:bodyPr>
           <a:lstStyle xmlns:a="http://schemas.openxmlformats.org/drawingml/2006/main"/>
@@ -11660,7 +12182,7 @@
               </a:defRPr>
             </a:pPr>
             <a:r>
-              <a:rPr sz="1050" b="1" i="0">
+              <a:rPr sz="1150" b="1" i="0" u="none">
                 <a:solidFill>
                   <a:srgbClr val="C00000"/>
                 </a:solidFill>
@@ -11668,7 +12190,7 @@
                 <a:ea typeface="BIZ UDPゴシック"/>
                 <a:cs typeface="BIZ UDPゴシック"/>
               </a:rPr>
-              <a:t>要確認｜説明と実物の差、値引きと商品構成の影響</a:t>
+              <a:t>要確認：説明との差、値引き・商品構成</a:t>
             </a:r>
           </a:p>
         </p:txBody>
@@ -11792,7 +12314,7 @@
               </a:defRPr>
             </a:pPr>
             <a:r>
-              <a:rPr sz="1200" b="1" i="0">
+              <a:rPr sz="1200" b="1" i="0" u="none">
                 <a:solidFill>
                   <a:srgbClr val="FFFFFF"/>
                 </a:solidFill>
@@ -11850,7 +12372,7 @@
               </a:defRPr>
             </a:pPr>
             <a:r>
-              <a:rPr sz="1275" b="1" i="0">
+              <a:rPr sz="1275" b="1" i="0" u="none">
                 <a:solidFill>
                   <a:srgbClr val="111111"/>
                 </a:solidFill>
@@ -11858,7 +12380,7 @@
                 <a:ea typeface="BIZ UDPゴシック"/>
                 <a:cs typeface="BIZ UDPゴシック"/>
               </a:rPr>
-              <a:t>担当者が記録と期限を共有し、事業責任者は確認した結果を基に判断する</a:t>
+              <a:t>分類表と改稿記録を渡し、効果・粗利の記録がそろってから責任者が判断する</a:t>
             </a:r>
           </a:p>
         </p:txBody>
@@ -11908,7 +12430,7 @@
               </a:defRPr>
             </a:pPr>
             <a:r>
-              <a:rPr sz="675" b="0" i="0">
+              <a:rPr sz="675" b="0" i="0" u="none">
                 <a:solidFill>
                   <a:srgbClr val="666666"/>
                 </a:solidFill>
@@ -11917,6 +12439,368 @@
                 <a:cs typeface="BIZ UDPゴシック"/>
               </a:rPr>
               <a:t>注：架空の業務設計案。既存のシステム構成や実際の組織を示すものではない。</a:t>
+            </a:r>
+          </a:p>
+        </p:txBody>
+      </p:sp>
+      <p:sp xmlns:a="http://schemas.openxmlformats.org/drawingml/2006/main">
+        <p:nvSpPr>
+          <p:cNvPr id="63" name="page-05-handoff-label-scope"/>
+          <p:cNvSpPr txBox="1"/>
+          <p:nvPr/>
+        </p:nvSpPr>
+        <p:spPr>
+          <a:xfrm>
+            <a:off x="3108960" y="2670048"/>
+            <a:ext cx="640080" cy="182880"/>
+          </a:xfrm>
+          <a:prstGeom prst="rect">
+            <a:avLst/>
+          </a:prstGeom>
+          <a:noFill/>
+        </p:spPr>
+        <p:txBody>
+          <a:bodyPr wrap="none" lIns="0" rIns="0" tIns="0" bIns="0">
+            <a:spAutoFit/>
+          </a:bodyPr>
+          <a:lstStyle/>
+          <a:p>
+            <a:pPr algn="ctr"/>
+            <a:r>
+              <a:rPr sz="1100" b="0">
+                <a:solidFill>
+                  <a:srgbClr val="2474B5"/>
+                </a:solidFill>
+                <a:latin typeface="BIZ UDPゴシック"/>
+              </a:rPr>
+              <a:t>対象</a:t>
+            </a:r>
+          </a:p>
+        </p:txBody>
+      </p:sp>
+      <p:sp xmlns:a="http://schemas.openxmlformats.org/drawingml/2006/main">
+        <p:nvSpPr>
+          <p:cNvPr id="65" name="page-05-handoff-label-target-list"/>
+          <p:cNvSpPr txBox="1"/>
+          <p:nvPr/>
+        </p:nvSpPr>
+        <p:spPr>
+          <a:xfrm>
+            <a:off x="3108960" y="3785615"/>
+            <a:ext cx="640080" cy="182880"/>
+          </a:xfrm>
+          <a:prstGeom prst="rect">
+            <a:avLst/>
+          </a:prstGeom>
+          <a:noFill/>
+        </p:spPr>
+        <p:txBody>
+          <a:bodyPr wrap="none" lIns="0" rIns="0" tIns="0" bIns="0">
+            <a:spAutoFit/>
+          </a:bodyPr>
+          <a:lstStyle/>
+          <a:p>
+            <a:pPr algn="ctr"/>
+            <a:r>
+              <a:rPr sz="1100" b="0">
+                <a:solidFill>
+                  <a:srgbClr val="2474B5"/>
+                </a:solidFill>
+                <a:latin typeface="BIZ UDPゴシック"/>
+              </a:rPr>
+              <a:t>対象一覧</a:t>
+            </a:r>
+          </a:p>
+        </p:txBody>
+      </p:sp>
+      <p:sp xmlns:a="http://schemas.openxmlformats.org/drawingml/2006/main">
+        <p:nvSpPr>
+          <p:cNvPr id="67" name="page-05-handoff-label-return-list"/>
+          <p:cNvSpPr txBox="1"/>
+          <p:nvPr/>
+        </p:nvSpPr>
+        <p:spPr>
+          <a:xfrm>
+            <a:off x="3941063" y="4242816"/>
+            <a:ext cx="621792" cy="182880"/>
+          </a:xfrm>
+          <a:prstGeom prst="rect">
+            <a:avLst/>
+          </a:prstGeom>
+          <a:noFill/>
+        </p:spPr>
+        <p:txBody>
+          <a:bodyPr wrap="none" lIns="0" rIns="0" tIns="0" bIns="0">
+            <a:spAutoFit/>
+          </a:bodyPr>
+          <a:lstStyle/>
+          <a:p>
+            <a:pPr algn="ctr"/>
+            <a:r>
+              <a:rPr sz="1100" b="0">
+                <a:solidFill>
+                  <a:srgbClr val="2474B5"/>
+                </a:solidFill>
+                <a:latin typeface="BIZ UDPゴシック"/>
+              </a:rPr>
+              <a:t>返品一覧</a:t>
+            </a:r>
+          </a:p>
+        </p:txBody>
+      </p:sp>
+      <p:sp xmlns:a="http://schemas.openxmlformats.org/drawingml/2006/main">
+        <p:nvSpPr>
+          <p:cNvPr id="69" name="page-05-handoff-label-classification"/>
+          <p:cNvSpPr txBox="1"/>
+          <p:nvPr/>
+        </p:nvSpPr>
+        <p:spPr>
+          <a:xfrm>
+            <a:off x="5660136" y="3154680"/>
+            <a:ext cx="804672" cy="365760"/>
+          </a:xfrm>
+          <a:prstGeom prst="rect">
+            <a:avLst/>
+          </a:prstGeom>
+          <a:noFill/>
+        </p:spPr>
+        <p:txBody>
+          <a:bodyPr wrap="none" lIns="0" rIns="0" tIns="0" bIns="0">
+            <a:spAutoFit/>
+          </a:bodyPr>
+          <a:lstStyle/>
+          <a:p>
+            <a:pPr algn="ctr"/>
+            <a:r>
+              <a:rPr sz="1100" b="0">
+                <a:solidFill>
+                  <a:srgbClr val="2474B5"/>
+                </a:solidFill>
+                <a:latin typeface="BIZ UDPゴシック"/>
+              </a:rPr>
+              <a:t>分類表を</a:t>
+            </a:r>
+          </a:p>
+          <a:p>
+            <a:pPr algn="ctr"/>
+            <a:r>
+              <a:rPr sz="1100" b="0">
+                <a:solidFill>
+                  <a:srgbClr val="2474B5"/>
+                </a:solidFill>
+                <a:latin typeface="BIZ UDPゴシック"/>
+              </a:rPr>
+              <a:t>引き継ぐ</a:t>
+            </a:r>
+          </a:p>
+        </p:txBody>
+      </p:sp>
+      <p:sp xmlns:a="http://schemas.openxmlformats.org/drawingml/2006/main">
+        <p:nvSpPr>
+          <p:cNvPr id="72" name="page-05-handoff-label-yes"/>
+          <p:cNvSpPr txBox="1"/>
+          <p:nvPr/>
+        </p:nvSpPr>
+        <p:spPr>
+          <a:xfrm>
+            <a:off x="6492240" y="1901952"/>
+            <a:ext cx="2194560" cy="182880"/>
+          </a:xfrm>
+          <a:prstGeom prst="rect">
+            <a:avLst/>
+          </a:prstGeom>
+          <a:noFill/>
+        </p:spPr>
+        <p:txBody>
+          <a:bodyPr wrap="none" lIns="0" rIns="0" tIns="0" bIns="0">
+            <a:spAutoFit/>
+          </a:bodyPr>
+          <a:lstStyle/>
+          <a:p>
+            <a:pPr algn="ctr"/>
+            <a:r>
+              <a:rPr sz="1100" b="0">
+                <a:solidFill>
+                  <a:srgbClr val="2474B5"/>
+                </a:solidFill>
+                <a:latin typeface="BIZ UDPゴシック"/>
+              </a:rPr>
+              <a:t>はい：修正対象</a:t>
+            </a:r>
+          </a:p>
+        </p:txBody>
+      </p:sp>
+      <p:sp xmlns:a="http://schemas.openxmlformats.org/drawingml/2006/main">
+        <p:nvSpPr>
+          <p:cNvPr id="76" name="page-05-handoff-label-no"/>
+          <p:cNvSpPr txBox="1"/>
+          <p:nvPr/>
+        </p:nvSpPr>
+        <p:spPr>
+          <a:xfrm>
+            <a:off x="3941063" y="1901952"/>
+            <a:ext cx="749808" cy="182880"/>
+          </a:xfrm>
+          <a:prstGeom prst="rect">
+            <a:avLst/>
+          </a:prstGeom>
+          <a:noFill/>
+        </p:spPr>
+        <p:txBody>
+          <a:bodyPr wrap="none" lIns="0" rIns="0" tIns="0" bIns="0">
+            <a:spAutoFit/>
+          </a:bodyPr>
+          <a:lstStyle/>
+          <a:p>
+            <a:pPr algn="ctr"/>
+            <a:r>
+              <a:rPr sz="1100" b="0">
+                <a:solidFill>
+                  <a:srgbClr val="C00000"/>
+                </a:solidFill>
+                <a:latin typeface="BIZ UDPゴシック"/>
+              </a:rPr>
+              <a:t>不足は戻す</a:t>
+            </a:r>
+          </a:p>
+        </p:txBody>
+      </p:sp>
+      <p:sp xmlns:a="http://schemas.openxmlformats.org/drawingml/2006/main">
+        <p:nvSpPr>
+          <p:cNvPr id="78" name="page-05-handoff-label-rewrite-record"/>
+          <p:cNvSpPr txBox="1"/>
+          <p:nvPr/>
+        </p:nvSpPr>
+        <p:spPr>
+          <a:xfrm>
+            <a:off x="8229600" y="3785615"/>
+            <a:ext cx="804672" cy="182880"/>
+          </a:xfrm>
+          <a:prstGeom prst="rect">
+            <a:avLst/>
+          </a:prstGeom>
+          <a:noFill/>
+        </p:spPr>
+        <p:txBody>
+          <a:bodyPr wrap="none" lIns="0" rIns="0" tIns="0" bIns="0">
+            <a:spAutoFit/>
+          </a:bodyPr>
+          <a:lstStyle/>
+          <a:p>
+            <a:pPr algn="ctr"/>
+            <a:r>
+              <a:rPr sz="1100" b="0">
+                <a:solidFill>
+                  <a:srgbClr val="2474B5"/>
+                </a:solidFill>
+                <a:latin typeface="BIZ UDPゴシック"/>
+              </a:rPr>
+              <a:t>改稿記録</a:t>
+            </a:r>
+          </a:p>
+        </p:txBody>
+      </p:sp>
+      <p:sp xmlns:a="http://schemas.openxmlformats.org/drawingml/2006/main">
+        <p:nvSpPr>
+          <p:cNvPr id="80" name="page-05-handoff-label-check-result"/>
+          <p:cNvSpPr txBox="1"/>
+          <p:nvPr/>
+        </p:nvSpPr>
+        <p:spPr>
+          <a:xfrm>
+            <a:off x="9061704" y="4242816"/>
+            <a:ext cx="621792" cy="182880"/>
+          </a:xfrm>
+          <a:prstGeom prst="rect">
+            <a:avLst/>
+          </a:prstGeom>
+          <a:noFill/>
+        </p:spPr>
+        <p:txBody>
+          <a:bodyPr wrap="none" lIns="0" rIns="0" tIns="0" bIns="0">
+            <a:spAutoFit/>
+          </a:bodyPr>
+          <a:lstStyle/>
+          <a:p>
+            <a:pPr algn="ctr"/>
+            <a:r>
+              <a:rPr sz="1100" b="0">
+                <a:solidFill>
+                  <a:srgbClr val="2474B5"/>
+                </a:solidFill>
+                <a:latin typeface="BIZ UDPゴシック"/>
+              </a:rPr>
+              <a:t>照合結果</a:t>
+            </a:r>
+          </a:p>
+        </p:txBody>
+      </p:sp>
+      <p:sp xmlns:a="http://schemas.openxmlformats.org/drawingml/2006/main">
+        <p:nvSpPr>
+          <p:cNvPr id="82" name="page-05-handoff-label-new-return-record"/>
+          <p:cNvSpPr txBox="1"/>
+          <p:nvPr/>
+        </p:nvSpPr>
+        <p:spPr>
+          <a:xfrm>
+            <a:off x="10789920" y="3785615"/>
+            <a:ext cx="804672" cy="182880"/>
+          </a:xfrm>
+          <a:prstGeom prst="rect">
+            <a:avLst/>
+          </a:prstGeom>
+          <a:noFill/>
+        </p:spPr>
+        <p:txBody>
+          <a:bodyPr wrap="none" lIns="0" rIns="0" tIns="0" bIns="0">
+            <a:spAutoFit/>
+          </a:bodyPr>
+          <a:lstStyle/>
+          <a:p>
+            <a:pPr algn="ctr"/>
+            <a:r>
+              <a:rPr sz="1100" b="0">
+                <a:solidFill>
+                  <a:srgbClr val="2474B5"/>
+                </a:solidFill>
+                <a:latin typeface="BIZ UDPゴシック"/>
+              </a:rPr>
+              <a:t>返品記録</a:t>
+            </a:r>
+          </a:p>
+        </p:txBody>
+      </p:sp>
+      <p:sp xmlns:a="http://schemas.openxmlformats.org/drawingml/2006/main">
+        <p:nvSpPr>
+          <p:cNvPr id="84" name="page-05-handoff-label-effect-margin"/>
+          <p:cNvSpPr txBox="1"/>
+          <p:nvPr/>
+        </p:nvSpPr>
+        <p:spPr>
+          <a:xfrm>
+            <a:off x="10780776" y="2679192"/>
+            <a:ext cx="859536" cy="182880"/>
+          </a:xfrm>
+          <a:prstGeom prst="rect">
+            <a:avLst/>
+          </a:prstGeom>
+          <a:noFill/>
+        </p:spPr>
+        <p:txBody>
+          <a:bodyPr wrap="none" lIns="0" rIns="0" tIns="0" bIns="0">
+            <a:spAutoFit/>
+          </a:bodyPr>
+          <a:lstStyle/>
+          <a:p>
+            <a:pPr algn="ctr"/>
+            <a:r>
+              <a:rPr sz="1100" b="0">
+                <a:solidFill>
+                  <a:srgbClr val="2474B5"/>
+                </a:solidFill>
+                <a:latin typeface="BIZ UDPゴシック"/>
+              </a:rPr>
+              <a:t>効果・粗利</a:t>
             </a:r>
           </a:p>
         </p:txBody>
@@ -12032,7 +12916,7 @@
               </a:defRPr>
             </a:pPr>
             <a:r>
-              <a:rPr sz="2100" b="1" i="0">
+              <a:rPr sz="2100" b="1" i="0" u="none">
                 <a:solidFill>
                   <a:srgbClr val="FFFFFF"/>
                 </a:solidFill>
@@ -12127,7 +13011,7 @@
               </a:defRPr>
             </a:pPr>
             <a:r>
-              <a:rPr sz="1125" b="1" i="0">
+              <a:rPr sz="1125" b="1" i="0" u="none">
                 <a:solidFill>
                   <a:srgbClr val="FFFFFF"/>
                 </a:solidFill>
@@ -12296,7 +13180,7 @@
               </a:defRPr>
             </a:pPr>
             <a:r>
-              <a:rPr sz="975" b="0" i="0">
+              <a:rPr sz="975" b="0" i="0" u="none">
                 <a:solidFill>
                   <a:srgbClr val="FFFFFF"/>
                 </a:solidFill>
@@ -12354,7 +13238,7 @@
               </a:defRPr>
             </a:pPr>
             <a:r>
-              <a:rPr sz="975" b="0" i="0">
+              <a:rPr sz="975" b="0" i="0" u="none">
                 <a:solidFill>
                   <a:srgbClr val="666666"/>
                 </a:solidFill>
@@ -12412,7 +13296,7 @@
               </a:defRPr>
             </a:pPr>
             <a:r>
-              <a:rPr sz="2100" b="1" i="0">
+              <a:rPr sz="2100" b="1" i="0" u="none">
                 <a:solidFill>
                   <a:srgbClr val="111111"/>
                 </a:solidFill>
@@ -12470,7 +13354,7 @@
               </a:defRPr>
             </a:pPr>
             <a:r>
-              <a:rPr sz="1125" b="1" i="0">
+              <a:rPr sz="1125" b="1" i="0" u="none">
                 <a:solidFill>
                   <a:srgbClr val="2474B5"/>
                 </a:solidFill>
@@ -12676,7 +13560,7 @@
               </a:defRPr>
             </a:pPr>
             <a:r>
-              <a:rPr sz="1500" b="1" i="0">
+              <a:rPr sz="1500" b="1" i="0" u="none">
                 <a:solidFill>
                   <a:srgbClr val="FFFFFF"/>
                 </a:solidFill>
@@ -12771,7 +13655,7 @@
               </a:defRPr>
             </a:pPr>
             <a:r>
-              <a:rPr sz="1125" b="1" i="0">
+              <a:rPr sz="1125" b="1" i="0" u="none">
                 <a:solidFill>
                   <a:srgbClr val="111111"/>
                 </a:solidFill>
@@ -12866,7 +13750,7 @@
               </a:defRPr>
             </a:pPr>
             <a:r>
-              <a:rPr sz="1125" b="1" i="0">
+              <a:rPr sz="1125" b="1" i="0" u="none">
                 <a:solidFill>
                   <a:srgbClr val="111111"/>
                 </a:solidFill>
@@ -12961,7 +13845,7 @@
               </a:defRPr>
             </a:pPr>
             <a:r>
-              <a:rPr sz="1125" b="1" i="0">
+              <a:rPr sz="1125" b="1" i="0" u="none">
                 <a:solidFill>
                   <a:srgbClr val="111111"/>
                 </a:solidFill>
@@ -13093,7 +13977,7 @@
               </a:defRPr>
             </a:pPr>
             <a:r>
-              <a:rPr sz="1500" b="1" i="0">
+              <a:rPr sz="1500" b="1" i="0" u="none">
                 <a:solidFill>
                   <a:srgbClr val="FFFFFF"/>
                 </a:solidFill>
@@ -13188,7 +14072,7 @@
               </a:defRPr>
             </a:pPr>
             <a:r>
-              <a:rPr sz="1125" b="1" i="0">
+              <a:rPr sz="1125" b="1" i="0" u="none">
                 <a:solidFill>
                   <a:srgbClr val="111111"/>
                 </a:solidFill>
@@ -13283,7 +14167,7 @@
               </a:defRPr>
             </a:pPr>
             <a:r>
-              <a:rPr sz="1125" b="1" i="0">
+              <a:rPr sz="1125" b="1" i="0" u="none">
                 <a:solidFill>
                   <a:srgbClr val="111111"/>
                 </a:solidFill>
@@ -13378,7 +14262,7 @@
               </a:defRPr>
             </a:pPr>
             <a:r>
-              <a:rPr sz="1125" b="1" i="0">
+              <a:rPr sz="1125" b="1" i="0" u="none">
                 <a:solidFill>
                   <a:srgbClr val="111111"/>
                 </a:solidFill>
@@ -13510,7 +14394,7 @@
               </a:defRPr>
             </a:pPr>
             <a:r>
-              <a:rPr sz="1500" b="1" i="0">
+              <a:rPr sz="1500" b="1" i="0" u="none">
                 <a:solidFill>
                   <a:srgbClr val="FFFFFF"/>
                 </a:solidFill>
@@ -13605,7 +14489,7 @@
               </a:defRPr>
             </a:pPr>
             <a:r>
-              <a:rPr sz="1125" b="1" i="0">
+              <a:rPr sz="1125" b="1" i="0" u="none">
                 <a:solidFill>
                   <a:srgbClr val="111111"/>
                 </a:solidFill>
@@ -13700,7 +14584,7 @@
               </a:defRPr>
             </a:pPr>
             <a:r>
-              <a:rPr sz="1125" b="1" i="0">
+              <a:rPr sz="1125" b="1" i="0" u="none">
                 <a:solidFill>
                   <a:srgbClr val="111111"/>
                 </a:solidFill>
@@ -13795,7 +14679,7 @@
               </a:defRPr>
             </a:pPr>
             <a:r>
-              <a:rPr sz="1125" b="1" i="0">
+              <a:rPr sz="1125" b="1" i="0" u="none">
                 <a:solidFill>
                   <a:srgbClr val="111111"/>
                 </a:solidFill>
@@ -13890,7 +14774,7 @@
               </a:defRPr>
             </a:pPr>
             <a:r>
-              <a:rPr sz="1125" b="1" i="0">
+              <a:rPr sz="1125" b="1" i="0" u="none">
                 <a:solidFill>
                   <a:srgbClr val="111111"/>
                 </a:solidFill>
@@ -13913,7 +14797,7 @@
               </a:defRPr>
             </a:pPr>
             <a:r>
-              <a:rPr sz="1125" b="1" i="0">
+              <a:rPr sz="1125" b="1" i="0" u="none">
                 <a:solidFill>
                   <a:srgbClr val="111111"/>
                 </a:solidFill>
@@ -14045,7 +14929,7 @@
               </a:defRPr>
             </a:pPr>
             <a:r>
-              <a:rPr sz="1200" b="1" i="0">
+              <a:rPr sz="1200" b="1" i="0" u="none">
                 <a:solidFill>
                   <a:srgbClr val="FFFFFF"/>
                 </a:solidFill>
@@ -14103,7 +14987,7 @@
               </a:defRPr>
             </a:pPr>
             <a:r>
-              <a:rPr sz="1275" b="1" i="0">
+              <a:rPr sz="1275" b="1" i="0" u="none">
                 <a:solidFill>
                   <a:srgbClr val="111111"/>
                 </a:solidFill>
@@ -14161,7 +15045,7 @@
               </a:defRPr>
             </a:pPr>
             <a:r>
-              <a:rPr sz="675" b="0" i="0">
+              <a:rPr sz="675" b="0" i="0" u="none">
                 <a:solidFill>
                   <a:srgbClr val="666666"/>
                 </a:solidFill>
